--- a/Lectures/03.PINN/Lecture_PINN.pptx
+++ b/Lectures/03.PINN/Lecture_PINN.pptx
@@ -5,10 +5,10 @@
     <p:sldMasterId id="2147483648" r:id="rId1"/>
   </p:sldMasterIdLst>
   <p:notesMasterIdLst>
-    <p:notesMasterId r:id="rId21"/>
+    <p:notesMasterId r:id="rId18"/>
   </p:notesMasterIdLst>
   <p:handoutMasterIdLst>
-    <p:handoutMasterId r:id="rId22"/>
+    <p:handoutMasterId r:id="rId19"/>
   </p:handoutMasterIdLst>
   <p:sldIdLst>
     <p:sldId id="256" r:id="rId2"/>
@@ -25,11 +25,8 @@
     <p:sldId id="1099" r:id="rId13"/>
     <p:sldId id="1100" r:id="rId14"/>
     <p:sldId id="1101" r:id="rId15"/>
-    <p:sldId id="1105" r:id="rId16"/>
-    <p:sldId id="1102" r:id="rId17"/>
-    <p:sldId id="1104" r:id="rId18"/>
-    <p:sldId id="1103" r:id="rId19"/>
-    <p:sldId id="1088" r:id="rId20"/>
+    <p:sldId id="1102" r:id="rId16"/>
+    <p:sldId id="1088" r:id="rId17"/>
   </p:sldIdLst>
   <p:sldSz cx="9144000" cy="6858000" type="letter"/>
   <p:notesSz cx="9601200" cy="7315200"/>
@@ -3020,13 +3017,9 @@
           <a:lstStyle/>
           <a:p>
             <a:r>
-              <a:rPr lang="en-US" dirty="0"/>
-              <a:t>PINNs: </a:t>
-            </a:r>
-            <a:r>
               <a:rPr lang="en-US" dirty="0">
                 <a:solidFill>
-                  <a:schemeClr val="accent1"/>
+                  <a:srgbClr val="0033CC"/>
                 </a:solidFill>
               </a:rPr>
               <a:t>Problem of Weights</a:t>
@@ -3034,8 +3027,8 @@
           </a:p>
         </p:txBody>
       </p:sp>
-      <mc:AlternateContent xmlns:mc="http://schemas.openxmlformats.org/markup-compatibility/2006">
-        <mc:Choice xmlns:a14="http://schemas.microsoft.com/office/drawing/2010/main" Requires="a14">
+      <mc:AlternateContent xmlns:mc="http://schemas.openxmlformats.org/markup-compatibility/2006" xmlns:a14="http://schemas.microsoft.com/office/drawing/2010/main">
+        <mc:Choice Requires="a14">
           <p:sp>
             <p:nvSpPr>
               <p:cNvPr id="8" name="Content Placeholder 7">
@@ -3062,7 +3055,7 @@
                 </a:pPr>
                 <a:r>
                   <a:rPr lang="en-US" dirty="0"/>
-                  <a:t>One problem with the average loss</a:t>
+                  <a:t>One problem with the average loss (aka objective function)</a:t>
                 </a:r>
               </a:p>
               <a:p>
@@ -3163,7 +3156,7 @@
                                   </a:solidFill>
                                   <a:latin typeface="Cambria Math" panose="02040503050406030204" pitchFamily="18" charset="0"/>
                                 </a:rPr>
-                                <m:t>𝑂𝐷𝐸</m:t>
+                                <m:t>𝑜𝑑𝑒</m:t>
                               </m:r>
                             </m:sub>
                           </m:sSub>
@@ -3188,7 +3181,7 @@
                             <a:rPr lang="en-US" b="0" i="1" smtClean="0">
                               <a:latin typeface="Cambria Math" panose="02040503050406030204" pitchFamily="18" charset="0"/>
                             </a:rPr>
-                            <m:t>𝑂𝐷𝐸</m:t>
+                            <m:t>𝑜𝑑𝑒</m:t>
                           </m:r>
                         </m:sub>
                       </m:sSub>
@@ -3254,7 +3247,7 @@
                                   </a:solidFill>
                                   <a:latin typeface="Cambria Math" panose="02040503050406030204" pitchFamily="18" charset="0"/>
                                 </a:rPr>
-                                <m:t>𝐶</m:t>
+                                <m:t>𝑖𝑛𝑖𝑡</m:t>
                               </m:r>
                             </m:sub>
                           </m:sSub>
@@ -3276,10 +3269,10 @@
                         </m:e>
                         <m:sub>
                           <m:r>
-                            <a:rPr lang="en-US" i="1">
+                            <a:rPr lang="en-US" b="0" i="1" smtClean="0">
                               <a:latin typeface="Cambria Math" panose="02040503050406030204" pitchFamily="18" charset="0"/>
                             </a:rPr>
-                            <m:t>𝐶</m:t>
+                            <m:t>𝑖𝑛𝑖𝑡</m:t>
                           </m:r>
                         </m:sub>
                       </m:sSub>
@@ -3345,7 +3338,7 @@
                                   </a:solidFill>
                                   <a:latin typeface="Cambria Math" panose="02040503050406030204" pitchFamily="18" charset="0"/>
                                 </a:rPr>
-                                <m:t>𝐷</m:t>
+                                <m:t>𝑑𝑎𝑡𝑎</m:t>
                               </m:r>
                             </m:sub>
                           </m:sSub>
@@ -3367,10 +3360,10 @@
                         </m:e>
                         <m:sub>
                           <m:r>
-                            <a:rPr lang="en-US" i="1">
+                            <a:rPr lang="en-US" b="0" i="1" smtClean="0">
                               <a:latin typeface="Cambria Math" panose="02040503050406030204" pitchFamily="18" charset="0"/>
                             </a:rPr>
-                            <m:t>𝐷</m:t>
+                            <m:t>𝑑𝑎𝑡𝑎</m:t>
                           </m:r>
                         </m:sub>
                       </m:sSub>
@@ -3438,7 +3431,7 @@
             </p:txBody>
           </p:sp>
         </mc:Choice>
-        <mc:Fallback>
+        <mc:Fallback xmlns="">
           <p:sp>
             <p:nvSpPr>
               <p:cNvPr id="8" name="Content Placeholder 7">
@@ -3548,16 +3541,12 @@
           <a:lstStyle/>
           <a:p>
             <a:r>
-              <a:rPr lang="en-US" dirty="0"/>
-              <a:t>PINNs: </a:t>
-            </a:r>
-            <a:r>
               <a:rPr lang="en-US" dirty="0">
                 <a:solidFill>
-                  <a:schemeClr val="accent1"/>
+                  <a:srgbClr val="0033CC"/>
                 </a:solidFill>
               </a:rPr>
-              <a:t>Ansatz</a:t>
+              <a:t>Solution Ansatz</a:t>
             </a:r>
           </a:p>
         </p:txBody>
@@ -3624,7 +3613,7 @@
                             </a:solidFill>
                             <a:latin typeface="Cambria Math" panose="02040503050406030204" pitchFamily="18" charset="0"/>
                           </a:rPr>
-                          <m:t>𝑂𝐷𝐸</m:t>
+                          <m:t>𝑜𝑑𝑒</m:t>
                         </m:r>
                       </m:sub>
                     </m:sSub>
@@ -3660,13 +3649,13 @@
                       </m:e>
                       <m:sub>
                         <m:r>
-                          <a:rPr lang="en-US" i="1">
+                          <a:rPr lang="en-US" b="0" i="1" smtClean="0">
                             <a:solidFill>
                               <a:srgbClr val="0033CC"/>
                             </a:solidFill>
                             <a:latin typeface="Cambria Math" panose="02040503050406030204" pitchFamily="18" charset="0"/>
                           </a:rPr>
-                          <m:t>𝐶</m:t>
+                          <m:t>𝑖𝑛𝑖𝑡</m:t>
                         </m:r>
                       </m:sub>
                     </m:sSub>
@@ -3702,13 +3691,13 @@
                       </m:e>
                       <m:sub>
                         <m:r>
-                          <a:rPr lang="en-US" i="1">
+                          <a:rPr lang="en-US" b="0" i="1" smtClean="0">
                             <a:solidFill>
                               <a:srgbClr val="0033CC"/>
                             </a:solidFill>
                             <a:latin typeface="Cambria Math" panose="02040503050406030204" pitchFamily="18" charset="0"/>
                           </a:rPr>
-                          <m:t>𝐷</m:t>
+                          <m:t>𝑑𝑎𝑡𝑎</m:t>
                         </m:r>
                       </m:sub>
                     </m:sSub>
@@ -3752,13 +3741,13 @@
                       </m:e>
                       <m:sub>
                         <m:r>
-                          <a:rPr lang="en-US" i="1">
+                          <a:rPr lang="en-US" b="0" i="1" smtClean="0">
                             <a:solidFill>
                               <a:srgbClr val="0033CC"/>
                             </a:solidFill>
                             <a:latin typeface="Cambria Math" panose="02040503050406030204" pitchFamily="18" charset="0"/>
                           </a:rPr>
-                          <m:t>𝐶</m:t>
+                          <m:t>𝑖𝑛𝑖𝑡</m:t>
                         </m:r>
                       </m:sub>
                     </m:sSub>
@@ -3776,12 +3765,6 @@
                   <a:rPr lang="en-US" dirty="0"/>
                   <a:t>by incorporating the initial conditions into the solution explicitly. </a:t>
                 </a:r>
-              </a:p>
-              <a:p>
-                <a:pPr marL="0" indent="0">
-                  <a:buNone/>
-                </a:pPr>
-                <a:endParaRPr lang="en-US" dirty="0"/>
               </a:p>
               <a:p>
                 <a:pPr marL="0" indent="0">
@@ -3935,6 +3918,11 @@
                   <a:rPr lang="en-US" baseline="30000" dirty="0"/>
                   <a:t>1</a:t>
                 </a:r>
+              </a:p>
+              <a:p>
+                <a:pPr marL="0" indent="0">
+                  <a:buNone/>
+                </a:pPr>
                 <a:endParaRPr lang="en-US" b="0" i="1" baseline="30000" dirty="0">
                   <a:latin typeface="Cambria Math" panose="02040503050406030204" pitchFamily="18" charset="0"/>
                 </a:endParaRPr>
@@ -4055,62 +4043,12 @@
                             </a:rPr>
                             <m:t>, </m:t>
                           </m:r>
-                          <m:sSub>
-                            <m:sSubPr>
-                              <m:ctrlPr>
-                                <a:rPr lang="en-US" b="0" i="1" smtClean="0">
-                                  <a:latin typeface="Cambria Math" panose="02040503050406030204" pitchFamily="18" charset="0"/>
-                                </a:rPr>
-                              </m:ctrlPr>
-                            </m:sSubPr>
-                            <m:e>
-                              <m:r>
-                                <a:rPr lang="en-US" i="1">
-                                  <a:latin typeface="Cambria Math" panose="02040503050406030204" pitchFamily="18" charset="0"/>
-                                </a:rPr>
-                                <m:t>𝑥</m:t>
-                              </m:r>
-                            </m:e>
-                            <m:sub>
-                              <m:r>
-                                <a:rPr lang="en-US" b="0" i="1" smtClean="0">
-                                  <a:latin typeface="Cambria Math" panose="02040503050406030204" pitchFamily="18" charset="0"/>
-                                </a:rPr>
-                                <m:t>0</m:t>
-                              </m:r>
-                            </m:sub>
-                          </m:sSub>
                           <m:r>
-                            <a:rPr lang="en-US" i="1">
+                            <a:rPr lang="en-US" b="0" i="1" smtClean="0">
                               <a:latin typeface="Cambria Math" panose="02040503050406030204" pitchFamily="18" charset="0"/>
                             </a:rPr>
-                            <m:t>, </m:t>
+                            <m:t>𝑝</m:t>
                           </m:r>
-                          <m:sSub>
-                            <m:sSubPr>
-                              <m:ctrlPr>
-                                <a:rPr lang="en-US" b="0" i="1" smtClean="0">
-                                  <a:latin typeface="Cambria Math" panose="02040503050406030204" pitchFamily="18" charset="0"/>
-                                </a:rPr>
-                              </m:ctrlPr>
-                            </m:sSubPr>
-                            <m:e>
-                              <m:r>
-                                <a:rPr lang="en-US" i="1">
-                                  <a:latin typeface="Cambria Math" panose="02040503050406030204" pitchFamily="18" charset="0"/>
-                                </a:rPr>
-                                <m:t>𝑣</m:t>
-                              </m:r>
-                            </m:e>
-                            <m:sub>
-                              <m:r>
-                                <a:rPr lang="en-US" i="1">
-                                  <a:latin typeface="Cambria Math" panose="02040503050406030204" pitchFamily="18" charset="0"/>
-                                </a:rPr>
-                                <m:t>0</m:t>
-                              </m:r>
-                            </m:sub>
-                          </m:sSub>
                         </m:e>
                       </m:d>
                       <m:r>
@@ -4154,75 +4092,25 @@
                         <a:rPr lang="en-US" i="1">
                           <a:latin typeface="Cambria Math" panose="02040503050406030204" pitchFamily="18" charset="0"/>
                         </a:rPr>
-                        <m:t>(0, </m:t>
+                        <m:t>(0,</m:t>
                       </m:r>
-                      <m:sSub>
-                        <m:sSubPr>
-                          <m:ctrlPr>
-                            <a:rPr lang="en-US" i="1">
-                              <a:latin typeface="Cambria Math" panose="02040503050406030204" pitchFamily="18" charset="0"/>
-                            </a:rPr>
-                          </m:ctrlPr>
-                        </m:sSubPr>
-                        <m:e>
-                          <m:r>
-                            <a:rPr lang="en-US" i="1">
-                              <a:latin typeface="Cambria Math" panose="02040503050406030204" pitchFamily="18" charset="0"/>
-                            </a:rPr>
-                            <m:t>𝑥</m:t>
-                          </m:r>
-                        </m:e>
-                        <m:sub>
-                          <m:r>
-                            <a:rPr lang="en-US" i="1">
-                              <a:latin typeface="Cambria Math" panose="02040503050406030204" pitchFamily="18" charset="0"/>
-                            </a:rPr>
-                            <m:t>0</m:t>
-                          </m:r>
-                        </m:sub>
-                      </m:sSub>
                       <m:r>
-                        <a:rPr lang="en-US" i="1">
+                        <a:rPr lang="en-US" b="0" i="1" smtClean="0">
                           <a:latin typeface="Cambria Math" panose="02040503050406030204" pitchFamily="18" charset="0"/>
                         </a:rPr>
-                        <m:t>, </m:t>
-                      </m:r>
-                      <m:sSub>
-                        <m:sSubPr>
-                          <m:ctrlPr>
-                            <a:rPr lang="en-US" i="1">
-                              <a:latin typeface="Cambria Math" panose="02040503050406030204" pitchFamily="18" charset="0"/>
-                            </a:rPr>
-                          </m:ctrlPr>
-                        </m:sSubPr>
-                        <m:e>
-                          <m:r>
-                            <a:rPr lang="en-US" i="1">
-                              <a:latin typeface="Cambria Math" panose="02040503050406030204" pitchFamily="18" charset="0"/>
-                            </a:rPr>
-                            <m:t>𝑣</m:t>
-                          </m:r>
-                        </m:e>
-                        <m:sub>
-                          <m:r>
-                            <a:rPr lang="en-US" i="1">
-                              <a:latin typeface="Cambria Math" panose="02040503050406030204" pitchFamily="18" charset="0"/>
-                            </a:rPr>
-                            <m:t>0</m:t>
-                          </m:r>
-                        </m:sub>
-                      </m:sSub>
-                      <m:r>
-                        <a:rPr lang="en-US" i="1">
-                          <a:latin typeface="Cambria Math" panose="02040503050406030204" pitchFamily="18" charset="0"/>
-                        </a:rPr>
-                        <m:t>) + </m:t>
+                        <m:t>𝑝</m:t>
                       </m:r>
                       <m:r>
                         <a:rPr lang="en-US" i="1">
                           <a:latin typeface="Cambria Math" panose="02040503050406030204" pitchFamily="18" charset="0"/>
                         </a:rPr>
-                        <m:t>𝑡</m:t>
+                        <m:t>) +</m:t>
+                      </m:r>
+                      <m:r>
+                        <a:rPr lang="en-US" b="0" i="1" smtClean="0">
+                          <a:latin typeface="Cambria Math" panose="02040503050406030204" pitchFamily="18" charset="0"/>
+                        </a:rPr>
+                        <m:t>𝑧</m:t>
                       </m:r>
                       <m:r>
                         <a:rPr lang="en-US" i="1">
@@ -4270,13 +4158,7 @@
                             <a:rPr lang="en-US" i="1">
                               <a:latin typeface="Cambria Math" panose="02040503050406030204" pitchFamily="18" charset="0"/>
                             </a:rPr>
-                            <m:t> </m:t>
-                          </m:r>
-                          <m:r>
-                            <a:rPr lang="en-US" i="1">
-                              <a:latin typeface="Cambria Math" panose="02040503050406030204" pitchFamily="18" charset="0"/>
-                            </a:rPr>
-                            <m:t> −</m:t>
+                            <m:t>  −</m:t>
                           </m:r>
                           <m:sSub>
                             <m:sSubPr>
@@ -4319,64 +4201,26 @@
                             <a:rPr lang="en-US" i="1">
                               <a:latin typeface="Cambria Math" panose="02040503050406030204" pitchFamily="18" charset="0"/>
                             </a:rPr>
-                            <m:t>(0, </m:t>
+                            <m:t>(</m:t>
                           </m:r>
-                          <m:sSub>
-                            <m:sSubPr>
-                              <m:ctrlPr>
-                                <a:rPr lang="en-US" i="1">
-                                  <a:latin typeface="Cambria Math" panose="02040503050406030204" pitchFamily="18" charset="0"/>
-                                </a:rPr>
-                              </m:ctrlPr>
-                            </m:sSubPr>
-                            <m:e>
-                              <m:r>
-                                <a:rPr lang="en-US" i="1">
-                                  <a:latin typeface="Cambria Math" panose="02040503050406030204" pitchFamily="18" charset="0"/>
-                                </a:rPr>
-                                <m:t>𝑥</m:t>
-                              </m:r>
-                            </m:e>
-                            <m:sub>
-                              <m:r>
-                                <a:rPr lang="en-US" i="1">
-                                  <a:latin typeface="Cambria Math" panose="02040503050406030204" pitchFamily="18" charset="0"/>
-                                </a:rPr>
-                                <m:t>0</m:t>
-                              </m:r>
-                            </m:sub>
-                          </m:sSub>
+                          <m:r>
+                            <a:rPr lang="en-US" b="0" i="1" smtClean="0">
+                              <a:latin typeface="Cambria Math" panose="02040503050406030204" pitchFamily="18" charset="0"/>
+                            </a:rPr>
+                            <m:t>0</m:t>
+                          </m:r>
                           <m:r>
                             <a:rPr lang="en-US" i="1">
                               <a:latin typeface="Cambria Math" panose="02040503050406030204" pitchFamily="18" charset="0"/>
                             </a:rPr>
-                            <m:t>, </m:t>
+                            <m:t>,</m:t>
                           </m:r>
-                          <m:sSub>
-                            <m:sSubPr>
-                              <m:ctrlPr>
-                                <a:rPr lang="en-US" i="1">
-                                  <a:latin typeface="Cambria Math" panose="02040503050406030204" pitchFamily="18" charset="0"/>
-                                </a:rPr>
-                              </m:ctrlPr>
-                            </m:sSubPr>
-                            <m:e>
-                              <m:r>
-                                <a:rPr lang="en-US" i="1">
-                                  <a:latin typeface="Cambria Math" panose="02040503050406030204" pitchFamily="18" charset="0"/>
-                                </a:rPr>
-                                <m:t>𝑣</m:t>
-                              </m:r>
-                            </m:e>
-                            <m:sub>
-                              <m:r>
-                                <a:rPr lang="en-US" i="1">
-                                  <a:latin typeface="Cambria Math" panose="02040503050406030204" pitchFamily="18" charset="0"/>
-                                </a:rPr>
-                                <m:t>0</m:t>
-                              </m:r>
-                            </m:sub>
-                          </m:sSub>
+                          <m:r>
+                            <a:rPr lang="en-US" b="0" i="1" smtClean="0">
+                              <a:latin typeface="Cambria Math" panose="02040503050406030204" pitchFamily="18" charset="0"/>
+                            </a:rPr>
+                            <m:t>𝑝</m:t>
+                          </m:r>
                           <m:r>
                             <a:rPr lang="en-US" i="1">
                               <a:latin typeface="Cambria Math" panose="02040503050406030204" pitchFamily="18" charset="0"/>
@@ -4394,10 +4238,440 @@
                 <a:pPr marL="0" indent="0" algn="ctr">
                   <a:buNone/>
                 </a:pPr>
+                <a14:m>
+                  <m:oMathPara xmlns:m="http://schemas.openxmlformats.org/officeDocument/2006/math">
+                    <m:oMathParaPr>
+                      <m:jc m:val="centerGroup"/>
+                    </m:oMathParaPr>
+                    <m:oMath xmlns:m="http://schemas.openxmlformats.org/officeDocument/2006/math">
+                      <m:r>
+                        <a:rPr lang="en-US" i="1" smtClean="0">
+                          <a:latin typeface="Cambria Math" panose="02040503050406030204" pitchFamily="18" charset="0"/>
+                          <a:ea typeface="Cambria Math" panose="02040503050406030204" pitchFamily="18" charset="0"/>
+                        </a:rPr>
+                        <m:t>→</m:t>
+                      </m:r>
+                      <m:f>
+                        <m:fPr>
+                          <m:ctrlPr>
+                            <a:rPr lang="en-US" i="1" smtClean="0">
+                              <a:latin typeface="Cambria Math" panose="02040503050406030204" pitchFamily="18" charset="0"/>
+                            </a:rPr>
+                          </m:ctrlPr>
+                        </m:fPr>
+                        <m:num>
+                          <m:r>
+                            <a:rPr lang="en-US" i="1" smtClean="0">
+                              <a:latin typeface="Cambria Math" panose="02040503050406030204" pitchFamily="18" charset="0"/>
+                            </a:rPr>
+                            <m:t>𝑑</m:t>
+                          </m:r>
+                          <m:r>
+                            <a:rPr lang="en-US" b="0" i="1" smtClean="0">
+                              <a:latin typeface="Cambria Math" panose="02040503050406030204" pitchFamily="18" charset="0"/>
+                            </a:rPr>
+                            <m:t>𝑥</m:t>
+                          </m:r>
+                        </m:num>
+                        <m:den>
+                          <m:r>
+                            <a:rPr lang="en-US" i="1" smtClean="0">
+                              <a:latin typeface="Cambria Math" panose="02040503050406030204" pitchFamily="18" charset="0"/>
+                            </a:rPr>
+                            <m:t>𝑑</m:t>
+                          </m:r>
+                          <m:r>
+                            <a:rPr lang="en-US" b="0" i="1" smtClean="0">
+                              <a:latin typeface="Cambria Math" panose="02040503050406030204" pitchFamily="18" charset="0"/>
+                            </a:rPr>
+                            <m:t>𝑧</m:t>
+                          </m:r>
+                        </m:den>
+                      </m:f>
+                      <m:r>
+                        <a:rPr lang="en-US" i="1">
+                          <a:latin typeface="Cambria Math" panose="02040503050406030204" pitchFamily="18" charset="0"/>
+                        </a:rPr>
+                        <m:t>= </m:t>
+                      </m:r>
+                      <m:sSub>
+                        <m:sSubPr>
+                          <m:ctrlPr>
+                            <a:rPr lang="en-US" i="1">
+                              <a:latin typeface="Cambria Math" panose="02040503050406030204" pitchFamily="18" charset="0"/>
+                            </a:rPr>
+                          </m:ctrlPr>
+                        </m:sSubPr>
+                        <m:e>
+                          <m:r>
+                            <a:rPr lang="en-US" b="0" i="1" smtClean="0">
+                              <a:latin typeface="Cambria Math" panose="02040503050406030204" pitchFamily="18" charset="0"/>
+                            </a:rPr>
+                            <m:t>𝑣</m:t>
+                          </m:r>
+                        </m:e>
+                        <m:sub>
+                          <m:r>
+                            <a:rPr lang="en-US" i="1">
+                              <a:latin typeface="Cambria Math" panose="02040503050406030204" pitchFamily="18" charset="0"/>
+                            </a:rPr>
+                            <m:t>0</m:t>
+                          </m:r>
+                        </m:sub>
+                      </m:sSub>
+                      <m:r>
+                        <a:rPr lang="en-US" i="1">
+                          <a:latin typeface="Cambria Math" panose="02040503050406030204" pitchFamily="18" charset="0"/>
+                        </a:rPr>
+                        <m:t> +</m:t>
+                      </m:r>
+                      <m:sSub>
+                        <m:sSubPr>
+                          <m:ctrlPr>
+                            <a:rPr lang="en-US" i="1">
+                              <a:latin typeface="Cambria Math" panose="02040503050406030204" pitchFamily="18" charset="0"/>
+                            </a:rPr>
+                          </m:ctrlPr>
+                        </m:sSubPr>
+                        <m:e>
+                          <m:acc>
+                            <m:accPr>
+                              <m:chr m:val="̇"/>
+                              <m:ctrlPr>
+                                <a:rPr lang="en-US" i="1">
+                                  <a:latin typeface="Cambria Math" panose="02040503050406030204" pitchFamily="18" charset="0"/>
+                                </a:rPr>
+                              </m:ctrlPr>
+                            </m:accPr>
+                            <m:e>
+                              <m:r>
+                                <a:rPr lang="en-US" i="1">
+                                  <a:latin typeface="Cambria Math" panose="02040503050406030204" pitchFamily="18" charset="0"/>
+                                </a:rPr>
+                                <m:t>𝑔</m:t>
+                              </m:r>
+                            </m:e>
+                          </m:acc>
+                        </m:e>
+                        <m:sub>
+                          <m:r>
+                            <a:rPr lang="en-US" i="1">
+                              <a:latin typeface="Cambria Math" panose="02040503050406030204" pitchFamily="18" charset="0"/>
+                            </a:rPr>
+                            <m:t>𝜔</m:t>
+                          </m:r>
+                        </m:sub>
+                      </m:sSub>
+                      <m:d>
+                        <m:dPr>
+                          <m:ctrlPr>
+                            <a:rPr lang="en-US" i="1">
+                              <a:latin typeface="Cambria Math" panose="02040503050406030204" pitchFamily="18" charset="0"/>
+                            </a:rPr>
+                          </m:ctrlPr>
+                        </m:dPr>
+                        <m:e>
+                          <m:r>
+                            <a:rPr lang="en-US" i="1">
+                              <a:latin typeface="Cambria Math" panose="02040503050406030204" pitchFamily="18" charset="0"/>
+                            </a:rPr>
+                            <m:t>𝑧</m:t>
+                          </m:r>
+                          <m:r>
+                            <a:rPr lang="en-US" i="1">
+                              <a:latin typeface="Cambria Math" panose="02040503050406030204" pitchFamily="18" charset="0"/>
+                            </a:rPr>
+                            <m:t>, </m:t>
+                          </m:r>
+                          <m:r>
+                            <a:rPr lang="en-US" i="1">
+                              <a:latin typeface="Cambria Math" panose="02040503050406030204" pitchFamily="18" charset="0"/>
+                            </a:rPr>
+                            <m:t>𝑝</m:t>
+                          </m:r>
+                        </m:e>
+                      </m:d>
+                      <m:r>
+                        <a:rPr lang="en-US" i="1">
+                          <a:latin typeface="Cambria Math" panose="02040503050406030204" pitchFamily="18" charset="0"/>
+                        </a:rPr>
+                        <m:t>−</m:t>
+                      </m:r>
+                      <m:sSub>
+                        <m:sSubPr>
+                          <m:ctrlPr>
+                            <a:rPr lang="en-US" i="1">
+                              <a:latin typeface="Cambria Math" panose="02040503050406030204" pitchFamily="18" charset="0"/>
+                            </a:rPr>
+                          </m:ctrlPr>
+                        </m:sSubPr>
+                        <m:e>
+                          <m:acc>
+                            <m:accPr>
+                              <m:chr m:val="̇"/>
+                              <m:ctrlPr>
+                                <a:rPr lang="en-US" i="1">
+                                  <a:latin typeface="Cambria Math" panose="02040503050406030204" pitchFamily="18" charset="0"/>
+                                </a:rPr>
+                              </m:ctrlPr>
+                            </m:accPr>
+                            <m:e>
+                              <m:r>
+                                <a:rPr lang="en-US" i="1">
+                                  <a:latin typeface="Cambria Math" panose="02040503050406030204" pitchFamily="18" charset="0"/>
+                                </a:rPr>
+                                <m:t>𝑔</m:t>
+                              </m:r>
+                            </m:e>
+                          </m:acc>
+                        </m:e>
+                        <m:sub>
+                          <m:r>
+                            <a:rPr lang="en-US" i="1">
+                              <a:latin typeface="Cambria Math" panose="02040503050406030204" pitchFamily="18" charset="0"/>
+                            </a:rPr>
+                            <m:t>𝜔</m:t>
+                          </m:r>
+                        </m:sub>
+                      </m:sSub>
+                      <m:r>
+                        <a:rPr lang="en-US" i="1">
+                          <a:latin typeface="Cambria Math" panose="02040503050406030204" pitchFamily="18" charset="0"/>
+                        </a:rPr>
+                        <m:t>(0</m:t>
+                      </m:r>
+                      <m:r>
+                        <a:rPr lang="en-US" b="0" i="1" smtClean="0">
+                          <a:latin typeface="Cambria Math" panose="02040503050406030204" pitchFamily="18" charset="0"/>
+                        </a:rPr>
+                        <m:t>, </m:t>
+                      </m:r>
+                      <m:r>
+                        <a:rPr lang="en-US" b="0" i="1" smtClean="0">
+                          <a:latin typeface="Cambria Math" panose="02040503050406030204" pitchFamily="18" charset="0"/>
+                        </a:rPr>
+                        <m:t>𝑝</m:t>
+                      </m:r>
+                      <m:r>
+                        <a:rPr lang="en-US" b="0" i="1" smtClean="0">
+                          <a:latin typeface="Cambria Math" panose="02040503050406030204" pitchFamily="18" charset="0"/>
+                        </a:rPr>
+                        <m:t>)</m:t>
+                      </m:r>
+                    </m:oMath>
+                  </m:oMathPara>
+                </a14:m>
                 <a:endParaRPr lang="en-US" dirty="0"/>
               </a:p>
               <a:p>
-                <a:pPr marL="0" indent="0" algn="ctr">
+                <a:pPr marL="0" indent="0">
+                  <a:buNone/>
+                </a:pPr>
+                <a:r>
+                  <a:rPr lang="en-US" dirty="0"/>
+                  <a:t>with  </a:t>
+                </a:r>
+                <a14:m>
+                  <m:oMath xmlns:m="http://schemas.openxmlformats.org/officeDocument/2006/math">
+                    <m:r>
+                      <a:rPr lang="en-US" i="1">
+                        <a:solidFill>
+                          <a:srgbClr val="0033CC"/>
+                        </a:solidFill>
+                        <a:latin typeface="Cambria Math" panose="02040503050406030204" pitchFamily="18" charset="0"/>
+                      </a:rPr>
+                      <m:t>𝑝</m:t>
+                    </m:r>
+                    <m:r>
+                      <a:rPr lang="en-US" i="1">
+                        <a:solidFill>
+                          <a:srgbClr val="0033CC"/>
+                        </a:solidFill>
+                        <a:latin typeface="Cambria Math" panose="02040503050406030204" pitchFamily="18" charset="0"/>
+                      </a:rPr>
+                      <m:t>=(</m:t>
+                    </m:r>
+                    <m:sSub>
+                      <m:sSubPr>
+                        <m:ctrlPr>
+                          <a:rPr lang="en-US" i="1">
+                            <a:solidFill>
+                              <a:srgbClr val="0033CC"/>
+                            </a:solidFill>
+                            <a:latin typeface="Cambria Math" panose="02040503050406030204" pitchFamily="18" charset="0"/>
+                          </a:rPr>
+                        </m:ctrlPr>
+                      </m:sSubPr>
+                      <m:e>
+                        <m:r>
+                          <a:rPr lang="en-US" i="1">
+                            <a:solidFill>
+                              <a:srgbClr val="0033CC"/>
+                            </a:solidFill>
+                            <a:latin typeface="Cambria Math" panose="02040503050406030204" pitchFamily="18" charset="0"/>
+                          </a:rPr>
+                          <m:t>𝑥</m:t>
+                        </m:r>
+                      </m:e>
+                      <m:sub>
+                        <m:r>
+                          <a:rPr lang="en-US" i="1">
+                            <a:solidFill>
+                              <a:srgbClr val="0033CC"/>
+                            </a:solidFill>
+                            <a:latin typeface="Cambria Math" panose="02040503050406030204" pitchFamily="18" charset="0"/>
+                          </a:rPr>
+                          <m:t>0</m:t>
+                        </m:r>
+                      </m:sub>
+                    </m:sSub>
+                    <m:r>
+                      <a:rPr lang="en-US" i="1">
+                        <a:solidFill>
+                          <a:srgbClr val="0033CC"/>
+                        </a:solidFill>
+                        <a:latin typeface="Cambria Math" panose="02040503050406030204" pitchFamily="18" charset="0"/>
+                      </a:rPr>
+                      <m:t>, </m:t>
+                    </m:r>
+                    <m:sSub>
+                      <m:sSubPr>
+                        <m:ctrlPr>
+                          <a:rPr lang="en-US" i="1">
+                            <a:solidFill>
+                              <a:srgbClr val="0033CC"/>
+                            </a:solidFill>
+                            <a:latin typeface="Cambria Math" panose="02040503050406030204" pitchFamily="18" charset="0"/>
+                          </a:rPr>
+                        </m:ctrlPr>
+                      </m:sSubPr>
+                      <m:e>
+                        <m:r>
+                          <a:rPr lang="en-US" i="1">
+                            <a:solidFill>
+                              <a:srgbClr val="0033CC"/>
+                            </a:solidFill>
+                            <a:latin typeface="Cambria Math" panose="02040503050406030204" pitchFamily="18" charset="0"/>
+                          </a:rPr>
+                          <m:t>𝑣</m:t>
+                        </m:r>
+                      </m:e>
+                      <m:sub>
+                        <m:r>
+                          <a:rPr lang="en-US" i="1">
+                            <a:solidFill>
+                              <a:srgbClr val="0033CC"/>
+                            </a:solidFill>
+                            <a:latin typeface="Cambria Math" panose="02040503050406030204" pitchFamily="18" charset="0"/>
+                          </a:rPr>
+                          <m:t>0</m:t>
+                        </m:r>
+                      </m:sub>
+                    </m:sSub>
+                    <m:r>
+                      <a:rPr lang="en-US" i="1">
+                        <a:solidFill>
+                          <a:srgbClr val="0033CC"/>
+                        </a:solidFill>
+                        <a:latin typeface="Cambria Math" panose="02040503050406030204" pitchFamily="18" charset="0"/>
+                      </a:rPr>
+                      <m:t>, </m:t>
+                    </m:r>
+                    <m:r>
+                      <a:rPr lang="en-US" i="1">
+                        <a:solidFill>
+                          <a:srgbClr val="0033CC"/>
+                        </a:solidFill>
+                        <a:latin typeface="Cambria Math" panose="02040503050406030204" pitchFamily="18" charset="0"/>
+                      </a:rPr>
+                      <m:t>𝜁</m:t>
+                    </m:r>
+                    <m:r>
+                      <a:rPr lang="en-US" i="1">
+                        <a:solidFill>
+                          <a:srgbClr val="0033CC"/>
+                        </a:solidFill>
+                        <a:latin typeface="Cambria Math" panose="02040503050406030204" pitchFamily="18" charset="0"/>
+                      </a:rPr>
+                      <m:t>)</m:t>
+                    </m:r>
+                  </m:oMath>
+                </a14:m>
+                <a:r>
+                  <a:rPr lang="en-US" dirty="0"/>
+                  <a:t> and </a:t>
+                </a:r>
+                <a14:m>
+                  <m:oMath xmlns:m="http://schemas.openxmlformats.org/officeDocument/2006/math">
+                    <m:acc>
+                      <m:accPr>
+                        <m:chr m:val="̇"/>
+                        <m:ctrlPr>
+                          <a:rPr lang="en-US" i="1" smtClean="0">
+                            <a:solidFill>
+                              <a:srgbClr val="0033CC"/>
+                            </a:solidFill>
+                            <a:latin typeface="Cambria Math" panose="02040503050406030204" pitchFamily="18" charset="0"/>
+                          </a:rPr>
+                        </m:ctrlPr>
+                      </m:accPr>
+                      <m:e>
+                        <m:r>
+                          <a:rPr lang="en-US" b="0" i="1" smtClean="0">
+                            <a:solidFill>
+                              <a:srgbClr val="0033CC"/>
+                            </a:solidFill>
+                            <a:latin typeface="Cambria Math" panose="02040503050406030204" pitchFamily="18" charset="0"/>
+                          </a:rPr>
+                          <m:t>𝑔</m:t>
+                        </m:r>
+                      </m:e>
+                    </m:acc>
+                    <m:r>
+                      <a:rPr lang="en-US" b="0" i="1" smtClean="0">
+                        <a:solidFill>
+                          <a:srgbClr val="0033CC"/>
+                        </a:solidFill>
+                        <a:latin typeface="Cambria Math" panose="02040503050406030204" pitchFamily="18" charset="0"/>
+                      </a:rPr>
+                      <m:t>=</m:t>
+                    </m:r>
+                    <m:r>
+                      <a:rPr lang="en-US" b="0" i="1" smtClean="0">
+                        <a:solidFill>
+                          <a:srgbClr val="0033CC"/>
+                        </a:solidFill>
+                        <a:latin typeface="Cambria Math" panose="02040503050406030204" pitchFamily="18" charset="0"/>
+                      </a:rPr>
+                      <m:t>𝑑𝑔</m:t>
+                    </m:r>
+                    <m:r>
+                      <a:rPr lang="en-US" b="0" i="1" smtClean="0">
+                        <a:solidFill>
+                          <a:srgbClr val="0033CC"/>
+                        </a:solidFill>
+                        <a:latin typeface="Cambria Math" panose="02040503050406030204" pitchFamily="18" charset="0"/>
+                      </a:rPr>
+                      <m:t>/</m:t>
+                    </m:r>
+                    <m:r>
+                      <a:rPr lang="en-US" b="0" i="1" smtClean="0">
+                        <a:solidFill>
+                          <a:srgbClr val="0033CC"/>
+                        </a:solidFill>
+                        <a:latin typeface="Cambria Math" panose="02040503050406030204" pitchFamily="18" charset="0"/>
+                      </a:rPr>
+                      <m:t>𝑑𝑧</m:t>
+                    </m:r>
+                  </m:oMath>
+                </a14:m>
+                <a:r>
+                  <a:rPr lang="en-US" dirty="0"/>
+                  <a:t>.</a:t>
+                </a:r>
+              </a:p>
+              <a:p>
+                <a:pPr marL="0" indent="0">
                   <a:buNone/>
                 </a:pPr>
                 <a:endParaRPr lang="en-US" dirty="0"/>
@@ -4461,7 +4735,7 @@
               <a:blipFill>
                 <a:blip r:embed="rId2"/>
                 <a:stretch>
-                  <a:fillRect l="-1305" t="-1316" b="-5789"/>
+                  <a:fillRect l="-1305" t="-1316" b="-2368"/>
                 </a:stretch>
               </a:blipFill>
             </p:spPr>
@@ -4550,13 +4824,9 @@
           <a:lstStyle/>
           <a:p>
             <a:r>
-              <a:rPr lang="en-US" dirty="0"/>
-              <a:t>PINNs: </a:t>
-            </a:r>
-            <a:r>
               <a:rPr lang="en-US" dirty="0">
                 <a:solidFill>
-                  <a:schemeClr val="accent1"/>
+                  <a:srgbClr val="0033CC"/>
                 </a:solidFill>
               </a:rPr>
               <a:t>Automatic Differentiation</a:t>
@@ -4564,8 +4834,8 @@
           </a:p>
         </p:txBody>
       </p:sp>
-      <mc:AlternateContent xmlns:mc="http://schemas.openxmlformats.org/markup-compatibility/2006">
-        <mc:Choice xmlns:a14="http://schemas.microsoft.com/office/drawing/2010/main" Requires="a14">
+      <mc:AlternateContent xmlns:mc="http://schemas.openxmlformats.org/markup-compatibility/2006" xmlns:a14="http://schemas.microsoft.com/office/drawing/2010/main">
+        <mc:Choice Requires="a14">
           <p:sp>
             <p:nvSpPr>
               <p:cNvPr id="8" name="Content Placeholder 7">
@@ -4612,7 +4882,22 @@
                 </a:r>
                 <a:r>
                   <a:rPr lang="en-US" dirty="0"/>
-                  <a:t>). This is the technology that is used to compute the gradients, </a:t>
+                  <a:t>). </a:t>
+                </a:r>
+              </a:p>
+              <a:p>
+                <a:pPr marL="0" indent="0">
+                  <a:buNone/>
+                </a:pPr>
+                <a:endParaRPr lang="en-US" dirty="0"/>
+              </a:p>
+              <a:p>
+                <a:pPr marL="0" indent="0">
+                  <a:buNone/>
+                </a:pPr>
+                <a:r>
+                  <a:rPr lang="en-US" dirty="0"/>
+                  <a:t>This is the technology that is used to compute the gradients, </a:t>
                 </a:r>
                 <a:r>
                   <a:rPr lang="en-US" i="1" u="sng" dirty="0">
@@ -4630,12 +4915,9 @@
                   <m:oMath xmlns:m="http://schemas.openxmlformats.org/officeDocument/2006/math">
                     <m:r>
                       <a:rPr lang="en-US" b="0" i="1" smtClean="0">
-                        <a:solidFill>
-                          <a:srgbClr val="0033CC"/>
-                        </a:solidFill>
                         <a:latin typeface="Cambria Math" panose="02040503050406030204" pitchFamily="18" charset="0"/>
                       </a:rPr>
-                      <m:t>𝜃</m:t>
+                      <m:t>𝜔</m:t>
                     </m:r>
                   </m:oMath>
                 </a14:m>
@@ -4680,7 +4962,7 @@
                 </a:r>
                 <a:r>
                   <a:rPr lang="en-US" dirty="0"/>
-                  <a:t> in the average loss functions</a:t>
+                  <a:t> that appear in the average loss functions.</a:t>
                 </a:r>
                 <a:endParaRPr lang="en-US" i="1" dirty="0">
                   <a:latin typeface="Cambria Math" panose="02040503050406030204" pitchFamily="18" charset="0"/>
@@ -4690,581 +4972,6 @@
                 <a:pPr marL="0" indent="0">
                   <a:buNone/>
                 </a:pPr>
-                <a14:m>
-                  <m:oMathPara xmlns:m="http://schemas.openxmlformats.org/officeDocument/2006/math">
-                    <m:oMathParaPr>
-                      <m:jc m:val="centerGroup"/>
-                    </m:oMathParaPr>
-                    <m:oMath xmlns:m="http://schemas.openxmlformats.org/officeDocument/2006/math">
-                      <m:sSub>
-                        <m:sSubPr>
-                          <m:ctrlPr>
-                            <a:rPr lang="en-US" i="1">
-                              <a:latin typeface="Cambria Math" panose="02040503050406030204" pitchFamily="18" charset="0"/>
-                            </a:rPr>
-                          </m:ctrlPr>
-                        </m:sSubPr>
-                        <m:e>
-                          <m:r>
-                            <a:rPr lang="en-US" i="1">
-                              <a:latin typeface="Cambria Math" panose="02040503050406030204" pitchFamily="18" charset="0"/>
-                            </a:rPr>
-                            <m:t>𝑅</m:t>
-                          </m:r>
-                        </m:e>
-                        <m:sub>
-                          <m:r>
-                            <a:rPr lang="en-US" i="1">
-                              <a:latin typeface="Cambria Math" panose="02040503050406030204" pitchFamily="18" charset="0"/>
-                            </a:rPr>
-                            <m:t>𝑂𝐷𝐸</m:t>
-                          </m:r>
-                        </m:sub>
-                      </m:sSub>
-                      <m:d>
-                        <m:dPr>
-                          <m:ctrlPr>
-                            <a:rPr lang="en-US" i="1">
-                              <a:latin typeface="Cambria Math" panose="02040503050406030204" pitchFamily="18" charset="0"/>
-                            </a:rPr>
-                          </m:ctrlPr>
-                        </m:dPr>
-                        <m:e>
-                          <m:r>
-                            <a:rPr lang="en-US" i="1">
-                              <a:latin typeface="Cambria Math" panose="02040503050406030204" pitchFamily="18" charset="0"/>
-                            </a:rPr>
-                            <m:t>𝜃</m:t>
-                          </m:r>
-                        </m:e>
-                      </m:d>
-                      <m:r>
-                        <a:rPr lang="en-US" i="1">
-                          <a:latin typeface="Cambria Math" panose="02040503050406030204" pitchFamily="18" charset="0"/>
-                        </a:rPr>
-                        <m:t> =</m:t>
-                      </m:r>
-                      <m:f>
-                        <m:fPr>
-                          <m:ctrlPr>
-                            <a:rPr lang="en-US" i="1">
-                              <a:latin typeface="Cambria Math" panose="02040503050406030204" pitchFamily="18" charset="0"/>
-                            </a:rPr>
-                          </m:ctrlPr>
-                        </m:fPr>
-                        <m:num>
-                          <m:r>
-                            <a:rPr lang="en-US" i="1">
-                              <a:latin typeface="Cambria Math" panose="02040503050406030204" pitchFamily="18" charset="0"/>
-                            </a:rPr>
-                            <m:t>1</m:t>
-                          </m:r>
-                        </m:num>
-                        <m:den>
-                          <m:sSub>
-                            <m:sSubPr>
-                              <m:ctrlPr>
-                                <a:rPr lang="en-US" i="1">
-                                  <a:latin typeface="Cambria Math" panose="02040503050406030204" pitchFamily="18" charset="0"/>
-                                </a:rPr>
-                              </m:ctrlPr>
-                            </m:sSubPr>
-                            <m:e>
-                              <m:r>
-                                <a:rPr lang="en-US" i="1">
-                                  <a:latin typeface="Cambria Math" panose="02040503050406030204" pitchFamily="18" charset="0"/>
-                                </a:rPr>
-                                <m:t>𝑁</m:t>
-                              </m:r>
-                            </m:e>
-                            <m:sub>
-                              <m:r>
-                                <a:rPr lang="en-US" i="1">
-                                  <a:latin typeface="Cambria Math" panose="02040503050406030204" pitchFamily="18" charset="0"/>
-                                </a:rPr>
-                                <m:t>𝑂𝐷𝐸</m:t>
-                              </m:r>
-                            </m:sub>
-                          </m:sSub>
-                        </m:den>
-                      </m:f>
-                      <m:nary>
-                        <m:naryPr>
-                          <m:chr m:val="∑"/>
-                          <m:ctrlPr>
-                            <a:rPr lang="en-US" i="1">
-                              <a:latin typeface="Cambria Math" panose="02040503050406030204" pitchFamily="18" charset="0"/>
-                            </a:rPr>
-                          </m:ctrlPr>
-                        </m:naryPr>
-                        <m:sub>
-                          <m:r>
-                            <m:rPr>
-                              <m:brk m:alnAt="23"/>
-                            </m:rPr>
-                            <a:rPr lang="en-US" i="1">
-                              <a:latin typeface="Cambria Math" panose="02040503050406030204" pitchFamily="18" charset="0"/>
-                            </a:rPr>
-                            <m:t>𝑖</m:t>
-                          </m:r>
-                          <m:r>
-                            <a:rPr lang="en-US" i="1">
-                              <a:latin typeface="Cambria Math" panose="02040503050406030204" pitchFamily="18" charset="0"/>
-                            </a:rPr>
-                            <m:t>=1</m:t>
-                          </m:r>
-                        </m:sub>
-                        <m:sup>
-                          <m:sSub>
-                            <m:sSubPr>
-                              <m:ctrlPr>
-                                <a:rPr lang="en-US" i="1">
-                                  <a:latin typeface="Cambria Math" panose="02040503050406030204" pitchFamily="18" charset="0"/>
-                                </a:rPr>
-                              </m:ctrlPr>
-                            </m:sSubPr>
-                            <m:e>
-                              <m:r>
-                                <a:rPr lang="en-US" i="1">
-                                  <a:latin typeface="Cambria Math" panose="02040503050406030204" pitchFamily="18" charset="0"/>
-                                </a:rPr>
-                                <m:t>𝑁</m:t>
-                              </m:r>
-                            </m:e>
-                            <m:sub>
-                              <m:r>
-                                <a:rPr lang="en-US" i="1">
-                                  <a:latin typeface="Cambria Math" panose="02040503050406030204" pitchFamily="18" charset="0"/>
-                                </a:rPr>
-                                <m:t>𝑂𝐷𝐸</m:t>
-                              </m:r>
-                            </m:sub>
-                          </m:sSub>
-                        </m:sup>
-                        <m:e>
-                          <m:sSup>
-                            <m:sSupPr>
-                              <m:ctrlPr>
-                                <a:rPr lang="en-US" i="1">
-                                  <a:latin typeface="Cambria Math" panose="02040503050406030204" pitchFamily="18" charset="0"/>
-                                </a:rPr>
-                              </m:ctrlPr>
-                            </m:sSupPr>
-                            <m:e>
-                              <m:d>
-                                <m:dPr>
-                                  <m:begChr m:val="["/>
-                                  <m:endChr m:val="]"/>
-                                  <m:ctrlPr>
-                                    <a:rPr lang="en-US" i="1">
-                                      <a:latin typeface="Cambria Math" panose="02040503050406030204" pitchFamily="18" charset="0"/>
-                                    </a:rPr>
-                                  </m:ctrlPr>
-                                </m:dPr>
-                                <m:e>
-                                  <m:r>
-                                    <a:rPr lang="en-US" i="1" smtClean="0">
-                                      <a:latin typeface="Cambria Math" panose="02040503050406030204" pitchFamily="18" charset="0"/>
-                                      <a:ea typeface="Cambria Math" panose="02040503050406030204" pitchFamily="18" charset="0"/>
-                                    </a:rPr>
-                                    <m:t>ℱ</m:t>
-                                  </m:r>
-                                  <m:r>
-                                    <a:rPr lang="en-US" b="0" i="1" smtClean="0">
-                                      <a:latin typeface="Cambria Math" panose="02040503050406030204" pitchFamily="18" charset="0"/>
-                                      <a:ea typeface="Cambria Math" panose="02040503050406030204" pitchFamily="18" charset="0"/>
-                                    </a:rPr>
-                                    <m:t>(</m:t>
-                                  </m:r>
-                                  <m:sSub>
-                                    <m:sSubPr>
-                                      <m:ctrlPr>
-                                        <a:rPr lang="en-US" i="1" smtClean="0">
-                                          <a:latin typeface="Cambria Math" panose="02040503050406030204" pitchFamily="18" charset="0"/>
-                                          <a:ea typeface="Cambria Math" panose="02040503050406030204" pitchFamily="18" charset="0"/>
-                                        </a:rPr>
-                                      </m:ctrlPr>
-                                    </m:sSubPr>
-                                    <m:e>
-                                      <m:r>
-                                        <a:rPr lang="en-US" i="1">
-                                          <a:latin typeface="Cambria Math" panose="02040503050406030204" pitchFamily="18" charset="0"/>
-                                        </a:rPr>
-                                        <m:t>𝑓</m:t>
-                                      </m:r>
-                                    </m:e>
-                                    <m:sub>
-                                      <m:r>
-                                        <a:rPr lang="en-US" b="0" i="1" smtClean="0">
-                                          <a:latin typeface="Cambria Math" panose="02040503050406030204" pitchFamily="18" charset="0"/>
-                                        </a:rPr>
-                                        <m:t>𝜔</m:t>
-                                      </m:r>
-                                    </m:sub>
-                                  </m:sSub>
-                                  <m:r>
-                                    <a:rPr lang="en-US" b="0" i="1" smtClean="0">
-                                      <a:latin typeface="Cambria Math" panose="02040503050406030204" pitchFamily="18" charset="0"/>
-                                      <a:ea typeface="Cambria Math" panose="02040503050406030204" pitchFamily="18" charset="0"/>
-                                    </a:rPr>
-                                    <m:t>)</m:t>
-                                  </m:r>
-                                </m:e>
-                              </m:d>
-                            </m:e>
-                            <m:sup>
-                              <m:r>
-                                <a:rPr lang="en-US" i="1">
-                                  <a:latin typeface="Cambria Math" panose="02040503050406030204" pitchFamily="18" charset="0"/>
-                                </a:rPr>
-                                <m:t>2</m:t>
-                              </m:r>
-                            </m:sup>
-                          </m:sSup>
-                        </m:e>
-                      </m:nary>
-                    </m:oMath>
-                    <m:oMath xmlns:m="http://schemas.openxmlformats.org/officeDocument/2006/math">
-                      <m:sSub>
-                        <m:sSubPr>
-                          <m:ctrlPr>
-                            <a:rPr lang="en-US" i="1">
-                              <a:latin typeface="Cambria Math" panose="02040503050406030204" pitchFamily="18" charset="0"/>
-                            </a:rPr>
-                          </m:ctrlPr>
-                        </m:sSubPr>
-                        <m:e>
-                          <m:r>
-                            <a:rPr lang="en-US" i="1">
-                              <a:latin typeface="Cambria Math" panose="02040503050406030204" pitchFamily="18" charset="0"/>
-                            </a:rPr>
-                            <m:t>𝑅</m:t>
-                          </m:r>
-                        </m:e>
-                        <m:sub>
-                          <m:r>
-                            <a:rPr lang="en-US" i="1">
-                              <a:latin typeface="Cambria Math" panose="02040503050406030204" pitchFamily="18" charset="0"/>
-                            </a:rPr>
-                            <m:t>𝐶</m:t>
-                          </m:r>
-                        </m:sub>
-                      </m:sSub>
-                      <m:d>
-                        <m:dPr>
-                          <m:ctrlPr>
-                            <a:rPr lang="en-US" i="1">
-                              <a:latin typeface="Cambria Math" panose="02040503050406030204" pitchFamily="18" charset="0"/>
-                            </a:rPr>
-                          </m:ctrlPr>
-                        </m:dPr>
-                        <m:e>
-                          <m:r>
-                            <a:rPr lang="en-US" i="1">
-                              <a:latin typeface="Cambria Math" panose="02040503050406030204" pitchFamily="18" charset="0"/>
-                            </a:rPr>
-                            <m:t>𝜃</m:t>
-                          </m:r>
-                        </m:e>
-                      </m:d>
-                      <m:r>
-                        <a:rPr lang="en-US" i="1">
-                          <a:latin typeface="Cambria Math" panose="02040503050406030204" pitchFamily="18" charset="0"/>
-                        </a:rPr>
-                        <m:t>=</m:t>
-                      </m:r>
-                      <m:sSup>
-                        <m:sSupPr>
-                          <m:ctrlPr>
-                            <a:rPr lang="en-US" i="1">
-                              <a:latin typeface="Cambria Math" panose="02040503050406030204" pitchFamily="18" charset="0"/>
-                            </a:rPr>
-                          </m:ctrlPr>
-                        </m:sSupPr>
-                        <m:e>
-                          <m:d>
-                            <m:dPr>
-                              <m:ctrlPr>
-                                <a:rPr lang="en-US" i="1">
-                                  <a:latin typeface="Cambria Math" panose="02040503050406030204" pitchFamily="18" charset="0"/>
-                                </a:rPr>
-                              </m:ctrlPr>
-                            </m:dPr>
-                            <m:e>
-                              <m:sSub>
-                                <m:sSubPr>
-                                  <m:ctrlPr>
-                                    <a:rPr lang="en-US" i="1">
-                                      <a:latin typeface="Cambria Math" panose="02040503050406030204" pitchFamily="18" charset="0"/>
-                                    </a:rPr>
-                                  </m:ctrlPr>
-                                </m:sSubPr>
-                                <m:e>
-                                  <m:r>
-                                    <a:rPr lang="en-US" i="1">
-                                      <a:latin typeface="Cambria Math" panose="02040503050406030204" pitchFamily="18" charset="0"/>
-                                    </a:rPr>
-                                    <m:t>𝑓</m:t>
-                                  </m:r>
-                                </m:e>
-                                <m:sub>
-                                  <m:r>
-                                    <a:rPr lang="en-US" i="1">
-                                      <a:latin typeface="Cambria Math" panose="02040503050406030204" pitchFamily="18" charset="0"/>
-                                    </a:rPr>
-                                    <m:t>𝜔</m:t>
-                                  </m:r>
-                                </m:sub>
-                              </m:sSub>
-                              <m:d>
-                                <m:dPr>
-                                  <m:ctrlPr>
-                                    <a:rPr lang="en-US" i="1">
-                                      <a:latin typeface="Cambria Math" panose="02040503050406030204" pitchFamily="18" charset="0"/>
-                                    </a:rPr>
-                                  </m:ctrlPr>
-                                </m:dPr>
-                                <m:e>
-                                  <m:r>
-                                    <a:rPr lang="en-US" i="1">
-                                      <a:latin typeface="Cambria Math" panose="02040503050406030204" pitchFamily="18" charset="0"/>
-                                    </a:rPr>
-                                    <m:t>0, </m:t>
-                                  </m:r>
-                                  <m:sSub>
-                                    <m:sSubPr>
-                                      <m:ctrlPr>
-                                        <a:rPr lang="en-US" i="1">
-                                          <a:latin typeface="Cambria Math" panose="02040503050406030204" pitchFamily="18" charset="0"/>
-                                        </a:rPr>
-                                      </m:ctrlPr>
-                                    </m:sSubPr>
-                                    <m:e>
-                                      <m:r>
-                                        <a:rPr lang="en-US" i="1">
-                                          <a:latin typeface="Cambria Math" panose="02040503050406030204" pitchFamily="18" charset="0"/>
-                                        </a:rPr>
-                                        <m:t>𝑝</m:t>
-                                      </m:r>
-                                    </m:e>
-                                    <m:sub>
-                                      <m:r>
-                                        <a:rPr lang="en-US" i="1">
-                                          <a:latin typeface="Cambria Math" panose="02040503050406030204" pitchFamily="18" charset="0"/>
-                                        </a:rPr>
-                                        <m:t>𝑖</m:t>
-                                      </m:r>
-                                    </m:sub>
-                                  </m:sSub>
-                                </m:e>
-                              </m:d>
-                              <m:r>
-                                <a:rPr lang="en-US" i="1">
-                                  <a:latin typeface="Cambria Math" panose="02040503050406030204" pitchFamily="18" charset="0"/>
-                                </a:rPr>
-                                <m:t>−</m:t>
-                              </m:r>
-                              <m:sSub>
-                                <m:sSubPr>
-                                  <m:ctrlPr>
-                                    <a:rPr lang="en-US" i="1">
-                                      <a:latin typeface="Cambria Math" panose="02040503050406030204" pitchFamily="18" charset="0"/>
-                                    </a:rPr>
-                                  </m:ctrlPr>
-                                </m:sSubPr>
-                                <m:e>
-                                  <m:r>
-                                    <a:rPr lang="en-US" b="0" i="1" smtClean="0">
-                                      <a:latin typeface="Cambria Math" panose="02040503050406030204" pitchFamily="18" charset="0"/>
-                                    </a:rPr>
-                                    <m:t>𝑥</m:t>
-                                  </m:r>
-                                </m:e>
-                                <m:sub>
-                                  <m:r>
-                                    <a:rPr lang="en-US" i="1">
-                                      <a:latin typeface="Cambria Math" panose="02040503050406030204" pitchFamily="18" charset="0"/>
-                                    </a:rPr>
-                                    <m:t>0</m:t>
-                                  </m:r>
-                                </m:sub>
-                              </m:sSub>
-                            </m:e>
-                          </m:d>
-                        </m:e>
-                        <m:sup>
-                          <m:r>
-                            <a:rPr lang="en-US" i="1">
-                              <a:latin typeface="Cambria Math" panose="02040503050406030204" pitchFamily="18" charset="0"/>
-                            </a:rPr>
-                            <m:t>2</m:t>
-                          </m:r>
-                        </m:sup>
-                      </m:sSup>
-                      <m:r>
-                        <a:rPr lang="en-US" i="1">
-                          <a:latin typeface="Cambria Math" panose="02040503050406030204" pitchFamily="18" charset="0"/>
-                        </a:rPr>
-                        <m:t>+</m:t>
-                      </m:r>
-                      <m:sSup>
-                        <m:sSupPr>
-                          <m:ctrlPr>
-                            <a:rPr lang="en-US" b="0" i="1" smtClean="0">
-                              <a:latin typeface="Cambria Math" panose="02040503050406030204" pitchFamily="18" charset="0"/>
-                            </a:rPr>
-                          </m:ctrlPr>
-                        </m:sSupPr>
-                        <m:e>
-                          <m:d>
-                            <m:dPr>
-                              <m:begChr m:val="["/>
-                              <m:endChr m:val="]"/>
-                              <m:ctrlPr>
-                                <a:rPr lang="en-US" i="1" smtClean="0">
-                                  <a:latin typeface="Cambria Math" panose="02040503050406030204" pitchFamily="18" charset="0"/>
-                                </a:rPr>
-                              </m:ctrlPr>
-                            </m:dPr>
-                            <m:e>
-                              <m:f>
-                                <m:fPr>
-                                  <m:ctrlPr>
-                                    <a:rPr lang="en-US" i="1">
-                                      <a:latin typeface="Cambria Math" panose="02040503050406030204" pitchFamily="18" charset="0"/>
-                                    </a:rPr>
-                                  </m:ctrlPr>
-                                </m:fPr>
-                                <m:num>
-                                  <m:r>
-                                    <a:rPr lang="en-US" i="1">
-                                      <a:latin typeface="Cambria Math" panose="02040503050406030204" pitchFamily="18" charset="0"/>
-                                    </a:rPr>
-                                    <m:t>𝑑</m:t>
-                                  </m:r>
-                                  <m:sSub>
-                                    <m:sSubPr>
-                                      <m:ctrlPr>
-                                        <a:rPr lang="en-US" i="1">
-                                          <a:latin typeface="Cambria Math" panose="02040503050406030204" pitchFamily="18" charset="0"/>
-                                        </a:rPr>
-                                      </m:ctrlPr>
-                                    </m:sSubPr>
-                                    <m:e>
-                                      <m:r>
-                                        <a:rPr lang="en-US" i="1">
-                                          <a:latin typeface="Cambria Math" panose="02040503050406030204" pitchFamily="18" charset="0"/>
-                                        </a:rPr>
-                                        <m:t>𝑓</m:t>
-                                      </m:r>
-                                    </m:e>
-                                    <m:sub>
-                                      <m:r>
-                                        <a:rPr lang="en-US" i="1">
-                                          <a:latin typeface="Cambria Math" panose="02040503050406030204" pitchFamily="18" charset="0"/>
-                                        </a:rPr>
-                                        <m:t>𝜔</m:t>
-                                      </m:r>
-                                    </m:sub>
-                                  </m:sSub>
-                                  <m:d>
-                                    <m:dPr>
-                                      <m:ctrlPr>
-                                        <a:rPr lang="en-US" i="1">
-                                          <a:latin typeface="Cambria Math" panose="02040503050406030204" pitchFamily="18" charset="0"/>
-                                        </a:rPr>
-                                      </m:ctrlPr>
-                                    </m:dPr>
-                                    <m:e>
-                                      <m:r>
-                                        <a:rPr lang="en-US" i="1">
-                                          <a:latin typeface="Cambria Math" panose="02040503050406030204" pitchFamily="18" charset="0"/>
-                                        </a:rPr>
-                                        <m:t>0, </m:t>
-                                      </m:r>
-                                      <m:sSub>
-                                        <m:sSubPr>
-                                          <m:ctrlPr>
-                                            <a:rPr lang="en-US" i="1">
-                                              <a:latin typeface="Cambria Math" panose="02040503050406030204" pitchFamily="18" charset="0"/>
-                                            </a:rPr>
-                                          </m:ctrlPr>
-                                        </m:sSubPr>
-                                        <m:e>
-                                          <m:r>
-                                            <a:rPr lang="en-US" i="1">
-                                              <a:latin typeface="Cambria Math" panose="02040503050406030204" pitchFamily="18" charset="0"/>
-                                            </a:rPr>
-                                            <m:t>𝑝</m:t>
-                                          </m:r>
-                                        </m:e>
-                                        <m:sub>
-                                          <m:r>
-                                            <a:rPr lang="en-US" i="1">
-                                              <a:latin typeface="Cambria Math" panose="02040503050406030204" pitchFamily="18" charset="0"/>
-                                            </a:rPr>
-                                            <m:t>𝑖</m:t>
-                                          </m:r>
-                                        </m:sub>
-                                      </m:sSub>
-                                    </m:e>
-                                  </m:d>
-                                </m:num>
-                                <m:den>
-                                  <m:r>
-                                    <a:rPr lang="en-US" i="1">
-                                      <a:latin typeface="Cambria Math" panose="02040503050406030204" pitchFamily="18" charset="0"/>
-                                    </a:rPr>
-                                    <m:t>𝑑𝑧</m:t>
-                                  </m:r>
-                                </m:den>
-                              </m:f>
-                              <m:r>
-                                <a:rPr lang="en-US" i="1">
-                                  <a:latin typeface="Cambria Math" panose="02040503050406030204" pitchFamily="18" charset="0"/>
-                                </a:rPr>
-                                <m:t>−</m:t>
-                              </m:r>
-                              <m:sSub>
-                                <m:sSubPr>
-                                  <m:ctrlPr>
-                                    <a:rPr lang="en-US" i="1">
-                                      <a:latin typeface="Cambria Math" panose="02040503050406030204" pitchFamily="18" charset="0"/>
-                                    </a:rPr>
-                                  </m:ctrlPr>
-                                </m:sSubPr>
-                                <m:e>
-                                  <m:r>
-                                    <a:rPr lang="en-US" i="1">
-                                      <a:latin typeface="Cambria Math" panose="02040503050406030204" pitchFamily="18" charset="0"/>
-                                    </a:rPr>
-                                    <m:t>𝑣</m:t>
-                                  </m:r>
-                                </m:e>
-                                <m:sub>
-                                  <m:r>
-                                    <a:rPr lang="en-US" i="1">
-                                      <a:latin typeface="Cambria Math" panose="02040503050406030204" pitchFamily="18" charset="0"/>
-                                    </a:rPr>
-                                    <m:t>0</m:t>
-                                  </m:r>
-                                </m:sub>
-                              </m:sSub>
-                            </m:e>
-                          </m:d>
-                        </m:e>
-                        <m:sup>
-                          <m:r>
-                            <a:rPr lang="en-US" b="0" i="1" smtClean="0">
-                              <a:latin typeface="Cambria Math" panose="02040503050406030204" pitchFamily="18" charset="0"/>
-                            </a:rPr>
-                            <m:t>2</m:t>
-                          </m:r>
-                        </m:sup>
-                      </m:sSup>
-                    </m:oMath>
-                  </m:oMathPara>
-                </a14:m>
                 <a:endParaRPr lang="en-US" dirty="0"/>
               </a:p>
               <a:p>
@@ -5276,7 +4983,7 @@
             </p:txBody>
           </p:sp>
         </mc:Choice>
-        <mc:Fallback>
+        <mc:Fallback xmlns="">
           <p:sp>
             <p:nvSpPr>
               <p:cNvPr id="8" name="Content Placeholder 7">
@@ -5297,7 +5004,7 @@
               <a:blipFill>
                 <a:blip r:embed="rId2"/>
                 <a:stretch>
-                  <a:fillRect l="-1305" t="-1316" b="-16842"/>
+                  <a:fillRect l="-1305" t="-1316"/>
                 </a:stretch>
               </a:blipFill>
             </p:spPr>
@@ -5386,22 +5093,29 @@
           <a:lstStyle/>
           <a:p>
             <a:r>
-              <a:rPr lang="en-US" dirty="0"/>
-              <a:t>PINNs: </a:t>
+              <a:rPr lang="en-US" dirty="0" err="1">
+                <a:solidFill>
+                  <a:srgbClr val="0033CC"/>
+                </a:solidFill>
+              </a:rPr>
+              <a:t>Autodiff</a:t>
             </a:r>
             <a:r>
-              <a:rPr lang="en-US" dirty="0" err="1">
+              <a:rPr lang="en-US" dirty="0">
+                <a:solidFill>
+                  <a:srgbClr val="0033CC"/>
+                </a:solidFill>
+              </a:rPr>
+              <a:t>: </a:t>
+            </a:r>
+            <a:r>
+              <a:rPr lang="en-US" dirty="0">
                 <a:solidFill>
                   <a:schemeClr val="accent1"/>
                 </a:solidFill>
               </a:rPr>
-              <a:t>Autodiff</a:t>
+              <a:t>Example (1)</a:t>
             </a:r>
-            <a:endParaRPr lang="en-US" dirty="0">
-              <a:solidFill>
-                <a:schemeClr val="accent1"/>
-              </a:solidFill>
-            </a:endParaRPr>
           </a:p>
         </p:txBody>
       </p:sp>
@@ -5433,7 +5147,7 @@
                 </a:pPr>
                 <a:r>
                   <a:rPr lang="en-US" dirty="0"/>
-                  <a:t>Compute </a:t>
+                  <a:t>We can compute </a:t>
                 </a:r>
               </a:p>
               <a:p>
@@ -5446,301 +5160,48 @@
                       <m:jc m:val="centerGroup"/>
                     </m:oMathParaPr>
                     <m:oMath xmlns:m="http://schemas.openxmlformats.org/officeDocument/2006/math">
-                      <m:sSub>
-                        <m:sSubPr>
+                      <m:f>
+                        <m:fPr>
                           <m:ctrlPr>
-                            <a:rPr lang="en-US" b="0" i="1" smtClean="0">
+                            <a:rPr lang="en-US" i="1">
                               <a:latin typeface="Cambria Math" panose="02040503050406030204" pitchFamily="18" charset="0"/>
                               <a:ea typeface="Cambria Math" panose="02040503050406030204" pitchFamily="18" charset="0"/>
                             </a:rPr>
                           </m:ctrlPr>
-                        </m:sSubPr>
-                        <m:e>
+                        </m:fPr>
+                        <m:num>
                           <m:r>
-                            <m:rPr>
-                              <m:sty m:val="p"/>
-                            </m:rPr>
-                            <a:rPr lang="en-US" i="1" smtClean="0">
+                            <a:rPr lang="en-US" i="1">
                               <a:latin typeface="Cambria Math" panose="02040503050406030204" pitchFamily="18" charset="0"/>
                               <a:ea typeface="Cambria Math" panose="02040503050406030204" pitchFamily="18" charset="0"/>
                             </a:rPr>
-                            <m:t>∇</m:t>
+                            <m:t>𝜕</m:t>
                           </m:r>
-                        </m:e>
-                        <m:sub>
                           <m:r>
-                            <a:rPr lang="en-US" b="0" i="1" smtClean="0">
+                            <a:rPr lang="en-US" i="1">
                               <a:latin typeface="Cambria Math" panose="02040503050406030204" pitchFamily="18" charset="0"/>
                               <a:ea typeface="Cambria Math" panose="02040503050406030204" pitchFamily="18" charset="0"/>
                             </a:rPr>
-                            <m:t>𝑝</m:t>
+                            <m:t>𝑥</m:t>
                           </m:r>
-                        </m:sub>
-                      </m:sSub>
-                      <m:r>
-                        <a:rPr lang="en-US" b="0" i="1" smtClean="0">
-                          <a:latin typeface="Cambria Math" panose="02040503050406030204" pitchFamily="18" charset="0"/>
-                          <a:ea typeface="Cambria Math" panose="02040503050406030204" pitchFamily="18" charset="0"/>
-                        </a:rPr>
-                        <m:t>𝑥</m:t>
-                      </m:r>
-                      <m:r>
-                        <a:rPr lang="en-US" b="0" i="1" smtClean="0">
-                          <a:latin typeface="Cambria Math" panose="02040503050406030204" pitchFamily="18" charset="0"/>
-                          <a:ea typeface="Cambria Math" panose="02040503050406030204" pitchFamily="18" charset="0"/>
-                        </a:rPr>
-                        <m:t>=</m:t>
-                      </m:r>
-                      <m:d>
-                        <m:dPr>
-                          <m:ctrlPr>
-                            <a:rPr lang="en-US" b="0" i="1" smtClean="0">
+                        </m:num>
+                        <m:den>
+                          <m:r>
+                            <a:rPr lang="en-US" i="1">
                               <a:latin typeface="Cambria Math" panose="02040503050406030204" pitchFamily="18" charset="0"/>
                               <a:ea typeface="Cambria Math" panose="02040503050406030204" pitchFamily="18" charset="0"/>
                             </a:rPr>
-                          </m:ctrlPr>
-                        </m:dPr>
-                        <m:e>
-                          <m:f>
-                            <m:fPr>
-                              <m:ctrlPr>
-                                <a:rPr lang="en-US" b="0" i="1" smtClean="0">
-                                  <a:latin typeface="Cambria Math" panose="02040503050406030204" pitchFamily="18" charset="0"/>
-                                  <a:ea typeface="Cambria Math" panose="02040503050406030204" pitchFamily="18" charset="0"/>
-                                </a:rPr>
-                              </m:ctrlPr>
-                            </m:fPr>
-                            <m:num>
-                              <m:r>
-                                <a:rPr lang="en-US" b="0" i="1" smtClean="0">
-                                  <a:latin typeface="Cambria Math" panose="02040503050406030204" pitchFamily="18" charset="0"/>
-                                  <a:ea typeface="Cambria Math" panose="02040503050406030204" pitchFamily="18" charset="0"/>
-                                </a:rPr>
-                                <m:t>𝜕</m:t>
-                              </m:r>
-                              <m:r>
-                                <a:rPr lang="en-US" b="0" i="1" smtClean="0">
-                                  <a:latin typeface="Cambria Math" panose="02040503050406030204" pitchFamily="18" charset="0"/>
-                                  <a:ea typeface="Cambria Math" panose="02040503050406030204" pitchFamily="18" charset="0"/>
-                                </a:rPr>
-                                <m:t>𝑥</m:t>
-                              </m:r>
-                            </m:num>
-                            <m:den>
-                              <m:r>
-                                <a:rPr lang="en-US" b="0" i="1" smtClean="0">
-                                  <a:latin typeface="Cambria Math" panose="02040503050406030204" pitchFamily="18" charset="0"/>
-                                  <a:ea typeface="Cambria Math" panose="02040503050406030204" pitchFamily="18" charset="0"/>
-                                </a:rPr>
-                                <m:t>𝜕</m:t>
-                              </m:r>
-                              <m:r>
-                                <a:rPr lang="en-US" b="0" i="1" smtClean="0">
-                                  <a:latin typeface="Cambria Math" panose="02040503050406030204" pitchFamily="18" charset="0"/>
-                                  <a:ea typeface="Cambria Math" panose="02040503050406030204" pitchFamily="18" charset="0"/>
-                                </a:rPr>
-                                <m:t>𝑧</m:t>
-                              </m:r>
-                            </m:den>
-                          </m:f>
+                            <m:t>𝜕</m:t>
+                          </m:r>
                           <m:r>
-                            <a:rPr lang="en-US" b="0" i="1" smtClean="0">
+                            <a:rPr lang="en-US" i="1">
                               <a:latin typeface="Cambria Math" panose="02040503050406030204" pitchFamily="18" charset="0"/>
                               <a:ea typeface="Cambria Math" panose="02040503050406030204" pitchFamily="18" charset="0"/>
                             </a:rPr>
-                            <m:t>,</m:t>
+                            <m:t>𝑧</m:t>
                           </m:r>
-                          <m:f>
-                            <m:fPr>
-                              <m:ctrlPr>
-                                <a:rPr lang="en-US" i="1">
-                                  <a:latin typeface="Cambria Math" panose="02040503050406030204" pitchFamily="18" charset="0"/>
-                                  <a:ea typeface="Cambria Math" panose="02040503050406030204" pitchFamily="18" charset="0"/>
-                                </a:rPr>
-                              </m:ctrlPr>
-                            </m:fPr>
-                            <m:num>
-                              <m:r>
-                                <a:rPr lang="en-US" i="1">
-                                  <a:latin typeface="Cambria Math" panose="02040503050406030204" pitchFamily="18" charset="0"/>
-                                  <a:ea typeface="Cambria Math" panose="02040503050406030204" pitchFamily="18" charset="0"/>
-                                </a:rPr>
-                                <m:t>𝜕</m:t>
-                              </m:r>
-                              <m:r>
-                                <a:rPr lang="en-US" b="0" i="1" smtClean="0">
-                                  <a:latin typeface="Cambria Math" panose="02040503050406030204" pitchFamily="18" charset="0"/>
-                                  <a:ea typeface="Cambria Math" panose="02040503050406030204" pitchFamily="18" charset="0"/>
-                                </a:rPr>
-                                <m:t>𝑥</m:t>
-                              </m:r>
-                            </m:num>
-                            <m:den>
-                              <m:r>
-                                <a:rPr lang="en-US" i="1">
-                                  <a:latin typeface="Cambria Math" panose="02040503050406030204" pitchFamily="18" charset="0"/>
-                                  <a:ea typeface="Cambria Math" panose="02040503050406030204" pitchFamily="18" charset="0"/>
-                                </a:rPr>
-                                <m:t>𝜕</m:t>
-                              </m:r>
-                              <m:sSub>
-                                <m:sSubPr>
-                                  <m:ctrlPr>
-                                    <a:rPr lang="en-US" b="0" i="1" smtClean="0">
-                                      <a:latin typeface="Cambria Math" panose="02040503050406030204" pitchFamily="18" charset="0"/>
-                                      <a:ea typeface="Cambria Math" panose="02040503050406030204" pitchFamily="18" charset="0"/>
-                                    </a:rPr>
-                                  </m:ctrlPr>
-                                </m:sSubPr>
-                                <m:e>
-                                  <m:r>
-                                    <a:rPr lang="en-US" b="0" i="1" smtClean="0">
-                                      <a:latin typeface="Cambria Math" panose="02040503050406030204" pitchFamily="18" charset="0"/>
-                                      <a:ea typeface="Cambria Math" panose="02040503050406030204" pitchFamily="18" charset="0"/>
-                                    </a:rPr>
-                                    <m:t>𝑥</m:t>
-                                  </m:r>
-                                </m:e>
-                                <m:sub>
-                                  <m:r>
-                                    <a:rPr lang="en-US" b="0" i="1" smtClean="0">
-                                      <a:latin typeface="Cambria Math" panose="02040503050406030204" pitchFamily="18" charset="0"/>
-                                      <a:ea typeface="Cambria Math" panose="02040503050406030204" pitchFamily="18" charset="0"/>
-                                    </a:rPr>
-                                    <m:t>0</m:t>
-                                  </m:r>
-                                </m:sub>
-                              </m:sSub>
-                            </m:den>
-                          </m:f>
-                          <m:r>
-                            <a:rPr lang="en-US" b="0" i="1" smtClean="0">
-                              <a:latin typeface="Cambria Math" panose="02040503050406030204" pitchFamily="18" charset="0"/>
-                              <a:ea typeface="Cambria Math" panose="02040503050406030204" pitchFamily="18" charset="0"/>
-                            </a:rPr>
-                            <m:t>,</m:t>
-                          </m:r>
-                          <m:f>
-                            <m:fPr>
-                              <m:ctrlPr>
-                                <a:rPr lang="en-US" i="1">
-                                  <a:latin typeface="Cambria Math" panose="02040503050406030204" pitchFamily="18" charset="0"/>
-                                  <a:ea typeface="Cambria Math" panose="02040503050406030204" pitchFamily="18" charset="0"/>
-                                </a:rPr>
-                              </m:ctrlPr>
-                            </m:fPr>
-                            <m:num>
-                              <m:r>
-                                <a:rPr lang="en-US" i="1">
-                                  <a:latin typeface="Cambria Math" panose="02040503050406030204" pitchFamily="18" charset="0"/>
-                                  <a:ea typeface="Cambria Math" panose="02040503050406030204" pitchFamily="18" charset="0"/>
-                                </a:rPr>
-                                <m:t>𝜕</m:t>
-                              </m:r>
-                              <m:r>
-                                <a:rPr lang="en-US" b="0" i="1" smtClean="0">
-                                  <a:latin typeface="Cambria Math" panose="02040503050406030204" pitchFamily="18" charset="0"/>
-                                  <a:ea typeface="Cambria Math" panose="02040503050406030204" pitchFamily="18" charset="0"/>
-                                </a:rPr>
-                                <m:t>𝑥</m:t>
-                              </m:r>
-                            </m:num>
-                            <m:den>
-                              <m:r>
-                                <a:rPr lang="en-US" i="1">
-                                  <a:latin typeface="Cambria Math" panose="02040503050406030204" pitchFamily="18" charset="0"/>
-                                  <a:ea typeface="Cambria Math" panose="02040503050406030204" pitchFamily="18" charset="0"/>
-                                </a:rPr>
-                                <m:t>𝜕</m:t>
-                              </m:r>
-                              <m:sSub>
-                                <m:sSubPr>
-                                  <m:ctrlPr>
-                                    <a:rPr lang="en-US" b="0" i="1" smtClean="0">
-                                      <a:latin typeface="Cambria Math" panose="02040503050406030204" pitchFamily="18" charset="0"/>
-                                      <a:ea typeface="Cambria Math" panose="02040503050406030204" pitchFamily="18" charset="0"/>
-                                    </a:rPr>
-                                  </m:ctrlPr>
-                                </m:sSubPr>
-                                <m:e>
-                                  <m:r>
-                                    <a:rPr lang="en-US" b="0" i="1" smtClean="0">
-                                      <a:latin typeface="Cambria Math" panose="02040503050406030204" pitchFamily="18" charset="0"/>
-                                      <a:ea typeface="Cambria Math" panose="02040503050406030204" pitchFamily="18" charset="0"/>
-                                    </a:rPr>
-                                    <m:t>𝑣</m:t>
-                                  </m:r>
-                                </m:e>
-                                <m:sub>
-                                  <m:r>
-                                    <a:rPr lang="en-US" b="0" i="1" smtClean="0">
-                                      <a:latin typeface="Cambria Math" panose="02040503050406030204" pitchFamily="18" charset="0"/>
-                                      <a:ea typeface="Cambria Math" panose="02040503050406030204" pitchFamily="18" charset="0"/>
-                                    </a:rPr>
-                                    <m:t>0</m:t>
-                                  </m:r>
-                                </m:sub>
-                              </m:sSub>
-                            </m:den>
-                          </m:f>
-                          <m:r>
-                            <a:rPr lang="en-US" b="0" i="1" smtClean="0">
-                              <a:latin typeface="Cambria Math" panose="02040503050406030204" pitchFamily="18" charset="0"/>
-                              <a:ea typeface="Cambria Math" panose="02040503050406030204" pitchFamily="18" charset="0"/>
-                            </a:rPr>
-                            <m:t>,</m:t>
-                          </m:r>
-                          <m:f>
-                            <m:fPr>
-                              <m:ctrlPr>
-                                <a:rPr lang="en-US" i="1">
-                                  <a:latin typeface="Cambria Math" panose="02040503050406030204" pitchFamily="18" charset="0"/>
-                                  <a:ea typeface="Cambria Math" panose="02040503050406030204" pitchFamily="18" charset="0"/>
-                                </a:rPr>
-                              </m:ctrlPr>
-                            </m:fPr>
-                            <m:num>
-                              <m:r>
-                                <a:rPr lang="en-US" i="1">
-                                  <a:latin typeface="Cambria Math" panose="02040503050406030204" pitchFamily="18" charset="0"/>
-                                  <a:ea typeface="Cambria Math" panose="02040503050406030204" pitchFamily="18" charset="0"/>
-                                </a:rPr>
-                                <m:t>𝜕</m:t>
-                              </m:r>
-                              <m:r>
-                                <a:rPr lang="en-US" b="0" i="1" smtClean="0">
-                                  <a:latin typeface="Cambria Math" panose="02040503050406030204" pitchFamily="18" charset="0"/>
-                                  <a:ea typeface="Cambria Math" panose="02040503050406030204" pitchFamily="18" charset="0"/>
-                                </a:rPr>
-                                <m:t>𝑥</m:t>
-                              </m:r>
-                            </m:num>
-                            <m:den>
-                              <m:r>
-                                <a:rPr lang="en-US" i="1">
-                                  <a:latin typeface="Cambria Math" panose="02040503050406030204" pitchFamily="18" charset="0"/>
-                                  <a:ea typeface="Cambria Math" panose="02040503050406030204" pitchFamily="18" charset="0"/>
-                                </a:rPr>
-                                <m:t>𝜕</m:t>
-                              </m:r>
-                              <m:r>
-                                <a:rPr lang="en-US" b="0" i="1" smtClean="0">
-                                  <a:latin typeface="Cambria Math" panose="02040503050406030204" pitchFamily="18" charset="0"/>
-                                  <a:ea typeface="Cambria Math" panose="02040503050406030204" pitchFamily="18" charset="0"/>
-                                </a:rPr>
-                                <m:t>𝜁</m:t>
-                              </m:r>
-                              <m:r>
-                                <a:rPr lang="en-US" b="0" i="1" smtClean="0">
-                                  <a:latin typeface="Cambria Math" panose="02040503050406030204" pitchFamily="18" charset="0"/>
-                                  <a:ea typeface="Cambria Math" panose="02040503050406030204" pitchFamily="18" charset="0"/>
-                                </a:rPr>
-                                <m:t> </m:t>
-                              </m:r>
-                            </m:den>
-                          </m:f>
-                        </m:e>
-                      </m:d>
+                        </m:den>
+                      </m:f>
                     </m:oMath>
                   </m:oMathPara>
                 </a14:m>
@@ -5771,7 +5232,7 @@
                     <a:latin typeface="Courier New" panose="02070309020205020404" pitchFamily="49" charset="0"/>
                     <a:cs typeface="Courier New" panose="02070309020205020404" pitchFamily="49" charset="0"/>
                   </a:rPr>
-                  <a:t>dxdp</a:t>
+                  <a:t>dxdz</a:t>
                 </a:r>
                 <a:r>
                   <a:rPr lang="en-US" b="1" dirty="0">
@@ -5793,6 +5254,18 @@
                   </a:rPr>
                   <a:t>torch.autograd.grad</a:t>
                 </a:r>
+                <a:endParaRPr lang="en-US" b="1" dirty="0">
+                  <a:solidFill>
+                    <a:srgbClr val="0033CC"/>
+                  </a:solidFill>
+                  <a:latin typeface="Courier New" panose="02070309020205020404" pitchFamily="49" charset="0"/>
+                  <a:cs typeface="Courier New" panose="02070309020205020404" pitchFamily="49" charset="0"/>
+                </a:endParaRPr>
+              </a:p>
+              <a:p>
+                <a:pPr marL="0" indent="0">
+                  <a:buNone/>
+                </a:pPr>
                 <a:r>
                   <a:rPr lang="en-US" b="1" dirty="0">
                     <a:solidFill>
@@ -5801,7 +5274,7 @@
                     <a:latin typeface="Courier New" panose="02070309020205020404" pitchFamily="49" charset="0"/>
                     <a:cs typeface="Courier New" panose="02070309020205020404" pitchFamily="49" charset="0"/>
                   </a:rPr>
-                  <a:t>(x, p,                                 				</a:t>
+                  <a:t>			(x, z,                                 		 	 </a:t>
                 </a:r>
                 <a:r>
                   <a:rPr lang="en-US" b="1" dirty="0" err="1">
@@ -5836,7 +5309,7 @@
                     <a:latin typeface="Courier New" panose="02070309020205020404" pitchFamily="49" charset="0"/>
                     <a:cs typeface="Courier New" panose="02070309020205020404" pitchFamily="49" charset="0"/>
                   </a:rPr>
-                  <a:t>                    </a:t>
+                  <a:t>           	 </a:t>
                 </a:r>
                 <a:r>
                   <a:rPr lang="en-US" b="1" dirty="0" err="1">
@@ -5865,115 +5338,6 @@
                     </a:solidFill>
                   </a:rPr>
                   <a:t>]</a:t>
-                </a:r>
-              </a:p>
-              <a:p>
-                <a:pPr marL="0" indent="0">
-                  <a:buNone/>
-                </a:pPr>
-                <a:endParaRPr lang="en-US" dirty="0"/>
-              </a:p>
-              <a:p>
-                <a:pPr marL="0" indent="0">
-                  <a:buNone/>
-                </a:pPr>
-                <a:r>
-                  <a:rPr lang="en-US" dirty="0"/>
-                  <a:t>Pick off </a:t>
-                </a:r>
-                <a:r>
-                  <a:rPr lang="en-US" i="1" dirty="0">
-                    <a:solidFill>
-                      <a:srgbClr val="0033CC"/>
-                    </a:solidFill>
-                  </a:rPr>
-                  <a:t>dx</a:t>
-                </a:r>
-                <a:r>
-                  <a:rPr lang="en-US" dirty="0">
-                    <a:solidFill>
-                      <a:srgbClr val="0033CC"/>
-                    </a:solidFill>
-                  </a:rPr>
-                  <a:t>/</a:t>
-                </a:r>
-                <a:r>
-                  <a:rPr lang="en-US" i="1" dirty="0" err="1">
-                    <a:solidFill>
-                      <a:srgbClr val="0033CC"/>
-                    </a:solidFill>
-                  </a:rPr>
-                  <a:t>dz</a:t>
-                </a:r>
-                <a:r>
-                  <a:rPr lang="en-US" i="1" dirty="0">
-                    <a:solidFill>
-                      <a:srgbClr val="0033CC"/>
-                    </a:solidFill>
-                  </a:rPr>
-                  <a:t> </a:t>
-                </a:r>
-                <a:r>
-                  <a:rPr lang="en-US" dirty="0"/>
-                  <a:t>and change its shape.</a:t>
-                </a:r>
-              </a:p>
-              <a:p>
-                <a:pPr marL="0" indent="0">
-                  <a:buNone/>
-                </a:pPr>
-                <a:r>
-                  <a:rPr lang="en-US" dirty="0"/>
-                  <a:t>        </a:t>
-                </a:r>
-              </a:p>
-              <a:p>
-                <a:pPr marL="0" indent="0">
-                  <a:buNone/>
-                </a:pPr>
-                <a:r>
-                  <a:rPr lang="en-US" dirty="0"/>
-                  <a:t>        	</a:t>
-                </a:r>
-                <a:r>
-                  <a:rPr lang="en-US" b="1" dirty="0" err="1">
-                    <a:solidFill>
-                      <a:srgbClr val="0033CC"/>
-                    </a:solidFill>
-                    <a:latin typeface="Courier New" panose="02070309020205020404" pitchFamily="49" charset="0"/>
-                    <a:cs typeface="Courier New" panose="02070309020205020404" pitchFamily="49" charset="0"/>
-                  </a:rPr>
-                  <a:t>dxdz</a:t>
-                </a:r>
-                <a:r>
-                  <a:rPr lang="en-US" b="1" dirty="0">
-                    <a:solidFill>
-                      <a:srgbClr val="0033CC"/>
-                    </a:solidFill>
-                    <a:latin typeface="Courier New" panose="02070309020205020404" pitchFamily="49" charset="0"/>
-                    <a:cs typeface="Courier New" panose="02070309020205020404" pitchFamily="49" charset="0"/>
-                  </a:rPr>
-                  <a:t> = </a:t>
-                </a:r>
-                <a:r>
-                  <a:rPr lang="en-US" b="1" dirty="0" err="1">
-                    <a:solidFill>
-                      <a:srgbClr val="0033CC"/>
-                    </a:solidFill>
-                    <a:latin typeface="Courier New" panose="02070309020205020404" pitchFamily="49" charset="0"/>
-                    <a:cs typeface="Courier New" panose="02070309020205020404" pitchFamily="49" charset="0"/>
-                  </a:rPr>
-                  <a:t>dxdp</a:t>
-                </a:r>
-                <a:r>
-                  <a:rPr lang="en-US" b="1" dirty="0">
-                    <a:solidFill>
-                      <a:srgbClr val="0033CC"/>
-                    </a:solidFill>
-                    <a:latin typeface="Courier New" panose="02070309020205020404" pitchFamily="49" charset="0"/>
-                    <a:cs typeface="Courier New" panose="02070309020205020404" pitchFamily="49" charset="0"/>
-                  </a:rPr>
-                  <a:t>[:, 0].view(-1, 1)</a:t>
                 </a:r>
               </a:p>
             </p:txBody>
@@ -6000,7 +5364,7 @@
               <a:blipFill>
                 <a:blip r:embed="rId2"/>
                 <a:stretch>
-                  <a:fillRect l="-1305" t="-1316" r="-67863"/>
+                  <a:fillRect l="-1305" t="-1316" r="-30343"/>
                 </a:stretch>
               </a:blipFill>
             </p:spPr>
@@ -6089,8 +5453,20 @@
           <a:lstStyle/>
           <a:p>
             <a:r>
-              <a:rPr lang="en-US" dirty="0"/>
-              <a:t>PINNs: </a:t>
+              <a:rPr lang="en-US" dirty="0" err="1">
+                <a:solidFill>
+                  <a:srgbClr val="0033CC"/>
+                </a:solidFill>
+              </a:rPr>
+              <a:t>Autodiff</a:t>
+            </a:r>
+            <a:r>
+              <a:rPr lang="en-US" dirty="0">
+                <a:solidFill>
+                  <a:srgbClr val="0033CC"/>
+                </a:solidFill>
+              </a:rPr>
+              <a:t>: </a:t>
             </a:r>
             <a:r>
               <a:rPr lang="en-US" dirty="0">
@@ -6098,7 +5474,7 @@
                   <a:schemeClr val="accent1"/>
                 </a:solidFill>
               </a:rPr>
-              <a:t>Automatic Differentiation</a:t>
+              <a:t>Example (2)</a:t>
             </a:r>
           </a:p>
         </p:txBody>
@@ -6131,7 +5507,7 @@
                 </a:pPr>
                 <a:r>
                   <a:rPr lang="en-US" dirty="0"/>
-                  <a:t>Compute </a:t>
+                  <a:t>To compute </a:t>
                 </a:r>
                 <a:endParaRPr lang="en-US" i="1" dirty="0">
                   <a:latin typeface="Cambria Math" panose="02040503050406030204" pitchFamily="18" charset="0"/>
@@ -6145,40 +5521,9 @@
                 <a14:m>
                   <m:oMathPara xmlns:m="http://schemas.openxmlformats.org/officeDocument/2006/math">
                     <m:oMathParaPr>
-                      <m:jc m:val="centerGroup"/>
+                      <m:jc m:val="center"/>
                     </m:oMathParaPr>
                     <m:oMath xmlns:m="http://schemas.openxmlformats.org/officeDocument/2006/math">
-                      <m:sSub>
-                        <m:sSubPr>
-                          <m:ctrlPr>
-                            <a:rPr lang="en-US" b="0" i="1" smtClean="0">
-                              <a:latin typeface="Cambria Math" panose="02040503050406030204" pitchFamily="18" charset="0"/>
-                              <a:ea typeface="Cambria Math" panose="02040503050406030204" pitchFamily="18" charset="0"/>
-                            </a:rPr>
-                          </m:ctrlPr>
-                        </m:sSubPr>
-                        <m:e>
-                          <m:r>
-                            <m:rPr>
-                              <m:sty m:val="p"/>
-                            </m:rPr>
-                            <a:rPr lang="en-US" i="1" smtClean="0">
-                              <a:latin typeface="Cambria Math" panose="02040503050406030204" pitchFamily="18" charset="0"/>
-                              <a:ea typeface="Cambria Math" panose="02040503050406030204" pitchFamily="18" charset="0"/>
-                            </a:rPr>
-                            <m:t>∇</m:t>
-                          </m:r>
-                        </m:e>
-                        <m:sub>
-                          <m:r>
-                            <a:rPr lang="en-US" b="0" i="1" smtClean="0">
-                              <a:latin typeface="Cambria Math" panose="02040503050406030204" pitchFamily="18" charset="0"/>
-                              <a:ea typeface="Cambria Math" panose="02040503050406030204" pitchFamily="18" charset="0"/>
-                            </a:rPr>
-                            <m:t>𝑝</m:t>
-                          </m:r>
-                        </m:sub>
-                      </m:sSub>
                       <m:f>
                         <m:fPr>
                           <m:ctrlPr>
@@ -6189,15 +5534,36 @@
                           </m:ctrlPr>
                         </m:fPr>
                         <m:num>
+                          <m:sSup>
+                            <m:sSupPr>
+                              <m:ctrlPr>
+                                <a:rPr lang="en-US" i="1">
+                                  <a:latin typeface="Cambria Math" panose="02040503050406030204" pitchFamily="18" charset="0"/>
+                                  <a:ea typeface="Cambria Math" panose="02040503050406030204" pitchFamily="18" charset="0"/>
+                                </a:rPr>
+                              </m:ctrlPr>
+                            </m:sSupPr>
+                            <m:e>
+                              <m:r>
+                                <a:rPr lang="en-US" i="1">
+                                  <a:latin typeface="Cambria Math" panose="02040503050406030204" pitchFamily="18" charset="0"/>
+                                  <a:ea typeface="Cambria Math" panose="02040503050406030204" pitchFamily="18" charset="0"/>
+                                </a:rPr>
+                                <m:t>𝜕</m:t>
+                              </m:r>
+                            </m:e>
+                            <m:sup>
+                              <m:r>
+                                <a:rPr lang="en-US" i="1">
+                                  <a:latin typeface="Cambria Math" panose="02040503050406030204" pitchFamily="18" charset="0"/>
+                                  <a:ea typeface="Cambria Math" panose="02040503050406030204" pitchFamily="18" charset="0"/>
+                                </a:rPr>
+                                <m:t>2</m:t>
+                              </m:r>
+                            </m:sup>
+                          </m:sSup>
                           <m:r>
                             <a:rPr lang="en-US" i="1">
-                              <a:latin typeface="Cambria Math" panose="02040503050406030204" pitchFamily="18" charset="0"/>
-                              <a:ea typeface="Cambria Math" panose="02040503050406030204" pitchFamily="18" charset="0"/>
-                            </a:rPr>
-                            <m:t>𝜕</m:t>
-                          </m:r>
-                          <m:r>
-                            <a:rPr lang="en-US" b="0" i="1" smtClean="0">
                               <a:latin typeface="Cambria Math" panose="02040503050406030204" pitchFamily="18" charset="0"/>
                               <a:ea typeface="Cambria Math" panose="02040503050406030204" pitchFamily="18" charset="0"/>
                             </a:rPr>
@@ -6212,317 +5578,16 @@
                             </a:rPr>
                             <m:t>𝜕</m:t>
                           </m:r>
-                          <m:r>
-                            <a:rPr lang="en-US" i="1">
-                              <a:latin typeface="Cambria Math" panose="02040503050406030204" pitchFamily="18" charset="0"/>
-                              <a:ea typeface="Cambria Math" panose="02040503050406030204" pitchFamily="18" charset="0"/>
-                            </a:rPr>
-                            <m:t>𝑧</m:t>
-                          </m:r>
-                        </m:den>
-                      </m:f>
-                      <m:r>
-                        <a:rPr lang="en-US" b="0" i="1" smtClean="0">
-                          <a:latin typeface="Cambria Math" panose="02040503050406030204" pitchFamily="18" charset="0"/>
-                          <a:ea typeface="Cambria Math" panose="02040503050406030204" pitchFamily="18" charset="0"/>
-                        </a:rPr>
-                        <m:t>=</m:t>
-                      </m:r>
-                      <m:d>
-                        <m:dPr>
-                          <m:ctrlPr>
-                            <a:rPr lang="en-US" b="0" i="1" smtClean="0">
-                              <a:latin typeface="Cambria Math" panose="02040503050406030204" pitchFamily="18" charset="0"/>
-                              <a:ea typeface="Cambria Math" panose="02040503050406030204" pitchFamily="18" charset="0"/>
-                            </a:rPr>
-                          </m:ctrlPr>
-                        </m:dPr>
-                        <m:e>
-                          <m:f>
-                            <m:fPr>
-                              <m:ctrlPr>
-                                <a:rPr lang="en-US" b="0" i="1" smtClean="0">
-                                  <a:latin typeface="Cambria Math" panose="02040503050406030204" pitchFamily="18" charset="0"/>
-                                  <a:ea typeface="Cambria Math" panose="02040503050406030204" pitchFamily="18" charset="0"/>
-                                </a:rPr>
-                              </m:ctrlPr>
-                            </m:fPr>
-                            <m:num>
-                              <m:sSup>
-                                <m:sSupPr>
-                                  <m:ctrlPr>
-                                    <a:rPr lang="en-US" b="0" i="1" smtClean="0">
-                                      <a:latin typeface="Cambria Math" panose="02040503050406030204" pitchFamily="18" charset="0"/>
-                                      <a:ea typeface="Cambria Math" panose="02040503050406030204" pitchFamily="18" charset="0"/>
-                                    </a:rPr>
-                                  </m:ctrlPr>
-                                </m:sSupPr>
-                                <m:e>
-                                  <m:r>
-                                    <a:rPr lang="en-US" b="0" i="1" smtClean="0">
-                                      <a:latin typeface="Cambria Math" panose="02040503050406030204" pitchFamily="18" charset="0"/>
-                                      <a:ea typeface="Cambria Math" panose="02040503050406030204" pitchFamily="18" charset="0"/>
-                                    </a:rPr>
-                                    <m:t>𝜕</m:t>
-                                  </m:r>
-                                </m:e>
-                                <m:sup>
-                                  <m:r>
-                                    <a:rPr lang="en-US" b="0" i="1" smtClean="0">
-                                      <a:latin typeface="Cambria Math" panose="02040503050406030204" pitchFamily="18" charset="0"/>
-                                      <a:ea typeface="Cambria Math" panose="02040503050406030204" pitchFamily="18" charset="0"/>
-                                    </a:rPr>
-                                    <m:t>2</m:t>
-                                  </m:r>
-                                </m:sup>
-                              </m:sSup>
-                              <m:r>
-                                <a:rPr lang="en-US" b="0" i="1" smtClean="0">
-                                  <a:latin typeface="Cambria Math" panose="02040503050406030204" pitchFamily="18" charset="0"/>
-                                  <a:ea typeface="Cambria Math" panose="02040503050406030204" pitchFamily="18" charset="0"/>
-                                </a:rPr>
-                                <m:t>𝑥</m:t>
-                              </m:r>
-                            </m:num>
-                            <m:den>
-                              <m:r>
-                                <a:rPr lang="en-US" b="0" i="1" smtClean="0">
-                                  <a:latin typeface="Cambria Math" panose="02040503050406030204" pitchFamily="18" charset="0"/>
-                                  <a:ea typeface="Cambria Math" panose="02040503050406030204" pitchFamily="18" charset="0"/>
-                                </a:rPr>
-                                <m:t>𝜕</m:t>
-                              </m:r>
-                              <m:sSup>
-                                <m:sSupPr>
-                                  <m:ctrlPr>
-                                    <a:rPr lang="en-US" b="0" i="1" smtClean="0">
-                                      <a:latin typeface="Cambria Math" panose="02040503050406030204" pitchFamily="18" charset="0"/>
-                                      <a:ea typeface="Cambria Math" panose="02040503050406030204" pitchFamily="18" charset="0"/>
-                                    </a:rPr>
-                                  </m:ctrlPr>
-                                </m:sSupPr>
-                                <m:e>
-                                  <m:r>
-                                    <a:rPr lang="en-US" b="0" i="1" smtClean="0">
-                                      <a:latin typeface="Cambria Math" panose="02040503050406030204" pitchFamily="18" charset="0"/>
-                                      <a:ea typeface="Cambria Math" panose="02040503050406030204" pitchFamily="18" charset="0"/>
-                                    </a:rPr>
-                                    <m:t>𝑧</m:t>
-                                  </m:r>
-                                </m:e>
-                                <m:sup>
-                                  <m:r>
-                                    <a:rPr lang="en-US" b="0" i="1" smtClean="0">
-                                      <a:latin typeface="Cambria Math" panose="02040503050406030204" pitchFamily="18" charset="0"/>
-                                      <a:ea typeface="Cambria Math" panose="02040503050406030204" pitchFamily="18" charset="0"/>
-                                    </a:rPr>
-                                    <m:t>2</m:t>
-                                  </m:r>
-                                </m:sup>
-                              </m:sSup>
-                            </m:den>
-                          </m:f>
-                          <m:r>
-                            <a:rPr lang="en-US" b="0" i="1" smtClean="0">
-                              <a:latin typeface="Cambria Math" panose="02040503050406030204" pitchFamily="18" charset="0"/>
-                              <a:ea typeface="Cambria Math" panose="02040503050406030204" pitchFamily="18" charset="0"/>
-                            </a:rPr>
-                            <m:t>,</m:t>
-                          </m:r>
-                          <m:f>
-                            <m:fPr>
+                          <m:sSup>
+                            <m:sSupPr>
                               <m:ctrlPr>
                                 <a:rPr lang="en-US" i="1">
                                   <a:latin typeface="Cambria Math" panose="02040503050406030204" pitchFamily="18" charset="0"/>
                                   <a:ea typeface="Cambria Math" panose="02040503050406030204" pitchFamily="18" charset="0"/>
                                 </a:rPr>
                               </m:ctrlPr>
-                            </m:fPr>
-                            <m:num>
-                              <m:sSup>
-                                <m:sSupPr>
-                                  <m:ctrlPr>
-                                    <a:rPr lang="en-US" b="0" i="1" smtClean="0">
-                                      <a:latin typeface="Cambria Math" panose="02040503050406030204" pitchFamily="18" charset="0"/>
-                                      <a:ea typeface="Cambria Math" panose="02040503050406030204" pitchFamily="18" charset="0"/>
-                                    </a:rPr>
-                                  </m:ctrlPr>
-                                </m:sSupPr>
-                                <m:e>
-                                  <m:r>
-                                    <a:rPr lang="en-US" i="1">
-                                      <a:latin typeface="Cambria Math" panose="02040503050406030204" pitchFamily="18" charset="0"/>
-                                      <a:ea typeface="Cambria Math" panose="02040503050406030204" pitchFamily="18" charset="0"/>
-                                    </a:rPr>
-                                    <m:t>𝜕</m:t>
-                                  </m:r>
-                                </m:e>
-                                <m:sup>
-                                  <m:r>
-                                    <a:rPr lang="en-US" b="0" i="1" smtClean="0">
-                                      <a:latin typeface="Cambria Math" panose="02040503050406030204" pitchFamily="18" charset="0"/>
-                                      <a:ea typeface="Cambria Math" panose="02040503050406030204" pitchFamily="18" charset="0"/>
-                                    </a:rPr>
-                                    <m:t>2</m:t>
-                                  </m:r>
-                                </m:sup>
-                              </m:sSup>
-                              <m:r>
-                                <a:rPr lang="en-US" b="0" i="1" smtClean="0">
-                                  <a:latin typeface="Cambria Math" panose="02040503050406030204" pitchFamily="18" charset="0"/>
-                                  <a:ea typeface="Cambria Math" panose="02040503050406030204" pitchFamily="18" charset="0"/>
-                                </a:rPr>
-                                <m:t>𝑥</m:t>
-                              </m:r>
-                            </m:num>
-                            <m:den>
-                              <m:r>
-                                <a:rPr lang="en-US" i="1">
-                                  <a:latin typeface="Cambria Math" panose="02040503050406030204" pitchFamily="18" charset="0"/>
-                                  <a:ea typeface="Cambria Math" panose="02040503050406030204" pitchFamily="18" charset="0"/>
-                                </a:rPr>
-                                <m:t>𝜕</m:t>
-                              </m:r>
-                              <m:sSub>
-                                <m:sSubPr>
-                                  <m:ctrlPr>
-                                    <a:rPr lang="en-US" b="0" i="1" smtClean="0">
-                                      <a:latin typeface="Cambria Math" panose="02040503050406030204" pitchFamily="18" charset="0"/>
-                                      <a:ea typeface="Cambria Math" panose="02040503050406030204" pitchFamily="18" charset="0"/>
-                                    </a:rPr>
-                                  </m:ctrlPr>
-                                </m:sSubPr>
-                                <m:e>
-                                  <m:r>
-                                    <a:rPr lang="en-US" b="0" i="1" smtClean="0">
-                                      <a:latin typeface="Cambria Math" panose="02040503050406030204" pitchFamily="18" charset="0"/>
-                                      <a:ea typeface="Cambria Math" panose="02040503050406030204" pitchFamily="18" charset="0"/>
-                                    </a:rPr>
-                                    <m:t>𝑥</m:t>
-                                  </m:r>
-                                </m:e>
-                                <m:sub>
-                                  <m:r>
-                                    <a:rPr lang="en-US" b="0" i="1" smtClean="0">
-                                      <a:latin typeface="Cambria Math" panose="02040503050406030204" pitchFamily="18" charset="0"/>
-                                      <a:ea typeface="Cambria Math" panose="02040503050406030204" pitchFamily="18" charset="0"/>
-                                    </a:rPr>
-                                    <m:t>0</m:t>
-                                  </m:r>
-                                </m:sub>
-                              </m:sSub>
-                              <m:r>
-                                <a:rPr lang="en-US" i="1">
-                                  <a:latin typeface="Cambria Math" panose="02040503050406030204" pitchFamily="18" charset="0"/>
-                                  <a:ea typeface="Cambria Math" panose="02040503050406030204" pitchFamily="18" charset="0"/>
-                                </a:rPr>
-                                <m:t>𝜕</m:t>
-                              </m:r>
-                              <m:r>
-                                <a:rPr lang="en-US" b="0" i="1" smtClean="0">
-                                  <a:latin typeface="Cambria Math" panose="02040503050406030204" pitchFamily="18" charset="0"/>
-                                  <a:ea typeface="Cambria Math" panose="02040503050406030204" pitchFamily="18" charset="0"/>
-                                </a:rPr>
-                                <m:t>𝑧</m:t>
-                              </m:r>
-                            </m:den>
-                          </m:f>
-                          <m:r>
-                            <a:rPr lang="en-US" b="0" i="1" smtClean="0">
-                              <a:latin typeface="Cambria Math" panose="02040503050406030204" pitchFamily="18" charset="0"/>
-                              <a:ea typeface="Cambria Math" panose="02040503050406030204" pitchFamily="18" charset="0"/>
-                            </a:rPr>
-                            <m:t>,</m:t>
-                          </m:r>
-                          <m:f>
-                            <m:fPr>
-                              <m:ctrlPr>
-                                <a:rPr lang="en-US" i="1">
-                                  <a:latin typeface="Cambria Math" panose="02040503050406030204" pitchFamily="18" charset="0"/>
-                                  <a:ea typeface="Cambria Math" panose="02040503050406030204" pitchFamily="18" charset="0"/>
-                                </a:rPr>
-                              </m:ctrlPr>
-                            </m:fPr>
-                            <m:num>
-                              <m:sSup>
-                                <m:sSupPr>
-                                  <m:ctrlPr>
-                                    <a:rPr lang="en-US" b="0" i="1" smtClean="0">
-                                      <a:latin typeface="Cambria Math" panose="02040503050406030204" pitchFamily="18" charset="0"/>
-                                      <a:ea typeface="Cambria Math" panose="02040503050406030204" pitchFamily="18" charset="0"/>
-                                    </a:rPr>
-                                  </m:ctrlPr>
-                                </m:sSupPr>
-                                <m:e>
-                                  <m:r>
-                                    <a:rPr lang="en-US" i="1">
-                                      <a:latin typeface="Cambria Math" panose="02040503050406030204" pitchFamily="18" charset="0"/>
-                                      <a:ea typeface="Cambria Math" panose="02040503050406030204" pitchFamily="18" charset="0"/>
-                                    </a:rPr>
-                                    <m:t>𝜕</m:t>
-                                  </m:r>
-                                </m:e>
-                                <m:sup>
-                                  <m:r>
-                                    <a:rPr lang="en-US" b="0" i="1" smtClean="0">
-                                      <a:latin typeface="Cambria Math" panose="02040503050406030204" pitchFamily="18" charset="0"/>
-                                      <a:ea typeface="Cambria Math" panose="02040503050406030204" pitchFamily="18" charset="0"/>
-                                    </a:rPr>
-                                    <m:t>2</m:t>
-                                  </m:r>
-                                </m:sup>
-                              </m:sSup>
-                              <m:r>
-                                <a:rPr lang="en-US" b="0" i="1" smtClean="0">
-                                  <a:latin typeface="Cambria Math" panose="02040503050406030204" pitchFamily="18" charset="0"/>
-                                  <a:ea typeface="Cambria Math" panose="02040503050406030204" pitchFamily="18" charset="0"/>
-                                </a:rPr>
-                                <m:t>𝑥</m:t>
-                              </m:r>
-                            </m:num>
-                            <m:den>
-                              <m:r>
-                                <a:rPr lang="en-US" i="1">
-                                  <a:latin typeface="Cambria Math" panose="02040503050406030204" pitchFamily="18" charset="0"/>
-                                  <a:ea typeface="Cambria Math" panose="02040503050406030204" pitchFamily="18" charset="0"/>
-                                </a:rPr>
-                                <m:t>𝜕</m:t>
-                              </m:r>
-                              <m:sSub>
-                                <m:sSubPr>
-                                  <m:ctrlPr>
-                                    <a:rPr lang="en-US" b="0" i="1" smtClean="0">
-                                      <a:latin typeface="Cambria Math" panose="02040503050406030204" pitchFamily="18" charset="0"/>
-                                      <a:ea typeface="Cambria Math" panose="02040503050406030204" pitchFamily="18" charset="0"/>
-                                    </a:rPr>
-                                  </m:ctrlPr>
-                                </m:sSubPr>
-                                <m:e>
-                                  <m:r>
-                                    <a:rPr lang="en-US" b="0" i="1" smtClean="0">
-                                      <a:latin typeface="Cambria Math" panose="02040503050406030204" pitchFamily="18" charset="0"/>
-                                      <a:ea typeface="Cambria Math" panose="02040503050406030204" pitchFamily="18" charset="0"/>
-                                    </a:rPr>
-                                    <m:t>𝑣</m:t>
-                                  </m:r>
-                                </m:e>
-                                <m:sub>
-                                  <m:r>
-                                    <a:rPr lang="en-US" b="0" i="1" smtClean="0">
-                                      <a:latin typeface="Cambria Math" panose="02040503050406030204" pitchFamily="18" charset="0"/>
-                                      <a:ea typeface="Cambria Math" panose="02040503050406030204" pitchFamily="18" charset="0"/>
-                                    </a:rPr>
-                                    <m:t>0</m:t>
-                                  </m:r>
-                                </m:sub>
-                              </m:sSub>
-                              <m:r>
-                                <a:rPr lang="en-US" i="1">
-                                  <a:latin typeface="Cambria Math" panose="02040503050406030204" pitchFamily="18" charset="0"/>
-                                  <a:ea typeface="Cambria Math" panose="02040503050406030204" pitchFamily="18" charset="0"/>
-                                </a:rPr>
-                                <m:t>𝜕</m:t>
-                              </m:r>
+                            </m:sSupPr>
+                            <m:e>
                               <m:r>
                                 <a:rPr lang="en-US" i="1">
                                   <a:latin typeface="Cambria Math" panose="02040503050406030204" pitchFamily="18" charset="0"/>
@@ -6530,94 +5595,19 @@
                                 </a:rPr>
                                 <m:t>𝑧</m:t>
                               </m:r>
-                            </m:den>
-                          </m:f>
-                          <m:r>
-                            <a:rPr lang="en-US" b="0" i="1" smtClean="0">
-                              <a:latin typeface="Cambria Math" panose="02040503050406030204" pitchFamily="18" charset="0"/>
-                              <a:ea typeface="Cambria Math" panose="02040503050406030204" pitchFamily="18" charset="0"/>
-                            </a:rPr>
-                            <m:t>,</m:t>
-                          </m:r>
-                          <m:f>
-                            <m:fPr>
-                              <m:ctrlPr>
-                                <a:rPr lang="en-US" i="1">
-                                  <a:latin typeface="Cambria Math" panose="02040503050406030204" pitchFamily="18" charset="0"/>
-                                  <a:ea typeface="Cambria Math" panose="02040503050406030204" pitchFamily="18" charset="0"/>
-                                </a:rPr>
-                              </m:ctrlPr>
-                            </m:fPr>
-                            <m:num>
-                              <m:sSup>
-                                <m:sSupPr>
-                                  <m:ctrlPr>
-                                    <a:rPr lang="en-US" b="0" i="1" smtClean="0">
-                                      <a:latin typeface="Cambria Math" panose="02040503050406030204" pitchFamily="18" charset="0"/>
-                                      <a:ea typeface="Cambria Math" panose="02040503050406030204" pitchFamily="18" charset="0"/>
-                                    </a:rPr>
-                                  </m:ctrlPr>
-                                </m:sSupPr>
-                                <m:e>
-                                  <m:r>
-                                    <a:rPr lang="en-US" i="1">
-                                      <a:latin typeface="Cambria Math" panose="02040503050406030204" pitchFamily="18" charset="0"/>
-                                      <a:ea typeface="Cambria Math" panose="02040503050406030204" pitchFamily="18" charset="0"/>
-                                    </a:rPr>
-                                    <m:t>𝜕</m:t>
-                                  </m:r>
-                                </m:e>
-                                <m:sup>
-                                  <m:r>
-                                    <a:rPr lang="en-US" b="0" i="1" smtClean="0">
-                                      <a:latin typeface="Cambria Math" panose="02040503050406030204" pitchFamily="18" charset="0"/>
-                                      <a:ea typeface="Cambria Math" panose="02040503050406030204" pitchFamily="18" charset="0"/>
-                                    </a:rPr>
-                                    <m:t>2</m:t>
-                                  </m:r>
-                                </m:sup>
-                              </m:sSup>
-                              <m:r>
-                                <a:rPr lang="en-US" b="0" i="1" smtClean="0">
-                                  <a:latin typeface="Cambria Math" panose="02040503050406030204" pitchFamily="18" charset="0"/>
-                                  <a:ea typeface="Cambria Math" panose="02040503050406030204" pitchFamily="18" charset="0"/>
-                                </a:rPr>
-                                <m:t>𝑥</m:t>
-                              </m:r>
-                            </m:num>
-                            <m:den>
+                            </m:e>
+                            <m:sup>
                               <m:r>
                                 <a:rPr lang="en-US" i="1">
                                   <a:latin typeface="Cambria Math" panose="02040503050406030204" pitchFamily="18" charset="0"/>
                                   <a:ea typeface="Cambria Math" panose="02040503050406030204" pitchFamily="18" charset="0"/>
                                 </a:rPr>
-                                <m:t>𝜕</m:t>
+                                <m:t>2</m:t>
                               </m:r>
-                              <m:r>
-                                <a:rPr lang="en-US" b="0" i="1" smtClean="0">
-                                  <a:latin typeface="Cambria Math" panose="02040503050406030204" pitchFamily="18" charset="0"/>
-                                  <a:ea typeface="Cambria Math" panose="02040503050406030204" pitchFamily="18" charset="0"/>
-                                </a:rPr>
-                                <m:t>𝜁</m:t>
-                              </m:r>
-                              <m:r>
-                                <a:rPr lang="en-US" i="1">
-                                  <a:latin typeface="Cambria Math" panose="02040503050406030204" pitchFamily="18" charset="0"/>
-                                  <a:ea typeface="Cambria Math" panose="02040503050406030204" pitchFamily="18" charset="0"/>
-                                </a:rPr>
-                                <m:t>𝜕</m:t>
-                              </m:r>
-                              <m:r>
-                                <a:rPr lang="en-US" i="1">
-                                  <a:latin typeface="Cambria Math" panose="02040503050406030204" pitchFamily="18" charset="0"/>
-                                  <a:ea typeface="Cambria Math" panose="02040503050406030204" pitchFamily="18" charset="0"/>
-                                </a:rPr>
-                                <m:t>𝑧</m:t>
-                              </m:r>
-                            </m:den>
-                          </m:f>
-                        </m:e>
-                      </m:d>
+                            </m:sup>
+                          </m:sSup>
+                        </m:den>
+                      </m:f>
                     </m:oMath>
                   </m:oMathPara>
                 </a14:m>
@@ -6629,7 +5619,7 @@
                 </a:pPr>
                 <a:r>
                   <a:rPr lang="en-US" dirty="0"/>
-                  <a:t>        </a:t>
+                  <a:t>we can do     </a:t>
                 </a:r>
               </a:p>
               <a:p>
@@ -6648,7 +5638,7 @@
                     <a:latin typeface="Courier New" panose="02070309020205020404" pitchFamily="49" charset="0"/>
                     <a:cs typeface="Courier New" panose="02070309020205020404" pitchFamily="49" charset="0"/>
                   </a:rPr>
-                  <a:t>d2x = </a:t>
+                  <a:t>d2xdz2 = </a:t>
                 </a:r>
                 <a:r>
                   <a:rPr lang="en-US" b="1" dirty="0" err="1">
@@ -6660,6 +5650,73 @@
                   </a:rPr>
                   <a:t>torch.autograd.grad</a:t>
                 </a:r>
+                <a:endParaRPr lang="en-US" b="1" dirty="0">
+                  <a:solidFill>
+                    <a:srgbClr val="0033CC"/>
+                  </a:solidFill>
+                  <a:latin typeface="Courier New" panose="02070309020205020404" pitchFamily="49" charset="0"/>
+                  <a:cs typeface="Courier New" panose="02070309020205020404" pitchFamily="49" charset="0"/>
+                </a:endParaRPr>
+              </a:p>
+              <a:p>
+                <a:pPr marL="0" indent="0">
+                  <a:buNone/>
+                </a:pPr>
+                <a:r>
+                  <a:rPr lang="en-US" b="1" dirty="0">
+                    <a:solidFill>
+                      <a:srgbClr val="0033CC"/>
+                    </a:solidFill>
+                    <a:latin typeface="Courier New" panose="02070309020205020404" pitchFamily="49" charset="0"/>
+                    <a:cs typeface="Courier New" panose="02070309020205020404" pitchFamily="49" charset="0"/>
+                  </a:rPr>
+                  <a:t>		 	(</a:t>
+                </a:r>
+                <a:r>
+                  <a:rPr lang="en-US" b="1" dirty="0" err="1">
+                    <a:solidFill>
+                      <a:srgbClr val="0033CC"/>
+                    </a:solidFill>
+                    <a:latin typeface="Courier New" panose="02070309020205020404" pitchFamily="49" charset="0"/>
+                    <a:cs typeface="Courier New" panose="02070309020205020404" pitchFamily="49" charset="0"/>
+                  </a:rPr>
+                  <a:t>dxdz</a:t>
+                </a:r>
+                <a:r>
+                  <a:rPr lang="en-US" b="1" dirty="0">
+                    <a:solidFill>
+                      <a:srgbClr val="0033CC"/>
+                    </a:solidFill>
+                    <a:latin typeface="Courier New" panose="02070309020205020404" pitchFamily="49" charset="0"/>
+                    <a:cs typeface="Courier New" panose="02070309020205020404" pitchFamily="49" charset="0"/>
+                  </a:rPr>
+                  <a:t>, z, </a:t>
+                </a:r>
+              </a:p>
+              <a:p>
+                <a:pPr marL="0" indent="0">
+                  <a:buNone/>
+                </a:pPr>
+                <a:r>
+                  <a:rPr lang="en-US" b="1" dirty="0">
+                    <a:solidFill>
+                      <a:srgbClr val="0033CC"/>
+                    </a:solidFill>
+                    <a:latin typeface="Courier New" panose="02070309020205020404" pitchFamily="49" charset="0"/>
+                    <a:cs typeface="Courier New" panose="02070309020205020404" pitchFamily="49" charset="0"/>
+                  </a:rPr>
+                  <a:t>			 </a:t>
+                </a:r>
+                <a:r>
+                  <a:rPr lang="en-US" b="1" dirty="0" err="1">
+                    <a:solidFill>
+                      <a:srgbClr val="0033CC"/>
+                    </a:solidFill>
+                    <a:latin typeface="Courier New" panose="02070309020205020404" pitchFamily="49" charset="0"/>
+                    <a:cs typeface="Courier New" panose="02070309020205020404" pitchFamily="49" charset="0"/>
+                  </a:rPr>
+                  <a:t>torch.ones_like</a:t>
+                </a:r>
                 <a:r>
                   <a:rPr lang="en-US" b="1" dirty="0">
                     <a:solidFill>
@@ -6688,7 +5745,7 @@
                     <a:latin typeface="Courier New" panose="02070309020205020404" pitchFamily="49" charset="0"/>
                     <a:cs typeface="Courier New" panose="02070309020205020404" pitchFamily="49" charset="0"/>
                   </a:rPr>
-                  <a:t>, p, </a:t>
+                  <a:t>),</a:t>
                 </a:r>
               </a:p>
               <a:p>
@@ -6703,62 +5760,7 @@
                     <a:latin typeface="Courier New" panose="02070309020205020404" pitchFamily="49" charset="0"/>
                     <a:cs typeface="Courier New" panose="02070309020205020404" pitchFamily="49" charset="0"/>
                   </a:rPr>
-                  <a:t>			</a:t>
-                </a:r>
-                <a:r>
-                  <a:rPr lang="en-US" b="1" dirty="0" err="1">
-                    <a:solidFill>
-                      <a:srgbClr val="0033CC"/>
-                    </a:solidFill>
-                    <a:latin typeface="Courier New" panose="02070309020205020404" pitchFamily="49" charset="0"/>
-                    <a:cs typeface="Courier New" panose="02070309020205020404" pitchFamily="49" charset="0"/>
-                  </a:rPr>
-                  <a:t>torch.ones_like</a:t>
-                </a:r>
-                <a:r>
-                  <a:rPr lang="en-US" b="1" dirty="0">
-                    <a:solidFill>
-                      <a:srgbClr val="0033CC"/>
-                    </a:solidFill>
-                    <a:latin typeface="Courier New" panose="02070309020205020404" pitchFamily="49" charset="0"/>
-                    <a:cs typeface="Courier New" panose="02070309020205020404" pitchFamily="49" charset="0"/>
-                  </a:rPr>
-                  <a:t>(</a:t>
-                </a:r>
-                <a:r>
-                  <a:rPr lang="en-US" b="1" dirty="0" err="1">
-                    <a:solidFill>
-                      <a:srgbClr val="0033CC"/>
-                    </a:solidFill>
-                    <a:latin typeface="Courier New" panose="02070309020205020404" pitchFamily="49" charset="0"/>
-                    <a:cs typeface="Courier New" panose="02070309020205020404" pitchFamily="49" charset="0"/>
-                  </a:rPr>
-                  <a:t>dxdz</a:t>
-                </a:r>
-                <a:r>
-                  <a:rPr lang="en-US" b="1" dirty="0">
-                    <a:solidFill>
-                      <a:srgbClr val="0033CC"/>
-                    </a:solidFill>
-                    <a:latin typeface="Courier New" panose="02070309020205020404" pitchFamily="49" charset="0"/>
-                    <a:cs typeface="Courier New" panose="02070309020205020404" pitchFamily="49" charset="0"/>
-                  </a:rPr>
-                  <a:t>),</a:t>
-                </a:r>
-              </a:p>
-              <a:p>
-                <a:pPr marL="0" indent="0">
-                  <a:buNone/>
-                </a:pPr>
-                <a:r>
-                  <a:rPr lang="en-US" b="1" dirty="0">
-                    <a:solidFill>
-                      <a:srgbClr val="0033CC"/>
-                    </a:solidFill>
-                    <a:latin typeface="Courier New" panose="02070309020205020404" pitchFamily="49" charset="0"/>
-                    <a:cs typeface="Courier New" panose="02070309020205020404" pitchFamily="49" charset="0"/>
-                  </a:rPr>
-                  <a:t>			</a:t>
+                  <a:t>			 </a:t>
                 </a:r>
                 <a:r>
                   <a:rPr lang="en-US" b="1" dirty="0" err="1">
@@ -6779,142 +5781,6 @@
                     <a:cs typeface="Courier New" panose="02070309020205020404" pitchFamily="49" charset="0"/>
                   </a:rPr>
                   <a:t>=True)[0]</a:t>
-                </a:r>
-              </a:p>
-              <a:p>
-                <a:pPr marL="0" indent="0">
-                  <a:buNone/>
-                </a:pPr>
-                <a:r>
-                  <a:rPr lang="en-US" dirty="0"/>
-                  <a:t>Pick off  </a:t>
-                </a:r>
-                <a14:m>
-                  <m:oMath xmlns:m="http://schemas.openxmlformats.org/officeDocument/2006/math">
-                    <m:f>
-                      <m:fPr>
-                        <m:ctrlPr>
-                          <a:rPr lang="en-US" b="0" i="1" smtClean="0">
-                            <a:latin typeface="Cambria Math" panose="02040503050406030204" pitchFamily="18" charset="0"/>
-                            <a:ea typeface="Cambria Math" panose="02040503050406030204" pitchFamily="18" charset="0"/>
-                          </a:rPr>
-                        </m:ctrlPr>
-                      </m:fPr>
-                      <m:num>
-                        <m:sSup>
-                          <m:sSupPr>
-                            <m:ctrlPr>
-                              <a:rPr lang="en-US" b="0" i="1" smtClean="0">
-                                <a:latin typeface="Cambria Math" panose="02040503050406030204" pitchFamily="18" charset="0"/>
-                                <a:ea typeface="Cambria Math" panose="02040503050406030204" pitchFamily="18" charset="0"/>
-                              </a:rPr>
-                            </m:ctrlPr>
-                          </m:sSupPr>
-                          <m:e>
-                            <m:r>
-                              <a:rPr lang="en-US" b="0" i="1" smtClean="0">
-                                <a:latin typeface="Cambria Math" panose="02040503050406030204" pitchFamily="18" charset="0"/>
-                                <a:ea typeface="Cambria Math" panose="02040503050406030204" pitchFamily="18" charset="0"/>
-                              </a:rPr>
-                              <m:t>𝜕</m:t>
-                            </m:r>
-                          </m:e>
-                          <m:sup>
-                            <m:r>
-                              <a:rPr lang="en-US" b="0" i="1" smtClean="0">
-                                <a:latin typeface="Cambria Math" panose="02040503050406030204" pitchFamily="18" charset="0"/>
-                                <a:ea typeface="Cambria Math" panose="02040503050406030204" pitchFamily="18" charset="0"/>
-                              </a:rPr>
-                              <m:t>2</m:t>
-                            </m:r>
-                          </m:sup>
-                        </m:sSup>
-                        <m:r>
-                          <a:rPr lang="en-US" b="0" i="1" smtClean="0">
-                            <a:latin typeface="Cambria Math" panose="02040503050406030204" pitchFamily="18" charset="0"/>
-                            <a:ea typeface="Cambria Math" panose="02040503050406030204" pitchFamily="18" charset="0"/>
-                          </a:rPr>
-                          <m:t>𝑥</m:t>
-                        </m:r>
-                      </m:num>
-                      <m:den>
-                        <m:r>
-                          <a:rPr lang="en-US" b="0" i="1" smtClean="0">
-                            <a:latin typeface="Cambria Math" panose="02040503050406030204" pitchFamily="18" charset="0"/>
-                            <a:ea typeface="Cambria Math" panose="02040503050406030204" pitchFamily="18" charset="0"/>
-                          </a:rPr>
-                          <m:t>𝜕</m:t>
-                        </m:r>
-                        <m:sSup>
-                          <m:sSupPr>
-                            <m:ctrlPr>
-                              <a:rPr lang="en-US" b="0" i="1" smtClean="0">
-                                <a:latin typeface="Cambria Math" panose="02040503050406030204" pitchFamily="18" charset="0"/>
-                                <a:ea typeface="Cambria Math" panose="02040503050406030204" pitchFamily="18" charset="0"/>
-                              </a:rPr>
-                            </m:ctrlPr>
-                          </m:sSupPr>
-                          <m:e>
-                            <m:r>
-                              <a:rPr lang="en-US" b="0" i="1" smtClean="0">
-                                <a:latin typeface="Cambria Math" panose="02040503050406030204" pitchFamily="18" charset="0"/>
-                                <a:ea typeface="Cambria Math" panose="02040503050406030204" pitchFamily="18" charset="0"/>
-                              </a:rPr>
-                              <m:t>𝑧</m:t>
-                            </m:r>
-                          </m:e>
-                          <m:sup>
-                            <m:r>
-                              <a:rPr lang="en-US" b="0" i="1" smtClean="0">
-                                <a:latin typeface="Cambria Math" panose="02040503050406030204" pitchFamily="18" charset="0"/>
-                                <a:ea typeface="Cambria Math" panose="02040503050406030204" pitchFamily="18" charset="0"/>
-                              </a:rPr>
-                              <m:t>2</m:t>
-                            </m:r>
-                          </m:sup>
-                        </m:sSup>
-                      </m:den>
-                    </m:f>
-                    <m:r>
-                      <a:rPr lang="en-US" b="0" i="1" smtClean="0">
-                        <a:latin typeface="Cambria Math" panose="02040503050406030204" pitchFamily="18" charset="0"/>
-                        <a:ea typeface="Cambria Math" panose="02040503050406030204" pitchFamily="18" charset="0"/>
-                      </a:rPr>
-                      <m:t> </m:t>
-                    </m:r>
-                  </m:oMath>
-                </a14:m>
-                <a:r>
-                  <a:rPr lang="en-US" dirty="0"/>
-                  <a:t>and change its shape. </a:t>
-                </a:r>
-              </a:p>
-              <a:p>
-                <a:pPr marL="0" indent="0">
-                  <a:buNone/>
-                </a:pPr>
-                <a:r>
-                  <a:rPr lang="en-US" dirty="0"/>
-                  <a:t>        </a:t>
-                </a:r>
-              </a:p>
-              <a:p>
-                <a:pPr marL="0" indent="0">
-                  <a:buNone/>
-                </a:pPr>
-                <a:r>
-                  <a:rPr lang="en-US" dirty="0"/>
-                  <a:t>        	</a:t>
-                </a:r>
-                <a:r>
-                  <a:rPr lang="en-US" b="1" dirty="0">
-                    <a:solidFill>
-                      <a:srgbClr val="0033CC"/>
-                    </a:solidFill>
-                    <a:latin typeface="Courier New" panose="02070309020205020404" pitchFamily="49" charset="0"/>
-                    <a:cs typeface="Courier New" panose="02070309020205020404" pitchFamily="49" charset="0"/>
-                  </a:rPr>
-                  <a:t>d2xdz2 = d2x[:,0].view(-1, 1)</a:t>
                 </a:r>
               </a:p>
             </p:txBody>
@@ -6986,298 +5852,6 @@
 </file>
 
 <file path=ppt/slides/slide15.xml><?xml version="1.0" encoding="utf-8"?>
-<p:sld xmlns:a="http://schemas.openxmlformats.org/drawingml/2006/main" xmlns:r="http://schemas.openxmlformats.org/officeDocument/2006/relationships" xmlns:p="http://schemas.openxmlformats.org/presentationml/2006/main">
-  <p:cSld>
-    <p:spTree>
-      <p:nvGrpSpPr>
-        <p:cNvPr id="1" name="">
-          <a:extLst>
-            <a:ext uri="{FF2B5EF4-FFF2-40B4-BE49-F238E27FC236}">
-              <a16:creationId xmlns:a16="http://schemas.microsoft.com/office/drawing/2014/main" id="{BE5C72B8-650A-49DA-ED89-FAB841AEA36F}"/>
-            </a:ext>
-          </a:extLst>
-        </p:cNvPr>
-        <p:cNvGrpSpPr/>
-        <p:nvPr/>
-      </p:nvGrpSpPr>
-      <p:grpSpPr>
-        <a:xfrm>
-          <a:off x="0" y="0"/>
-          <a:ext cx="0" cy="0"/>
-          <a:chOff x="0" y="0"/>
-          <a:chExt cx="0" cy="0"/>
-        </a:xfrm>
-      </p:grpSpPr>
-      <p:sp>
-        <p:nvSpPr>
-          <p:cNvPr id="7" name="Title 6">
-            <a:extLst>
-              <a:ext uri="{FF2B5EF4-FFF2-40B4-BE49-F238E27FC236}">
-                <a16:creationId xmlns:a16="http://schemas.microsoft.com/office/drawing/2014/main" id="{E1BA58E6-DEB2-1560-5EDE-2077F272EC65}"/>
-              </a:ext>
-            </a:extLst>
-          </p:cNvPr>
-          <p:cNvSpPr>
-            <a:spLocks noGrp="1"/>
-          </p:cNvSpPr>
-          <p:nvPr>
-            <p:ph type="title"/>
-          </p:nvPr>
-        </p:nvSpPr>
-        <p:spPr/>
-        <p:txBody>
-          <a:bodyPr/>
-          <a:lstStyle/>
-          <a:p>
-            <a:r>
-              <a:rPr lang="en-US" dirty="0"/>
-              <a:t>PINNs: </a:t>
-            </a:r>
-            <a:r>
-              <a:rPr lang="en-US" dirty="0">
-                <a:solidFill>
-                  <a:schemeClr val="accent1"/>
-                </a:solidFill>
-              </a:rPr>
-              <a:t>Note on implementation</a:t>
-            </a:r>
-          </a:p>
-        </p:txBody>
-      </p:sp>
-      <mc:AlternateContent xmlns:mc="http://schemas.openxmlformats.org/markup-compatibility/2006" xmlns:a14="http://schemas.microsoft.com/office/drawing/2010/main">
-        <mc:Choice Requires="a14">
-          <p:sp>
-            <p:nvSpPr>
-              <p:cNvPr id="8" name="Content Placeholder 7">
-                <a:extLst>
-                  <a:ext uri="{FF2B5EF4-FFF2-40B4-BE49-F238E27FC236}">
-                    <a16:creationId xmlns:a16="http://schemas.microsoft.com/office/drawing/2014/main" id="{97A2CD4F-BA24-C010-0E96-2EAA6926C1C6}"/>
-                  </a:ext>
-                </a:extLst>
-              </p:cNvPr>
-              <p:cNvSpPr>
-                <a:spLocks noGrp="1"/>
-              </p:cNvSpPr>
-              <p:nvPr>
-                <p:ph idx="1"/>
-              </p:nvPr>
-            </p:nvSpPr>
-            <p:spPr/>
-            <p:txBody>
-              <a:bodyPr/>
-              <a:lstStyle/>
-              <a:p>
-                <a:r>
-                  <a:rPr lang="en-US" dirty="0"/>
-                  <a:t>In the implementation just sketched, we are computing many more derivatives than are needed!</a:t>
-                </a:r>
-              </a:p>
-              <a:p>
-                <a:endParaRPr lang="en-US" dirty="0"/>
-              </a:p>
-              <a:p>
-                <a:r>
-                  <a:rPr lang="en-US" dirty="0"/>
-                  <a:t>However, by feeding the dimensionless time </a:t>
-                </a:r>
-                <a14:m>
-                  <m:oMath xmlns:m="http://schemas.openxmlformats.org/officeDocument/2006/math">
-                    <m:r>
-                      <a:rPr lang="en-US" b="0" i="1" smtClean="0">
-                        <a:solidFill>
-                          <a:srgbClr val="0033CC"/>
-                        </a:solidFill>
-                        <a:latin typeface="Cambria Math" panose="02040503050406030204" pitchFamily="18" charset="0"/>
-                      </a:rPr>
-                      <m:t>𝑧</m:t>
-                    </m:r>
-                  </m:oMath>
-                </a14:m>
-                <a:r>
-                  <a:rPr lang="en-US" dirty="0"/>
-                  <a:t> and </a:t>
-                </a:r>
-                <a14:m>
-                  <m:oMath xmlns:m="http://schemas.openxmlformats.org/officeDocument/2006/math">
-                    <m:sSub>
-                      <m:sSubPr>
-                        <m:ctrlPr>
-                          <a:rPr lang="en-US" i="1">
-                            <a:solidFill>
-                              <a:srgbClr val="0033CC"/>
-                            </a:solidFill>
-                            <a:latin typeface="Cambria Math" panose="02040503050406030204" pitchFamily="18" charset="0"/>
-                          </a:rPr>
-                        </m:ctrlPr>
-                      </m:sSubPr>
-                      <m:e>
-                        <m:r>
-                          <a:rPr lang="en-US" b="0" i="1" smtClean="0">
-                            <a:solidFill>
-                              <a:srgbClr val="0033CC"/>
-                            </a:solidFill>
-                            <a:latin typeface="Cambria Math" panose="02040503050406030204" pitchFamily="18" charset="0"/>
-                          </a:rPr>
-                          <m:t>𝑥</m:t>
-                        </m:r>
-                      </m:e>
-                      <m:sub>
-                        <m:r>
-                          <a:rPr lang="en-US" i="1">
-                            <a:solidFill>
-                              <a:srgbClr val="0033CC"/>
-                            </a:solidFill>
-                            <a:latin typeface="Cambria Math" panose="02040503050406030204" pitchFamily="18" charset="0"/>
-                          </a:rPr>
-                          <m:t>0</m:t>
-                        </m:r>
-                      </m:sub>
-                    </m:sSub>
-                    <m:r>
-                      <a:rPr lang="en-US" i="1">
-                        <a:solidFill>
-                          <a:srgbClr val="0033CC"/>
-                        </a:solidFill>
-                        <a:latin typeface="Cambria Math" panose="02040503050406030204" pitchFamily="18" charset="0"/>
-                      </a:rPr>
-                      <m:t>, </m:t>
-                    </m:r>
-                    <m:sSub>
-                      <m:sSubPr>
-                        <m:ctrlPr>
-                          <a:rPr lang="en-US" i="1">
-                            <a:solidFill>
-                              <a:srgbClr val="0033CC"/>
-                            </a:solidFill>
-                            <a:latin typeface="Cambria Math" panose="02040503050406030204" pitchFamily="18" charset="0"/>
-                          </a:rPr>
-                        </m:ctrlPr>
-                      </m:sSubPr>
-                      <m:e>
-                        <m:r>
-                          <a:rPr lang="en-US" i="1">
-                            <a:solidFill>
-                              <a:srgbClr val="0033CC"/>
-                            </a:solidFill>
-                            <a:latin typeface="Cambria Math" panose="02040503050406030204" pitchFamily="18" charset="0"/>
-                          </a:rPr>
-                          <m:t>𝑣</m:t>
-                        </m:r>
-                      </m:e>
-                      <m:sub>
-                        <m:r>
-                          <a:rPr lang="en-US" i="1">
-                            <a:solidFill>
-                              <a:srgbClr val="0033CC"/>
-                            </a:solidFill>
-                            <a:latin typeface="Cambria Math" panose="02040503050406030204" pitchFamily="18" charset="0"/>
-                          </a:rPr>
-                          <m:t>0</m:t>
-                        </m:r>
-                      </m:sub>
-                    </m:sSub>
-                    <m:r>
-                      <a:rPr lang="en-US" i="1">
-                        <a:solidFill>
-                          <a:srgbClr val="0033CC"/>
-                        </a:solidFill>
-                        <a:latin typeface="Cambria Math" panose="02040503050406030204" pitchFamily="18" charset="0"/>
-                      </a:rPr>
-                      <m:t>, </m:t>
-                    </m:r>
-                    <m:r>
-                      <a:rPr lang="en-US" b="0" i="1" smtClean="0">
-                        <a:solidFill>
-                          <a:srgbClr val="0033CC"/>
-                        </a:solidFill>
-                        <a:latin typeface="Cambria Math" panose="02040503050406030204" pitchFamily="18" charset="0"/>
-                      </a:rPr>
-                      <m:t>𝜁</m:t>
-                    </m:r>
-                  </m:oMath>
-                </a14:m>
-                <a:r>
-                  <a:rPr lang="en-US" dirty="0"/>
-                  <a:t> into </a:t>
-                </a:r>
-                <a:r>
-                  <a:rPr lang="en-US" i="1" dirty="0"/>
-                  <a:t>separate</a:t>
-                </a:r>
-                <a:r>
-                  <a:rPr lang="en-US" dirty="0"/>
-                  <a:t> neural networks, whose outputs are then combined, it is possible to compute only the derivatives that are relevant.</a:t>
-                </a:r>
-              </a:p>
-            </p:txBody>
-          </p:sp>
-        </mc:Choice>
-        <mc:Fallback xmlns="">
-          <p:sp>
-            <p:nvSpPr>
-              <p:cNvPr id="8" name="Content Placeholder 7">
-                <a:extLst>
-                  <a:ext uri="{FF2B5EF4-FFF2-40B4-BE49-F238E27FC236}">
-                    <a16:creationId xmlns:a16="http://schemas.microsoft.com/office/drawing/2014/main" id="{97A2CD4F-BA24-C010-0E96-2EAA6926C1C6}"/>
-                  </a:ext>
-                </a:extLst>
-              </p:cNvPr>
-              <p:cNvSpPr>
-                <a:spLocks noGrp="1" noRot="1" noChangeAspect="1" noMove="1" noResize="1" noEditPoints="1" noAdjustHandles="1" noChangeArrowheads="1" noChangeShapeType="1" noTextEdit="1"/>
-              </p:cNvSpPr>
-              <p:nvPr>
-                <p:ph idx="1"/>
-              </p:nvPr>
-            </p:nvSpPr>
-            <p:spPr>
-              <a:blipFill>
-                <a:blip r:embed="rId2"/>
-                <a:stretch>
-                  <a:fillRect l="-1142" t="-1316" r="-163"/>
-                </a:stretch>
-              </a:blipFill>
-            </p:spPr>
-            <p:txBody>
-              <a:bodyPr/>
-              <a:lstStyle/>
-              <a:p>
-                <a:r>
-                  <a:rPr lang="en-US">
-                    <a:noFill/>
-                  </a:rPr>
-                  <a:t> </a:t>
-                </a:r>
-              </a:p>
-            </p:txBody>
-          </p:sp>
-        </mc:Fallback>
-      </mc:AlternateContent>
-    </p:spTree>
-    <p:extLst>
-      <p:ext uri="{BB962C8B-B14F-4D97-AF65-F5344CB8AC3E}">
-        <p14:creationId xmlns:p14="http://schemas.microsoft.com/office/powerpoint/2010/main" val="438983711"/>
-      </p:ext>
-    </p:extLst>
-  </p:cSld>
-  <p:clrMapOvr>
-    <a:masterClrMapping/>
-  </p:clrMapOvr>
-  <mc:AlternateContent xmlns:mc="http://schemas.openxmlformats.org/markup-compatibility/2006" xmlns:p14="http://schemas.microsoft.com/office/powerpoint/2010/main">
-    <mc:Choice Requires="p14">
-      <p:transition spd="med" p14:dur="700">
-        <p:fade/>
-      </p:transition>
-    </mc:Choice>
-    <mc:Fallback xmlns="">
-      <p:transition spd="med">
-        <p:fade/>
-      </p:transition>
-    </mc:Fallback>
-  </mc:AlternateContent>
-</p:sld>
-</file>
-
-<file path=ppt/slides/slide16.xml><?xml version="1.0" encoding="utf-8"?>
 <p:sld xmlns:a="http://schemas.openxmlformats.org/drawingml/2006/main" xmlns:r="http://schemas.openxmlformats.org/officeDocument/2006/relationships" xmlns:p="http://schemas.openxmlformats.org/presentationml/2006/main">
   <p:cSld>
     <p:spTree>
@@ -7392,7 +5966,7 @@
                           <a:rPr lang="en-US" b="0" i="1" smtClean="0">
                             <a:latin typeface="Cambria Math" panose="02040503050406030204" pitchFamily="18" charset="0"/>
                           </a:rPr>
-                          <m:t>𝜃</m:t>
+                          <m:t>𝜔</m:t>
                         </m:r>
                       </m:e>
                     </m:d>
@@ -7451,33 +6025,40 @@
                       </a:rPr>
                       <m:t>=(</m:t>
                     </m:r>
-                    <m:r>
-                      <a:rPr lang="en-US" i="1">
-                        <a:solidFill>
-                          <a:srgbClr val="0033CC"/>
-                        </a:solidFill>
-                        <a:latin typeface="Cambria Math" panose="02040503050406030204" pitchFamily="18" charset="0"/>
-                      </a:rPr>
-                      <m:t>𝑧</m:t>
-                    </m:r>
-                    <m:r>
-                      <a:rPr lang="en-US" i="1">
-                        <a:solidFill>
-                          <a:srgbClr val="0033CC"/>
-                        </a:solidFill>
-                        <a:latin typeface="Cambria Math" panose="02040503050406030204" pitchFamily="18" charset="0"/>
-                      </a:rPr>
-                      <m:t>, </m:t>
-                    </m:r>
-                    <m:r>
-                      <a:rPr lang="en-US" i="1">
-                        <a:solidFill>
-                          <a:srgbClr val="0033CC"/>
-                        </a:solidFill>
-                        <a:latin typeface="Cambria Math" panose="02040503050406030204" pitchFamily="18" charset="0"/>
-                      </a:rPr>
-                      <m:t>𝑥</m:t>
-                    </m:r>
+                    <m:sSub>
+                      <m:sSubPr>
+                        <m:ctrlPr>
+                          <a:rPr lang="en-US" b="0" i="1" smtClean="0">
+                            <a:solidFill>
+                              <a:srgbClr val="0033CC"/>
+                            </a:solidFill>
+                            <a:latin typeface="Cambria Math" panose="02040503050406030204" pitchFamily="18" charset="0"/>
+                          </a:rPr>
+                        </m:ctrlPr>
+                      </m:sSubPr>
+                      <m:e>
+                        <m:r>
+                          <a:rPr lang="en-US" i="1">
+                            <a:solidFill>
+                              <a:srgbClr val="0033CC"/>
+                            </a:solidFill>
+                            <a:latin typeface="Cambria Math" panose="02040503050406030204" pitchFamily="18" charset="0"/>
+                          </a:rPr>
+                          <m:t>𝑥</m:t>
+                        </m:r>
+                      </m:e>
+                      <m:sub>
+                        <m:r>
+                          <a:rPr lang="en-US" b="0" i="1" smtClean="0">
+                            <a:solidFill>
+                              <a:srgbClr val="0033CC"/>
+                            </a:solidFill>
+                            <a:latin typeface="Cambria Math" panose="02040503050406030204" pitchFamily="18" charset="0"/>
+                          </a:rPr>
+                          <m:t>0</m:t>
+                        </m:r>
+                      </m:sub>
+                    </m:sSub>
                     <m:r>
                       <a:rPr lang="en-US" i="1">
                         <a:solidFill>
@@ -7606,7 +6187,7 @@
                         </a:solidFill>
                         <a:latin typeface="Cambria Math" panose="02040503050406030204" pitchFamily="18" charset="0"/>
                       </a:rPr>
-                      <m:t>𝑂</m:t>
+                      <m:t>𝐹</m:t>
                     </m:r>
                     <m:r>
                       <a:rPr lang="en-US" b="0" i="1" smtClean="0">
@@ -7819,7 +6400,7 @@
                     <a:latin typeface="Courier New" panose="02070309020205020404" pitchFamily="49" charset="0"/>
                     <a:cs typeface="Courier New" panose="02070309020205020404" pitchFamily="49" charset="0"/>
                   </a:rPr>
-                  <a:t>O = d2xdz2 + 2*zeta*</a:t>
+                  <a:t>F = d2xdz2 + 2*zeta*</a:t>
                 </a:r>
                 <a:r>
                   <a:rPr lang="en-US" b="1" dirty="0" err="1">
@@ -7875,7 +6456,7 @@
                     <a:latin typeface="Courier New" panose="02070309020205020404" pitchFamily="49" charset="0"/>
                     <a:cs typeface="Courier New" panose="02070309020205020404" pitchFamily="49" charset="0"/>
                   </a:rPr>
-                  <a:t>(O**2)</a:t>
+                  <a:t>(F**2)</a:t>
                 </a:r>
               </a:p>
             </p:txBody>
@@ -7950,2274 +6531,7 @@
 </p:sld>
 </file>
 
-<file path=ppt/slides/slide17.xml><?xml version="1.0" encoding="utf-8"?>
-<p:sld xmlns:a="http://schemas.openxmlformats.org/drawingml/2006/main" xmlns:r="http://schemas.openxmlformats.org/officeDocument/2006/relationships" xmlns:p="http://schemas.openxmlformats.org/presentationml/2006/main">
-  <p:cSld>
-    <p:spTree>
-      <p:nvGrpSpPr>
-        <p:cNvPr id="1" name="">
-          <a:extLst>
-            <a:ext uri="{FF2B5EF4-FFF2-40B4-BE49-F238E27FC236}">
-              <a16:creationId xmlns:a16="http://schemas.microsoft.com/office/drawing/2014/main" id="{E8A6027F-E365-1893-00C8-3A2D8C461F0F}"/>
-            </a:ext>
-          </a:extLst>
-        </p:cNvPr>
-        <p:cNvGrpSpPr/>
-        <p:nvPr/>
-      </p:nvGrpSpPr>
-      <p:grpSpPr>
-        <a:xfrm>
-          <a:off x="0" y="0"/>
-          <a:ext cx="0" cy="0"/>
-          <a:chOff x="0" y="0"/>
-          <a:chExt cx="0" cy="0"/>
-        </a:xfrm>
-      </p:grpSpPr>
-      <p:sp>
-        <p:nvSpPr>
-          <p:cNvPr id="7" name="Title 6">
-            <a:extLst>
-              <a:ext uri="{FF2B5EF4-FFF2-40B4-BE49-F238E27FC236}">
-                <a16:creationId xmlns:a16="http://schemas.microsoft.com/office/drawing/2014/main" id="{E77687AB-1C41-5FB2-FE46-9897631F82D7}"/>
-              </a:ext>
-            </a:extLst>
-          </p:cNvPr>
-          <p:cNvSpPr>
-            <a:spLocks noGrp="1"/>
-          </p:cNvSpPr>
-          <p:nvPr>
-            <p:ph type="title"/>
-          </p:nvPr>
-        </p:nvSpPr>
-        <p:spPr/>
-        <p:txBody>
-          <a:bodyPr/>
-          <a:lstStyle/>
-          <a:p>
-            <a:r>
-              <a:rPr lang="en-US" dirty="0"/>
-              <a:t>PINNs: </a:t>
-            </a:r>
-            <a:r>
-              <a:rPr lang="en-US" dirty="0">
-                <a:solidFill>
-                  <a:schemeClr val="accent1"/>
-                </a:solidFill>
-              </a:rPr>
-              <a:t>Model / Training</a:t>
-            </a:r>
-          </a:p>
-        </p:txBody>
-      </p:sp>
-      <mc:AlternateContent xmlns:mc="http://schemas.openxmlformats.org/markup-compatibility/2006" xmlns:a14="http://schemas.microsoft.com/office/drawing/2010/main">
-        <mc:Choice Requires="a14">
-          <p:sp>
-            <p:nvSpPr>
-              <p:cNvPr id="8" name="Content Placeholder 7">
-                <a:extLst>
-                  <a:ext uri="{FF2B5EF4-FFF2-40B4-BE49-F238E27FC236}">
-                    <a16:creationId xmlns:a16="http://schemas.microsoft.com/office/drawing/2014/main" id="{91326329-24EF-E45E-D886-1EC3829AC52E}"/>
-                  </a:ext>
-                </a:extLst>
-              </p:cNvPr>
-              <p:cNvSpPr>
-                <a:spLocks noGrp="1"/>
-              </p:cNvSpPr>
-              <p:nvPr>
-                <p:ph idx="1"/>
-              </p:nvPr>
-            </p:nvSpPr>
-            <p:spPr>
-              <a:xfrm>
-                <a:off x="711200" y="1295400"/>
-                <a:ext cx="7899400" cy="4819650"/>
-              </a:xfrm>
-            </p:spPr>
-            <p:txBody>
-              <a:bodyPr/>
-              <a:lstStyle/>
-              <a:p>
-                <a:pPr marL="0" indent="0">
-                  <a:buNone/>
-                </a:pPr>
-                <a:r>
-                  <a:rPr lang="en-US" dirty="0">
-                    <a:solidFill>
-                      <a:srgbClr val="0033CC"/>
-                    </a:solidFill>
-                  </a:rPr>
-                  <a:t>Model</a:t>
-                </a:r>
-                <a:endParaRPr lang="en-US" sz="2400" b="0" i="1" dirty="0">
-                  <a:solidFill>
-                    <a:srgbClr val="0033CC"/>
-                  </a:solidFill>
-                  <a:latin typeface="Cambria Math" panose="02040503050406030204" pitchFamily="18" charset="0"/>
-                </a:endParaRPr>
-              </a:p>
-              <a:p>
-                <a:pPr marL="0" indent="0">
-                  <a:buNone/>
-                </a:pPr>
-                <a14:m>
-                  <m:oMath xmlns:m="http://schemas.openxmlformats.org/officeDocument/2006/math">
-                    <m:r>
-                      <a:rPr lang="en-US" sz="2400" b="0" i="1" smtClean="0">
-                        <a:solidFill>
-                          <a:schemeClr val="tx1"/>
-                        </a:solidFill>
-                        <a:latin typeface="Cambria Math" panose="02040503050406030204" pitchFamily="18" charset="0"/>
-                      </a:rPr>
-                      <m:t>𝑓</m:t>
-                    </m:r>
-                    <m:d>
-                      <m:dPr>
-                        <m:ctrlPr>
-                          <a:rPr lang="en-US" sz="2400" b="0" i="1" smtClean="0">
-                            <a:solidFill>
-                              <a:schemeClr val="tx1"/>
-                            </a:solidFill>
-                            <a:latin typeface="Cambria Math" panose="02040503050406030204" pitchFamily="18" charset="0"/>
-                          </a:rPr>
-                        </m:ctrlPr>
-                      </m:dPr>
-                      <m:e>
-                        <m:r>
-                          <a:rPr lang="en-US" sz="2400" b="0" i="1" smtClean="0">
-                            <a:solidFill>
-                              <a:schemeClr val="tx1"/>
-                            </a:solidFill>
-                            <a:latin typeface="Cambria Math" panose="02040503050406030204" pitchFamily="18" charset="0"/>
-                          </a:rPr>
-                          <m:t>𝑝</m:t>
-                        </m:r>
-                        <m:r>
-                          <a:rPr lang="en-US" sz="2400" b="0" i="1" smtClean="0">
-                            <a:solidFill>
-                              <a:schemeClr val="tx1"/>
-                            </a:solidFill>
-                            <a:latin typeface="Cambria Math" panose="02040503050406030204" pitchFamily="18" charset="0"/>
-                          </a:rPr>
-                          <m:t>,</m:t>
-                        </m:r>
-                        <m:r>
-                          <a:rPr lang="en-US" sz="2400" b="0" i="1" smtClean="0">
-                            <a:solidFill>
-                              <a:schemeClr val="tx1"/>
-                            </a:solidFill>
-                            <a:latin typeface="Cambria Math" panose="02040503050406030204" pitchFamily="18" charset="0"/>
-                          </a:rPr>
-                          <m:t>𝜃</m:t>
-                        </m:r>
-                      </m:e>
-                    </m:d>
-                  </m:oMath>
-                </a14:m>
-                <a:r>
-                  <a:rPr lang="en-US" sz="2400" dirty="0">
-                    <a:solidFill>
-                      <a:schemeClr val="tx1"/>
-                    </a:solidFill>
-                  </a:rPr>
-                  <a:t>, </a:t>
-                </a:r>
-                <a14:m>
-                  <m:oMath xmlns:m="http://schemas.openxmlformats.org/officeDocument/2006/math">
-                    <m:r>
-                      <a:rPr lang="en-US" b="0" i="1" smtClean="0">
-                        <a:solidFill>
-                          <a:schemeClr val="tx1"/>
-                        </a:solidFill>
-                        <a:latin typeface="Cambria Math" panose="02040503050406030204" pitchFamily="18" charset="0"/>
-                      </a:rPr>
-                      <m:t>𝑝</m:t>
-                    </m:r>
-                    <m:r>
-                      <a:rPr lang="en-US" i="1">
-                        <a:solidFill>
-                          <a:schemeClr val="tx1"/>
-                        </a:solidFill>
-                        <a:latin typeface="Cambria Math" panose="02040503050406030204" pitchFamily="18" charset="0"/>
-                      </a:rPr>
-                      <m:t>=(</m:t>
-                    </m:r>
-                    <m:r>
-                      <a:rPr lang="en-US" i="1">
-                        <a:solidFill>
-                          <a:schemeClr val="tx1"/>
-                        </a:solidFill>
-                        <a:latin typeface="Cambria Math" panose="02040503050406030204" pitchFamily="18" charset="0"/>
-                      </a:rPr>
-                      <m:t>𝑧</m:t>
-                    </m:r>
-                    <m:r>
-                      <a:rPr lang="en-US" i="1">
-                        <a:solidFill>
-                          <a:schemeClr val="tx1"/>
-                        </a:solidFill>
-                        <a:latin typeface="Cambria Math" panose="02040503050406030204" pitchFamily="18" charset="0"/>
-                      </a:rPr>
-                      <m:t>, </m:t>
-                    </m:r>
-                    <m:sSub>
-                      <m:sSubPr>
-                        <m:ctrlPr>
-                          <a:rPr lang="en-US" i="1">
-                            <a:solidFill>
-                              <a:schemeClr val="tx1"/>
-                            </a:solidFill>
-                            <a:latin typeface="Cambria Math" panose="02040503050406030204" pitchFamily="18" charset="0"/>
-                          </a:rPr>
-                        </m:ctrlPr>
-                      </m:sSubPr>
-                      <m:e>
-                        <m:r>
-                          <a:rPr lang="en-US" b="0" i="1" smtClean="0">
-                            <a:solidFill>
-                              <a:schemeClr val="tx1"/>
-                            </a:solidFill>
-                            <a:latin typeface="Cambria Math" panose="02040503050406030204" pitchFamily="18" charset="0"/>
-                          </a:rPr>
-                          <m:t>𝑥</m:t>
-                        </m:r>
-                      </m:e>
-                      <m:sub>
-                        <m:r>
-                          <a:rPr lang="en-US" i="1">
-                            <a:solidFill>
-                              <a:schemeClr val="tx1"/>
-                            </a:solidFill>
-                            <a:latin typeface="Cambria Math" panose="02040503050406030204" pitchFamily="18" charset="0"/>
-                          </a:rPr>
-                          <m:t>0</m:t>
-                        </m:r>
-                      </m:sub>
-                    </m:sSub>
-                    <m:r>
-                      <a:rPr lang="en-US" i="1">
-                        <a:solidFill>
-                          <a:schemeClr val="tx1"/>
-                        </a:solidFill>
-                        <a:latin typeface="Cambria Math" panose="02040503050406030204" pitchFamily="18" charset="0"/>
-                      </a:rPr>
-                      <m:t>, </m:t>
-                    </m:r>
-                    <m:sSub>
-                      <m:sSubPr>
-                        <m:ctrlPr>
-                          <a:rPr lang="en-US" i="1">
-                            <a:solidFill>
-                              <a:schemeClr val="tx1"/>
-                            </a:solidFill>
-                            <a:latin typeface="Cambria Math" panose="02040503050406030204" pitchFamily="18" charset="0"/>
-                          </a:rPr>
-                        </m:ctrlPr>
-                      </m:sSubPr>
-                      <m:e>
-                        <m:r>
-                          <a:rPr lang="en-US" i="1">
-                            <a:solidFill>
-                              <a:schemeClr val="tx1"/>
-                            </a:solidFill>
-                            <a:latin typeface="Cambria Math" panose="02040503050406030204" pitchFamily="18" charset="0"/>
-                          </a:rPr>
-                          <m:t>𝑣</m:t>
-                        </m:r>
-                      </m:e>
-                      <m:sub>
-                        <m:r>
-                          <a:rPr lang="en-US" i="1">
-                            <a:solidFill>
-                              <a:schemeClr val="tx1"/>
-                            </a:solidFill>
-                            <a:latin typeface="Cambria Math" panose="02040503050406030204" pitchFamily="18" charset="0"/>
-                          </a:rPr>
-                          <m:t>0</m:t>
-                        </m:r>
-                      </m:sub>
-                    </m:sSub>
-                    <m:r>
-                      <a:rPr lang="en-US" i="1">
-                        <a:solidFill>
-                          <a:schemeClr val="tx1"/>
-                        </a:solidFill>
-                        <a:latin typeface="Cambria Math" panose="02040503050406030204" pitchFamily="18" charset="0"/>
-                      </a:rPr>
-                      <m:t>, </m:t>
-                    </m:r>
-                    <m:r>
-                      <a:rPr lang="en-US" b="0" i="1" smtClean="0">
-                        <a:solidFill>
-                          <a:schemeClr val="tx1"/>
-                        </a:solidFill>
-                        <a:latin typeface="Cambria Math" panose="02040503050406030204" pitchFamily="18" charset="0"/>
-                      </a:rPr>
-                      <m:t>𝜁</m:t>
-                    </m:r>
-                    <m:r>
-                      <a:rPr lang="en-US" i="1">
-                        <a:solidFill>
-                          <a:schemeClr val="tx1"/>
-                        </a:solidFill>
-                        <a:latin typeface="Cambria Math" panose="02040503050406030204" pitchFamily="18" charset="0"/>
-                      </a:rPr>
-                      <m:t>)</m:t>
-                    </m:r>
-                  </m:oMath>
-                </a14:m>
-                <a:r>
-                  <a:rPr lang="en-US" dirty="0">
-                    <a:solidFill>
-                      <a:schemeClr val="tx1"/>
-                    </a:solidFill>
-                  </a:rPr>
-                  <a:t>.</a:t>
-                </a:r>
-                <a:endParaRPr lang="en-US" sz="2400" dirty="0">
-                  <a:solidFill>
-                    <a:schemeClr val="tx1"/>
-                  </a:solidFill>
-                </a:endParaRPr>
-              </a:p>
-              <a:p>
-                <a:pPr marL="0" indent="0">
-                  <a:buNone/>
-                </a:pPr>
-                <a:endParaRPr lang="en-US" dirty="0"/>
-              </a:p>
-              <a:p>
-                <a:pPr marL="0" indent="0">
-                  <a:buNone/>
-                </a:pPr>
-                <a:r>
-                  <a:rPr lang="en-US" dirty="0">
-                    <a:solidFill>
-                      <a:srgbClr val="0033CC"/>
-                    </a:solidFill>
-                  </a:rPr>
-                  <a:t>Domain</a:t>
-                </a:r>
-              </a:p>
-              <a:p>
-                <a:pPr marL="0" indent="0">
-                  <a:buNone/>
-                </a:pPr>
-                <a14:m>
-                  <m:oMathPara xmlns:m="http://schemas.openxmlformats.org/officeDocument/2006/math">
-                    <m:oMathParaPr>
-                      <m:jc m:val="left"/>
-                    </m:oMathParaPr>
-                    <m:oMath xmlns:m="http://schemas.openxmlformats.org/officeDocument/2006/math">
-                      <m:r>
-                        <a:rPr lang="en-US" b="0" i="1" smtClean="0">
-                          <a:solidFill>
-                            <a:schemeClr val="tx1"/>
-                          </a:solidFill>
-                          <a:latin typeface="Cambria Math" panose="02040503050406030204" pitchFamily="18" charset="0"/>
-                        </a:rPr>
-                        <m:t>𝑝</m:t>
-                      </m:r>
-                      <m:r>
-                        <a:rPr lang="en-US" b="0" i="1" smtClean="0">
-                          <a:solidFill>
-                            <a:schemeClr val="tx1"/>
-                          </a:solidFill>
-                          <a:latin typeface="Cambria Math" panose="02040503050406030204" pitchFamily="18" charset="0"/>
-                        </a:rPr>
-                        <m:t>∈</m:t>
-                      </m:r>
-                      <m:d>
-                        <m:dPr>
-                          <m:begChr m:val="["/>
-                          <m:endChr m:val="]"/>
-                          <m:ctrlPr>
-                            <a:rPr lang="en-US" b="0" i="1" smtClean="0">
-                              <a:solidFill>
-                                <a:schemeClr val="tx1"/>
-                              </a:solidFill>
-                              <a:latin typeface="Cambria Math" panose="02040503050406030204" pitchFamily="18" charset="0"/>
-                            </a:rPr>
-                          </m:ctrlPr>
-                        </m:dPr>
-                        <m:e>
-                          <m:r>
-                            <a:rPr lang="en-US" b="0" i="1" smtClean="0">
-                              <a:solidFill>
-                                <a:schemeClr val="tx1"/>
-                              </a:solidFill>
-                              <a:latin typeface="Cambria Math" panose="02040503050406030204" pitchFamily="18" charset="0"/>
-                            </a:rPr>
-                            <m:t>0, 20</m:t>
-                          </m:r>
-                        </m:e>
-                      </m:d>
-                      <m:r>
-                        <a:rPr lang="en-US" b="0" i="1" smtClean="0">
-                          <a:solidFill>
-                            <a:schemeClr val="tx1"/>
-                          </a:solidFill>
-                          <a:latin typeface="Cambria Math" panose="02040503050406030204" pitchFamily="18" charset="0"/>
-                          <a:ea typeface="Cambria Math" panose="02040503050406030204" pitchFamily="18" charset="0"/>
-                        </a:rPr>
-                        <m:t>⊗</m:t>
-                      </m:r>
-                      <m:d>
-                        <m:dPr>
-                          <m:begChr m:val="["/>
-                          <m:endChr m:val="]"/>
-                          <m:ctrlPr>
-                            <a:rPr lang="en-US" b="0" i="1" smtClean="0">
-                              <a:solidFill>
-                                <a:schemeClr val="tx1"/>
-                              </a:solidFill>
-                              <a:latin typeface="Cambria Math" panose="02040503050406030204" pitchFamily="18" charset="0"/>
-                              <a:ea typeface="Cambria Math" panose="02040503050406030204" pitchFamily="18" charset="0"/>
-                            </a:rPr>
-                          </m:ctrlPr>
-                        </m:dPr>
-                        <m:e>
-                          <m:r>
-                            <a:rPr lang="en-US" b="0" i="1" smtClean="0">
-                              <a:solidFill>
-                                <a:schemeClr val="tx1"/>
-                              </a:solidFill>
-                              <a:latin typeface="Cambria Math" panose="02040503050406030204" pitchFamily="18" charset="0"/>
-                              <a:ea typeface="Cambria Math" panose="02040503050406030204" pitchFamily="18" charset="0"/>
-                            </a:rPr>
-                            <m:t>−1, 1</m:t>
-                          </m:r>
-                        </m:e>
-                      </m:d>
-                      <m:r>
-                        <a:rPr lang="en-US" i="1">
-                          <a:solidFill>
-                            <a:schemeClr val="tx1"/>
-                          </a:solidFill>
-                          <a:latin typeface="Cambria Math" panose="02040503050406030204" pitchFamily="18" charset="0"/>
-                          <a:ea typeface="Cambria Math" panose="02040503050406030204" pitchFamily="18" charset="0"/>
-                        </a:rPr>
-                        <m:t>⊗</m:t>
-                      </m:r>
-                      <m:r>
-                        <a:rPr lang="en-US" b="0" i="1" smtClean="0">
-                          <a:solidFill>
-                            <a:schemeClr val="tx1"/>
-                          </a:solidFill>
-                          <a:latin typeface="Cambria Math" panose="02040503050406030204" pitchFamily="18" charset="0"/>
-                          <a:ea typeface="Cambria Math" panose="02040503050406030204" pitchFamily="18" charset="0"/>
-                        </a:rPr>
-                        <m:t>[−2, 2]</m:t>
-                      </m:r>
-                      <m:r>
-                        <a:rPr lang="en-US" i="1">
-                          <a:solidFill>
-                            <a:schemeClr val="tx1"/>
-                          </a:solidFill>
-                          <a:latin typeface="Cambria Math" panose="02040503050406030204" pitchFamily="18" charset="0"/>
-                          <a:ea typeface="Cambria Math" panose="02040503050406030204" pitchFamily="18" charset="0"/>
-                        </a:rPr>
-                        <m:t>⊗[</m:t>
-                      </m:r>
-                      <m:r>
-                        <a:rPr lang="en-US" b="0" i="1" smtClean="0">
-                          <a:solidFill>
-                            <a:schemeClr val="tx1"/>
-                          </a:solidFill>
-                          <a:latin typeface="Cambria Math" panose="02040503050406030204" pitchFamily="18" charset="0"/>
-                          <a:ea typeface="Cambria Math" panose="02040503050406030204" pitchFamily="18" charset="0"/>
-                        </a:rPr>
-                        <m:t>0</m:t>
-                      </m:r>
-                      <m:r>
-                        <a:rPr lang="en-US" i="1">
-                          <a:solidFill>
-                            <a:schemeClr val="tx1"/>
-                          </a:solidFill>
-                          <a:latin typeface="Cambria Math" panose="02040503050406030204" pitchFamily="18" charset="0"/>
-                          <a:ea typeface="Cambria Math" panose="02040503050406030204" pitchFamily="18" charset="0"/>
-                        </a:rPr>
-                        <m:t>,</m:t>
-                      </m:r>
-                      <m:r>
-                        <a:rPr lang="en-US" b="0" i="1" smtClean="0">
-                          <a:solidFill>
-                            <a:schemeClr val="tx1"/>
-                          </a:solidFill>
-                          <a:latin typeface="Cambria Math" panose="02040503050406030204" pitchFamily="18" charset="0"/>
-                          <a:ea typeface="Cambria Math" panose="02040503050406030204" pitchFamily="18" charset="0"/>
-                        </a:rPr>
-                        <m:t> 0.5</m:t>
-                      </m:r>
-                      <m:r>
-                        <a:rPr lang="en-US" i="1">
-                          <a:solidFill>
-                            <a:schemeClr val="tx1"/>
-                          </a:solidFill>
-                          <a:latin typeface="Cambria Math" panose="02040503050406030204" pitchFamily="18" charset="0"/>
-                          <a:ea typeface="Cambria Math" panose="02040503050406030204" pitchFamily="18" charset="0"/>
-                        </a:rPr>
-                        <m:t>]</m:t>
-                      </m:r>
-                    </m:oMath>
-                  </m:oMathPara>
-                </a14:m>
-                <a:endParaRPr lang="en-US" dirty="0">
-                  <a:solidFill>
-                    <a:schemeClr val="tx1"/>
-                  </a:solidFill>
-                </a:endParaRPr>
-              </a:p>
-              <a:p>
-                <a:pPr marL="0" indent="0">
-                  <a:buNone/>
-                </a:pPr>
-                <a:endParaRPr lang="en-US" dirty="0"/>
-              </a:p>
-              <a:p>
-                <a:pPr marL="0" indent="0">
-                  <a:buNone/>
-                </a:pPr>
-                <a:r>
-                  <a:rPr lang="en-US" dirty="0">
-                    <a:solidFill>
-                      <a:srgbClr val="0033CC"/>
-                    </a:solidFill>
-                  </a:rPr>
-                  <a:t>Training</a:t>
-                </a:r>
-              </a:p>
-              <a:p>
-                <a:pPr marL="857250" lvl="1" indent="-457200">
-                  <a:buFont typeface="+mj-lt"/>
-                  <a:buAutoNum type="arabicPeriod"/>
-                </a:pPr>
-                <a:r>
-                  <a:rPr lang="en-US" dirty="0"/>
-                  <a:t>Sample size:	250,000</a:t>
-                </a:r>
-              </a:p>
-              <a:p>
-                <a:pPr marL="857250" lvl="1" indent="-457200">
-                  <a:buFont typeface="+mj-lt"/>
-                  <a:buAutoNum type="arabicPeriod"/>
-                </a:pPr>
-                <a:r>
-                  <a:rPr lang="en-US" dirty="0"/>
-                  <a:t>Learning rate:	</a:t>
-                </a:r>
-                <a14:m>
-                  <m:oMath xmlns:m="http://schemas.openxmlformats.org/officeDocument/2006/math">
-                    <m:sSup>
-                      <m:sSupPr>
-                        <m:ctrlPr>
-                          <a:rPr lang="en-US" b="0" i="1" smtClean="0">
-                            <a:latin typeface="Cambria Math" panose="02040503050406030204" pitchFamily="18" charset="0"/>
-                          </a:rPr>
-                        </m:ctrlPr>
-                      </m:sSupPr>
-                      <m:e>
-                        <m:r>
-                          <a:rPr lang="en-US" b="0" i="1" smtClean="0">
-                            <a:latin typeface="Cambria Math" panose="02040503050406030204" pitchFamily="18" charset="0"/>
-                          </a:rPr>
-                          <m:t>5×10</m:t>
-                        </m:r>
-                      </m:e>
-                      <m:sup>
-                        <m:r>
-                          <a:rPr lang="en-US" b="0" i="1" smtClean="0">
-                            <a:latin typeface="Cambria Math" panose="02040503050406030204" pitchFamily="18" charset="0"/>
-                          </a:rPr>
-                          <m:t>−4</m:t>
-                        </m:r>
-                      </m:sup>
-                    </m:sSup>
-                  </m:oMath>
-                </a14:m>
-                <a:endParaRPr lang="en-US" dirty="0"/>
-              </a:p>
-              <a:p>
-                <a:pPr marL="857250" lvl="1" indent="-457200">
-                  <a:buFont typeface="+mj-lt"/>
-                  <a:buAutoNum type="arabicPeriod"/>
-                </a:pPr>
-                <a:r>
-                  <a:rPr lang="en-US" dirty="0"/>
-                  <a:t>Batch size:	200</a:t>
-                </a:r>
-              </a:p>
-              <a:p>
-                <a:pPr marL="857250" lvl="1" indent="-457200">
-                  <a:buFont typeface="+mj-lt"/>
-                  <a:buAutoNum type="arabicPeriod"/>
-                </a:pPr>
-                <a:r>
-                  <a:rPr lang="en-US" dirty="0"/>
-                  <a:t>Iterations:	200,000</a:t>
-                </a:r>
-              </a:p>
-            </p:txBody>
-          </p:sp>
-        </mc:Choice>
-        <mc:Fallback xmlns="">
-          <p:sp>
-            <p:nvSpPr>
-              <p:cNvPr id="8" name="Content Placeholder 7">
-                <a:extLst>
-                  <a:ext uri="{FF2B5EF4-FFF2-40B4-BE49-F238E27FC236}">
-                    <a16:creationId xmlns:a16="http://schemas.microsoft.com/office/drawing/2014/main" id="{91326329-24EF-E45E-D886-1EC3829AC52E}"/>
-                  </a:ext>
-                </a:extLst>
-              </p:cNvPr>
-              <p:cNvSpPr>
-                <a:spLocks noGrp="1" noRot="1" noChangeAspect="1" noMove="1" noResize="1" noEditPoints="1" noAdjustHandles="1" noChangeArrowheads="1" noChangeShapeType="1" noTextEdit="1"/>
-              </p:cNvSpPr>
-              <p:nvPr>
-                <p:ph idx="1"/>
-              </p:nvPr>
-            </p:nvSpPr>
-            <p:spPr>
-              <a:xfrm>
-                <a:off x="711200" y="1295400"/>
-                <a:ext cx="7899400" cy="4819650"/>
-              </a:xfrm>
-              <a:blipFill>
-                <a:blip r:embed="rId2"/>
-                <a:stretch>
-                  <a:fillRect l="-1284" t="-1316" b="-2105"/>
-                </a:stretch>
-              </a:blipFill>
-            </p:spPr>
-            <p:txBody>
-              <a:bodyPr/>
-              <a:lstStyle/>
-              <a:p>
-                <a:r>
-                  <a:rPr lang="en-US">
-                    <a:noFill/>
-                  </a:rPr>
-                  <a:t> </a:t>
-                </a:r>
-              </a:p>
-            </p:txBody>
-          </p:sp>
-        </mc:Fallback>
-      </mc:AlternateContent>
-      <p:grpSp>
-        <p:nvGrpSpPr>
-          <p:cNvPr id="2" name="Group 1">
-            <a:extLst>
-              <a:ext uri="{FF2B5EF4-FFF2-40B4-BE49-F238E27FC236}">
-                <a16:creationId xmlns:a16="http://schemas.microsoft.com/office/drawing/2014/main" id="{185402A5-8EAE-778E-B8C3-AC31F2324BA3}"/>
-              </a:ext>
-            </a:extLst>
-          </p:cNvPr>
-          <p:cNvGrpSpPr/>
-          <p:nvPr/>
-        </p:nvGrpSpPr>
-        <p:grpSpPr>
-          <a:xfrm>
-            <a:off x="6400800" y="1295400"/>
-            <a:ext cx="2458366" cy="3962400"/>
-            <a:chOff x="4660900" y="1962346"/>
-            <a:chExt cx="2382166" cy="3962400"/>
-          </a:xfrm>
-        </p:grpSpPr>
-        <p:grpSp>
-          <p:nvGrpSpPr>
-            <p:cNvPr id="4" name="Group 3">
-              <a:extLst>
-                <a:ext uri="{FF2B5EF4-FFF2-40B4-BE49-F238E27FC236}">
-                  <a16:creationId xmlns:a16="http://schemas.microsoft.com/office/drawing/2014/main" id="{553AE1EE-0813-E8B3-B4F5-EEFCC8D31984}"/>
-                </a:ext>
-              </a:extLst>
-            </p:cNvPr>
-            <p:cNvGrpSpPr/>
-            <p:nvPr/>
-          </p:nvGrpSpPr>
-          <p:grpSpPr>
-            <a:xfrm>
-              <a:off x="4660900" y="4177535"/>
-              <a:ext cx="1663700" cy="956749"/>
-              <a:chOff x="2057400" y="4748504"/>
-              <a:chExt cx="2286000" cy="1337299"/>
-            </a:xfrm>
-          </p:grpSpPr>
-          <p:grpSp>
-            <p:nvGrpSpPr>
-              <p:cNvPr id="35" name="Group 34">
-                <a:extLst>
-                  <a:ext uri="{FF2B5EF4-FFF2-40B4-BE49-F238E27FC236}">
-                    <a16:creationId xmlns:a16="http://schemas.microsoft.com/office/drawing/2014/main" id="{CFCA3988-8E8F-323E-C435-3C9F8048EDFD}"/>
-                  </a:ext>
-                </a:extLst>
-              </p:cNvPr>
-              <p:cNvGrpSpPr/>
-              <p:nvPr/>
-            </p:nvGrpSpPr>
-            <p:grpSpPr>
-              <a:xfrm>
-                <a:off x="2057400" y="5088853"/>
-                <a:ext cx="2286000" cy="996950"/>
-                <a:chOff x="5410200" y="4620220"/>
-                <a:chExt cx="2286000" cy="996950"/>
-              </a:xfrm>
-            </p:grpSpPr>
-            <p:sp>
-              <p:nvSpPr>
-                <p:cNvPr id="37" name="Rectangle 36">
-                  <a:extLst>
-                    <a:ext uri="{FF2B5EF4-FFF2-40B4-BE49-F238E27FC236}">
-                      <a16:creationId xmlns:a16="http://schemas.microsoft.com/office/drawing/2014/main" id="{D3709731-1C4D-A671-E50C-9E389A4F1639}"/>
-                    </a:ext>
-                  </a:extLst>
-                </p:cNvPr>
-                <p:cNvSpPr/>
-                <p:nvPr/>
-              </p:nvSpPr>
-              <p:spPr bwMode="auto">
-                <a:xfrm>
-                  <a:off x="5410200" y="5100935"/>
-                  <a:ext cx="2286000" cy="516235"/>
-                </a:xfrm>
-                <a:prstGeom prst="rect">
-                  <a:avLst/>
-                </a:prstGeom>
-                <a:solidFill>
-                  <a:srgbClr val="FFFF00"/>
-                </a:solidFill>
-                <a:ln w="12700" cap="flat" cmpd="sng" algn="ctr">
-                  <a:noFill/>
-                  <a:prstDash val="solid"/>
-                  <a:round/>
-                  <a:headEnd type="none" w="med" len="med"/>
-                  <a:tailEnd type="none" w="med" len="med"/>
-                </a:ln>
-                <a:effectLst>
-                  <a:outerShdw blurRad="50800" dist="38100" dir="2700000" algn="tl" rotWithShape="0">
-                    <a:prstClr val="black">
-                      <a:alpha val="40000"/>
-                    </a:prstClr>
-                  </a:outerShdw>
-                </a:effectLst>
-              </p:spPr>
-              <p:txBody>
-                <a:bodyPr vert="horz" wrap="square" lIns="91440" tIns="45720" rIns="91440" bIns="45720" numCol="1" rtlCol="0" anchor="t" anchorCtr="0" compatLnSpc="1">
-                  <a:prstTxWarp prst="textNoShape">
-                    <a:avLst/>
-                  </a:prstTxWarp>
-                  <a:spAutoFit/>
-                </a:bodyPr>
-                <a:lstStyle/>
-                <a:p>
-                  <a:pPr marL="0" marR="0" indent="0" algn="ctr" defTabSz="914400" rtl="0" eaLnBrk="0" fontAlgn="base" latinLnBrk="0" hangingPunct="0">
-                    <a:lnSpc>
-                      <a:spcPct val="100000"/>
-                    </a:lnSpc>
-                    <a:spcBef>
-                      <a:spcPct val="0"/>
-                    </a:spcBef>
-                    <a:spcAft>
-                      <a:spcPct val="0"/>
-                    </a:spcAft>
-                    <a:buClrTx/>
-                    <a:buSzTx/>
-                    <a:buFontTx/>
-                    <a:buNone/>
-                    <a:tabLst/>
-                  </a:pPr>
-                  <a:r>
-                    <a:rPr lang="en-US" sz="1800" b="1" dirty="0">
-                      <a:latin typeface="Times New Roman" pitchFamily="-65" charset="0"/>
-                    </a:rPr>
-                    <a:t>Linear(4, 32)</a:t>
-                  </a:r>
-                  <a:endParaRPr kumimoji="0" lang="en-US" sz="1800" b="1" i="0" u="none" strike="noStrike" cap="none" normalizeH="0" baseline="0" dirty="0">
-                    <a:ln>
-                      <a:noFill/>
-                    </a:ln>
-                    <a:effectLst/>
-                    <a:latin typeface="Times New Roman" pitchFamily="-65" charset="0"/>
-                  </a:endParaRPr>
-                </a:p>
-              </p:txBody>
-            </p:sp>
-            <p:sp>
-              <p:nvSpPr>
-                <p:cNvPr id="38" name="Rectangle 37">
-                  <a:extLst>
-                    <a:ext uri="{FF2B5EF4-FFF2-40B4-BE49-F238E27FC236}">
-                      <a16:creationId xmlns:a16="http://schemas.microsoft.com/office/drawing/2014/main" id="{C3CB207B-D4C0-CDAC-5A45-B65F7F710BD4}"/>
-                    </a:ext>
-                  </a:extLst>
-                </p:cNvPr>
-                <p:cNvSpPr/>
-                <p:nvPr/>
-              </p:nvSpPr>
-              <p:spPr bwMode="auto">
-                <a:xfrm>
-                  <a:off x="5410200" y="4620220"/>
-                  <a:ext cx="2286000" cy="516235"/>
-                </a:xfrm>
-                <a:prstGeom prst="rect">
-                  <a:avLst/>
-                </a:prstGeom>
-                <a:solidFill>
-                  <a:schemeClr val="accent1">
-                    <a:lumMod val="40000"/>
-                    <a:lumOff val="60000"/>
-                  </a:schemeClr>
-                </a:solidFill>
-                <a:ln w="12700" cap="flat" cmpd="sng" algn="ctr">
-                  <a:noFill/>
-                  <a:prstDash val="solid"/>
-                  <a:round/>
-                  <a:headEnd type="none" w="med" len="med"/>
-                  <a:tailEnd type="none" w="med" len="med"/>
-                </a:ln>
-                <a:effectLst>
-                  <a:outerShdw blurRad="50800" dist="38100" dir="2700000" algn="tl" rotWithShape="0">
-                    <a:prstClr val="black">
-                      <a:alpha val="40000"/>
-                    </a:prstClr>
-                  </a:outerShdw>
-                </a:effectLst>
-              </p:spPr>
-              <p:txBody>
-                <a:bodyPr vert="horz" wrap="square" lIns="91440" tIns="45720" rIns="91440" bIns="45720" numCol="1" rtlCol="0" anchor="t" anchorCtr="0" compatLnSpc="1">
-                  <a:prstTxWarp prst="textNoShape">
-                    <a:avLst/>
-                  </a:prstTxWarp>
-                  <a:spAutoFit/>
-                </a:bodyPr>
-                <a:lstStyle/>
-                <a:p>
-                  <a:pPr marL="0" marR="0" indent="0" algn="ctr" defTabSz="914400" rtl="0" eaLnBrk="0" fontAlgn="base" latinLnBrk="0" hangingPunct="0">
-                    <a:lnSpc>
-                      <a:spcPct val="100000"/>
-                    </a:lnSpc>
-                    <a:spcBef>
-                      <a:spcPct val="0"/>
-                    </a:spcBef>
-                    <a:spcAft>
-                      <a:spcPct val="0"/>
-                    </a:spcAft>
-                    <a:buClrTx/>
-                    <a:buSzTx/>
-                    <a:buFontTx/>
-                    <a:buNone/>
-                    <a:tabLst/>
-                  </a:pPr>
-                  <a:r>
-                    <a:rPr lang="en-US" sz="1800" dirty="0" err="1">
-                      <a:latin typeface="Times New Roman" pitchFamily="-65" charset="0"/>
-                    </a:rPr>
-                    <a:t>SiLU</a:t>
-                  </a:r>
-                  <a:r>
-                    <a:rPr lang="en-US" sz="1800" dirty="0">
-                      <a:latin typeface="Times New Roman" pitchFamily="-65" charset="0"/>
-                    </a:rPr>
-                    <a:t>()</a:t>
-                  </a:r>
-                  <a:endParaRPr kumimoji="0" lang="en-US" sz="1800" b="0" i="0" u="none" strike="noStrike" cap="none" normalizeH="0" baseline="0" dirty="0">
-                    <a:ln>
-                      <a:noFill/>
-                    </a:ln>
-                    <a:solidFill>
-                      <a:schemeClr val="tx1"/>
-                    </a:solidFill>
-                    <a:effectLst/>
-                    <a:latin typeface="Times New Roman" pitchFamily="-65" charset="0"/>
-                  </a:endParaRPr>
-                </a:p>
-              </p:txBody>
-            </p:sp>
-          </p:grpSp>
-          <p:cxnSp>
-            <p:nvCxnSpPr>
-              <p:cNvPr id="36" name="Straight Arrow Connector 35">
-                <a:extLst>
-                  <a:ext uri="{FF2B5EF4-FFF2-40B4-BE49-F238E27FC236}">
-                    <a16:creationId xmlns:a16="http://schemas.microsoft.com/office/drawing/2014/main" id="{F03C27EA-3D4E-2511-730D-E6561D3B92B6}"/>
-                  </a:ext>
-                </a:extLst>
-              </p:cNvPr>
-              <p:cNvCxnSpPr>
-                <a:cxnSpLocks/>
-              </p:cNvCxnSpPr>
-              <p:nvPr/>
-            </p:nvCxnSpPr>
-            <p:spPr bwMode="auto">
-              <a:xfrm flipV="1">
-                <a:off x="3200400" y="4748504"/>
-                <a:ext cx="0" cy="356896"/>
-              </a:xfrm>
-              <a:prstGeom prst="straightConnector1">
-                <a:avLst/>
-              </a:prstGeom>
-              <a:noFill/>
-              <a:ln w="66675" cap="flat" cmpd="sng" algn="ctr">
-                <a:solidFill>
-                  <a:schemeClr val="tx1"/>
-                </a:solidFill>
-                <a:prstDash val="solid"/>
-                <a:round/>
-                <a:headEnd type="none" w="med" len="med"/>
-                <a:tailEnd type="triangle"/>
-              </a:ln>
-              <a:effectLst/>
-            </p:spPr>
-          </p:cxnSp>
-        </p:grpSp>
-        <p:grpSp>
-          <p:nvGrpSpPr>
-            <p:cNvPr id="5" name="Group 4">
-              <a:extLst>
-                <a:ext uri="{FF2B5EF4-FFF2-40B4-BE49-F238E27FC236}">
-                  <a16:creationId xmlns:a16="http://schemas.microsoft.com/office/drawing/2014/main" id="{29D8FC3B-BD1B-A4AE-BE0E-1E6A5CFDF0D4}"/>
-                </a:ext>
-              </a:extLst>
-            </p:cNvPr>
-            <p:cNvGrpSpPr/>
-            <p:nvPr/>
-          </p:nvGrpSpPr>
-          <p:grpSpPr>
-            <a:xfrm>
-              <a:off x="5366666" y="5121298"/>
-              <a:ext cx="330559" cy="803448"/>
-              <a:chOff x="3066310" y="5969678"/>
-              <a:chExt cx="300508" cy="803448"/>
-            </a:xfrm>
-          </p:grpSpPr>
-          <p:cxnSp>
-            <p:nvCxnSpPr>
-              <p:cNvPr id="28" name="Straight Arrow Connector 27">
-                <a:extLst>
-                  <a:ext uri="{FF2B5EF4-FFF2-40B4-BE49-F238E27FC236}">
-                    <a16:creationId xmlns:a16="http://schemas.microsoft.com/office/drawing/2014/main" id="{0126194B-A4CC-2198-E6E7-E2A65BD1C2C8}"/>
-                  </a:ext>
-                </a:extLst>
-              </p:cNvPr>
-              <p:cNvCxnSpPr>
-                <a:cxnSpLocks/>
-              </p:cNvCxnSpPr>
-              <p:nvPr/>
-            </p:nvCxnSpPr>
-            <p:spPr bwMode="auto">
-              <a:xfrm flipV="1">
-                <a:off x="3200400" y="5969678"/>
-                <a:ext cx="0" cy="356896"/>
-              </a:xfrm>
-              <a:prstGeom prst="straightConnector1">
-                <a:avLst/>
-              </a:prstGeom>
-              <a:noFill/>
-              <a:ln w="66675" cap="flat" cmpd="sng" algn="ctr">
-                <a:solidFill>
-                  <a:schemeClr val="tx1"/>
-                </a:solidFill>
-                <a:prstDash val="solid"/>
-                <a:round/>
-                <a:headEnd type="none" w="med" len="med"/>
-                <a:tailEnd type="triangle"/>
-              </a:ln>
-              <a:effectLst/>
-            </p:spPr>
-          </p:cxnSp>
-          <mc:AlternateContent xmlns:mc="http://schemas.openxmlformats.org/markup-compatibility/2006" xmlns:a14="http://schemas.microsoft.com/office/drawing/2010/main">
-            <mc:Choice Requires="a14">
-              <p:sp>
-                <p:nvSpPr>
-                  <p:cNvPr id="34" name="TextBox 33">
-                    <a:extLst>
-                      <a:ext uri="{FF2B5EF4-FFF2-40B4-BE49-F238E27FC236}">
-                        <a16:creationId xmlns:a16="http://schemas.microsoft.com/office/drawing/2014/main" id="{3DE021B4-C8E5-B63D-F975-C8F026E894C5}"/>
-                      </a:ext>
-                    </a:extLst>
-                  </p:cNvPr>
-                  <p:cNvSpPr txBox="1"/>
-                  <p:nvPr/>
-                </p:nvSpPr>
-                <p:spPr>
-                  <a:xfrm flipH="1">
-                    <a:off x="3066310" y="6249906"/>
-                    <a:ext cx="300508" cy="523220"/>
-                  </a:xfrm>
-                  <a:prstGeom prst="rect">
-                    <a:avLst/>
-                  </a:prstGeom>
-                  <a:noFill/>
-                </p:spPr>
-                <p:txBody>
-                  <a:bodyPr wrap="square" rtlCol="0">
-                    <a:spAutoFit/>
-                  </a:bodyPr>
-                  <a:lstStyle/>
-                  <a:p>
-                    <a:pPr/>
-                    <a14:m>
-                      <m:oMathPara xmlns:m="http://schemas.openxmlformats.org/officeDocument/2006/math">
-                        <m:oMathParaPr>
-                          <m:jc m:val="centerGroup"/>
-                        </m:oMathParaPr>
-                        <m:oMath xmlns:m="http://schemas.openxmlformats.org/officeDocument/2006/math">
-                          <m:r>
-                            <a:rPr lang="en-US" sz="2800" b="0" i="1" smtClean="0">
-                              <a:latin typeface="Cambria Math" panose="02040503050406030204" pitchFamily="18" charset="0"/>
-                            </a:rPr>
-                            <m:t>𝑝</m:t>
-                          </m:r>
-                        </m:oMath>
-                      </m:oMathPara>
-                    </a14:m>
-                    <a:endParaRPr lang="en-US" sz="2800" dirty="0"/>
-                  </a:p>
-                </p:txBody>
-              </p:sp>
-            </mc:Choice>
-            <mc:Fallback xmlns="">
-              <p:sp>
-                <p:nvSpPr>
-                  <p:cNvPr id="19" name="TextBox 18">
-                    <a:extLst>
-                      <a:ext uri="{FF2B5EF4-FFF2-40B4-BE49-F238E27FC236}">
-                        <a16:creationId xmlns:a16="http://schemas.microsoft.com/office/drawing/2014/main" id="{2197964C-F039-27C0-0ADE-0069CD5F648A}"/>
-                      </a:ext>
-                    </a:extLst>
-                  </p:cNvPr>
-                  <p:cNvSpPr txBox="1">
-                    <a:spLocks noRot="1" noChangeAspect="1" noMove="1" noResize="1" noEditPoints="1" noAdjustHandles="1" noChangeArrowheads="1" noChangeShapeType="1" noTextEdit="1"/>
-                  </p:cNvSpPr>
-                  <p:nvPr/>
-                </p:nvSpPr>
-                <p:spPr>
-                  <a:xfrm flipH="1">
-                    <a:off x="3066310" y="6249906"/>
-                    <a:ext cx="300508" cy="523220"/>
-                  </a:xfrm>
-                  <a:prstGeom prst="rect">
-                    <a:avLst/>
-                  </a:prstGeom>
-                  <a:blipFill>
-                    <a:blip r:embed="rId3"/>
-                    <a:stretch>
-                      <a:fillRect l="-11111" r="-22222" b="-11628"/>
-                    </a:stretch>
-                  </a:blipFill>
-                </p:spPr>
-                <p:txBody>
-                  <a:bodyPr/>
-                  <a:lstStyle/>
-                  <a:p>
-                    <a:r>
-                      <a:rPr lang="en-US">
-                        <a:noFill/>
-                      </a:rPr>
-                      <a:t> </a:t>
-                    </a:r>
-                  </a:p>
-                </p:txBody>
-              </p:sp>
-            </mc:Fallback>
-          </mc:AlternateContent>
-        </p:grpSp>
-        <p:grpSp>
-          <p:nvGrpSpPr>
-            <p:cNvPr id="9" name="Group 8">
-              <a:extLst>
-                <a:ext uri="{FF2B5EF4-FFF2-40B4-BE49-F238E27FC236}">
-                  <a16:creationId xmlns:a16="http://schemas.microsoft.com/office/drawing/2014/main" id="{07DB1926-D9DF-7DBF-DF75-3A171B4456A0}"/>
-                </a:ext>
-              </a:extLst>
-            </p:cNvPr>
-            <p:cNvGrpSpPr/>
-            <p:nvPr/>
-          </p:nvGrpSpPr>
-          <p:grpSpPr>
-            <a:xfrm>
-              <a:off x="4660900" y="2487863"/>
-              <a:ext cx="1663700" cy="651128"/>
-              <a:chOff x="2057400" y="5175687"/>
-              <a:chExt cx="2286000" cy="910116"/>
-            </a:xfrm>
-          </p:grpSpPr>
-          <p:sp>
-            <p:nvSpPr>
-              <p:cNvPr id="22" name="Rectangle 21">
-                <a:extLst>
-                  <a:ext uri="{FF2B5EF4-FFF2-40B4-BE49-F238E27FC236}">
-                    <a16:creationId xmlns:a16="http://schemas.microsoft.com/office/drawing/2014/main" id="{53ADBE26-D010-1B9F-CFD8-E4BB475F8D1A}"/>
-                  </a:ext>
-                </a:extLst>
-              </p:cNvPr>
-              <p:cNvSpPr/>
-              <p:nvPr/>
-            </p:nvSpPr>
-            <p:spPr bwMode="auto">
-              <a:xfrm>
-                <a:off x="2057400" y="5569568"/>
-                <a:ext cx="2286000" cy="516235"/>
-              </a:xfrm>
-              <a:prstGeom prst="rect">
-                <a:avLst/>
-              </a:prstGeom>
-              <a:solidFill>
-                <a:srgbClr val="FFFF00"/>
-              </a:solidFill>
-              <a:ln w="12700" cap="flat" cmpd="sng" algn="ctr">
-                <a:noFill/>
-                <a:prstDash val="solid"/>
-                <a:round/>
-                <a:headEnd type="none" w="med" len="med"/>
-                <a:tailEnd type="none" w="med" len="med"/>
-              </a:ln>
-              <a:effectLst>
-                <a:outerShdw blurRad="50800" dist="38100" dir="2700000" algn="tl" rotWithShape="0">
-                  <a:prstClr val="black">
-                    <a:alpha val="40000"/>
-                  </a:prstClr>
-                </a:outerShdw>
-              </a:effectLst>
-            </p:spPr>
-            <p:txBody>
-              <a:bodyPr vert="horz" wrap="square" lIns="91440" tIns="45720" rIns="91440" bIns="45720" numCol="1" rtlCol="0" anchor="t" anchorCtr="0" compatLnSpc="1">
-                <a:prstTxWarp prst="textNoShape">
-                  <a:avLst/>
-                </a:prstTxWarp>
-                <a:spAutoFit/>
-              </a:bodyPr>
-              <a:lstStyle/>
-              <a:p>
-                <a:pPr marL="0" marR="0" indent="0" algn="ctr" defTabSz="914400" rtl="0" eaLnBrk="0" fontAlgn="base" latinLnBrk="0" hangingPunct="0">
-                  <a:lnSpc>
-                    <a:spcPct val="100000"/>
-                  </a:lnSpc>
-                  <a:spcBef>
-                    <a:spcPct val="0"/>
-                  </a:spcBef>
-                  <a:spcAft>
-                    <a:spcPct val="0"/>
-                  </a:spcAft>
-                  <a:buClrTx/>
-                  <a:buSzTx/>
-                  <a:buFontTx/>
-                  <a:buNone/>
-                  <a:tabLst/>
-                </a:pPr>
-                <a:r>
-                  <a:rPr lang="en-US" sz="1800" b="1" dirty="0">
-                    <a:latin typeface="Times New Roman" pitchFamily="-65" charset="0"/>
-                  </a:rPr>
-                  <a:t>Linear(32, 1)</a:t>
-                </a:r>
-                <a:endParaRPr kumimoji="0" lang="en-US" sz="1800" b="1" i="0" u="none" strike="noStrike" cap="none" normalizeH="0" baseline="0" dirty="0">
-                  <a:ln>
-                    <a:noFill/>
-                  </a:ln>
-                  <a:effectLst/>
-                  <a:latin typeface="Times New Roman" pitchFamily="-65" charset="0"/>
-                </a:endParaRPr>
-              </a:p>
-            </p:txBody>
-          </p:sp>
-          <p:cxnSp>
-            <p:nvCxnSpPr>
-              <p:cNvPr id="25" name="Straight Arrow Connector 24">
-                <a:extLst>
-                  <a:ext uri="{FF2B5EF4-FFF2-40B4-BE49-F238E27FC236}">
-                    <a16:creationId xmlns:a16="http://schemas.microsoft.com/office/drawing/2014/main" id="{AECCE452-23F8-1136-36B2-C49FD6373757}"/>
-                  </a:ext>
-                </a:extLst>
-              </p:cNvPr>
-              <p:cNvCxnSpPr>
-                <a:cxnSpLocks/>
-              </p:cNvCxnSpPr>
-              <p:nvPr/>
-            </p:nvCxnSpPr>
-            <p:spPr bwMode="auto">
-              <a:xfrm flipV="1">
-                <a:off x="3200400" y="5175687"/>
-                <a:ext cx="0" cy="356895"/>
-              </a:xfrm>
-              <a:prstGeom prst="straightConnector1">
-                <a:avLst/>
-              </a:prstGeom>
-              <a:noFill/>
-              <a:ln w="66675" cap="flat" cmpd="sng" algn="ctr">
-                <a:solidFill>
-                  <a:schemeClr val="tx1"/>
-                </a:solidFill>
-                <a:prstDash val="solid"/>
-                <a:round/>
-                <a:headEnd type="none" w="med" len="med"/>
-                <a:tailEnd type="triangle"/>
-              </a:ln>
-              <a:effectLst/>
-            </p:spPr>
-          </p:cxnSp>
-        </p:grpSp>
-        <p:grpSp>
-          <p:nvGrpSpPr>
-            <p:cNvPr id="11" name="Group 10">
-              <a:extLst>
-                <a:ext uri="{FF2B5EF4-FFF2-40B4-BE49-F238E27FC236}">
-                  <a16:creationId xmlns:a16="http://schemas.microsoft.com/office/drawing/2014/main" id="{7894E85F-08EF-BBAF-6D25-95E8CA373F33}"/>
-                </a:ext>
-              </a:extLst>
-            </p:cNvPr>
-            <p:cNvGrpSpPr/>
-            <p:nvPr/>
-          </p:nvGrpSpPr>
-          <p:grpSpPr>
-            <a:xfrm>
-              <a:off x="4660900" y="3162572"/>
-              <a:ext cx="2382166" cy="956749"/>
-              <a:chOff x="4660900" y="3162572"/>
-              <a:chExt cx="2382166" cy="956749"/>
-            </a:xfrm>
-          </p:grpSpPr>
-          <p:grpSp>
-            <p:nvGrpSpPr>
-              <p:cNvPr id="13" name="Group 12">
-                <a:extLst>
-                  <a:ext uri="{FF2B5EF4-FFF2-40B4-BE49-F238E27FC236}">
-                    <a16:creationId xmlns:a16="http://schemas.microsoft.com/office/drawing/2014/main" id="{CD85A80A-1923-746F-D66F-4C119E12CC02}"/>
-                  </a:ext>
-                </a:extLst>
-              </p:cNvPr>
-              <p:cNvGrpSpPr/>
-              <p:nvPr/>
-            </p:nvGrpSpPr>
-            <p:grpSpPr>
-              <a:xfrm>
-                <a:off x="4660900" y="3162572"/>
-                <a:ext cx="1663700" cy="956749"/>
-                <a:chOff x="2057400" y="4748504"/>
-                <a:chExt cx="2286000" cy="1337299"/>
-              </a:xfrm>
-            </p:grpSpPr>
-            <p:grpSp>
-              <p:nvGrpSpPr>
-                <p:cNvPr id="15" name="Group 14">
-                  <a:extLst>
-                    <a:ext uri="{FF2B5EF4-FFF2-40B4-BE49-F238E27FC236}">
-                      <a16:creationId xmlns:a16="http://schemas.microsoft.com/office/drawing/2014/main" id="{433F0A7C-EBF0-974E-DCF2-D9462D8F5413}"/>
-                    </a:ext>
-                  </a:extLst>
-                </p:cNvPr>
-                <p:cNvGrpSpPr/>
-                <p:nvPr/>
-              </p:nvGrpSpPr>
-              <p:grpSpPr>
-                <a:xfrm>
-                  <a:off x="2057400" y="5088853"/>
-                  <a:ext cx="2286000" cy="996950"/>
-                  <a:chOff x="5410200" y="4620220"/>
-                  <a:chExt cx="2286000" cy="996950"/>
-                </a:xfrm>
-              </p:grpSpPr>
-              <p:sp>
-                <p:nvSpPr>
-                  <p:cNvPr id="17" name="Rectangle 16">
-                    <a:extLst>
-                      <a:ext uri="{FF2B5EF4-FFF2-40B4-BE49-F238E27FC236}">
-                        <a16:creationId xmlns:a16="http://schemas.microsoft.com/office/drawing/2014/main" id="{22872834-9CAF-E785-3B0F-66DA691882DC}"/>
-                      </a:ext>
-                    </a:extLst>
-                  </p:cNvPr>
-                  <p:cNvSpPr/>
-                  <p:nvPr/>
-                </p:nvSpPr>
-                <p:spPr bwMode="auto">
-                  <a:xfrm>
-                    <a:off x="5410200" y="5100935"/>
-                    <a:ext cx="2286000" cy="516235"/>
-                  </a:xfrm>
-                  <a:prstGeom prst="rect">
-                    <a:avLst/>
-                  </a:prstGeom>
-                  <a:solidFill>
-                    <a:srgbClr val="FFFF00"/>
-                  </a:solidFill>
-                  <a:ln w="12700" cap="flat" cmpd="sng" algn="ctr">
-                    <a:noFill/>
-                    <a:prstDash val="solid"/>
-                    <a:round/>
-                    <a:headEnd type="none" w="med" len="med"/>
-                    <a:tailEnd type="none" w="med" len="med"/>
-                  </a:ln>
-                  <a:effectLst>
-                    <a:outerShdw blurRad="50800" dist="38100" dir="2700000" algn="tl" rotWithShape="0">
-                      <a:prstClr val="black">
-                        <a:alpha val="40000"/>
-                      </a:prstClr>
-                    </a:outerShdw>
-                  </a:effectLst>
-                </p:spPr>
-                <p:txBody>
-                  <a:bodyPr vert="horz" wrap="square" lIns="91440" tIns="45720" rIns="91440" bIns="45720" numCol="1" rtlCol="0" anchor="t" anchorCtr="0" compatLnSpc="1">
-                    <a:prstTxWarp prst="textNoShape">
-                      <a:avLst/>
-                    </a:prstTxWarp>
-                    <a:spAutoFit/>
-                  </a:bodyPr>
-                  <a:lstStyle/>
-                  <a:p>
-                    <a:pPr marL="0" marR="0" indent="0" algn="ctr" defTabSz="914400" rtl="0" eaLnBrk="0" fontAlgn="base" latinLnBrk="0" hangingPunct="0">
-                      <a:lnSpc>
-                        <a:spcPct val="100000"/>
-                      </a:lnSpc>
-                      <a:spcBef>
-                        <a:spcPct val="0"/>
-                      </a:spcBef>
-                      <a:spcAft>
-                        <a:spcPct val="0"/>
-                      </a:spcAft>
-                      <a:buClrTx/>
-                      <a:buSzTx/>
-                      <a:buFontTx/>
-                      <a:buNone/>
-                      <a:tabLst/>
-                    </a:pPr>
-                    <a:r>
-                      <a:rPr lang="en-US" sz="1800" b="1" dirty="0">
-                        <a:latin typeface="Times New Roman" pitchFamily="-65" charset="0"/>
-                      </a:rPr>
-                      <a:t>Linear(32, 32)</a:t>
-                    </a:r>
-                    <a:endParaRPr kumimoji="0" lang="en-US" sz="1800" b="1" i="0" u="none" strike="noStrike" cap="none" normalizeH="0" baseline="0" dirty="0">
-                      <a:ln>
-                        <a:noFill/>
-                      </a:ln>
-                      <a:effectLst/>
-                      <a:latin typeface="Times New Roman" pitchFamily="-65" charset="0"/>
-                    </a:endParaRPr>
-                  </a:p>
-                </p:txBody>
-              </p:sp>
-              <p:sp>
-                <p:nvSpPr>
-                  <p:cNvPr id="18" name="Rectangle 17">
-                    <a:extLst>
-                      <a:ext uri="{FF2B5EF4-FFF2-40B4-BE49-F238E27FC236}">
-                        <a16:creationId xmlns:a16="http://schemas.microsoft.com/office/drawing/2014/main" id="{EFFAEA6F-9CE2-89CC-69DF-FFD3750F6169}"/>
-                      </a:ext>
-                    </a:extLst>
-                  </p:cNvPr>
-                  <p:cNvSpPr/>
-                  <p:nvPr/>
-                </p:nvSpPr>
-                <p:spPr bwMode="auto">
-                  <a:xfrm>
-                    <a:off x="5410200" y="4620220"/>
-                    <a:ext cx="2286000" cy="516235"/>
-                  </a:xfrm>
-                  <a:prstGeom prst="rect">
-                    <a:avLst/>
-                  </a:prstGeom>
-                  <a:solidFill>
-                    <a:schemeClr val="accent1">
-                      <a:lumMod val="40000"/>
-                      <a:lumOff val="60000"/>
-                    </a:schemeClr>
-                  </a:solidFill>
-                  <a:ln w="12700" cap="flat" cmpd="sng" algn="ctr">
-                    <a:noFill/>
-                    <a:prstDash val="solid"/>
-                    <a:round/>
-                    <a:headEnd type="none" w="med" len="med"/>
-                    <a:tailEnd type="none" w="med" len="med"/>
-                  </a:ln>
-                  <a:effectLst>
-                    <a:outerShdw blurRad="50800" dist="38100" dir="2700000" algn="tl" rotWithShape="0">
-                      <a:prstClr val="black">
-                        <a:alpha val="40000"/>
-                      </a:prstClr>
-                    </a:outerShdw>
-                  </a:effectLst>
-                </p:spPr>
-                <p:txBody>
-                  <a:bodyPr vert="horz" wrap="square" lIns="91440" tIns="45720" rIns="91440" bIns="45720" numCol="1" rtlCol="0" anchor="t" anchorCtr="0" compatLnSpc="1">
-                    <a:prstTxWarp prst="textNoShape">
-                      <a:avLst/>
-                    </a:prstTxWarp>
-                    <a:spAutoFit/>
-                  </a:bodyPr>
-                  <a:lstStyle/>
-                  <a:p>
-                    <a:pPr marL="0" marR="0" indent="0" algn="ctr" defTabSz="914400" rtl="0" eaLnBrk="0" fontAlgn="base" latinLnBrk="0" hangingPunct="0">
-                      <a:lnSpc>
-                        <a:spcPct val="100000"/>
-                      </a:lnSpc>
-                      <a:spcBef>
-                        <a:spcPct val="0"/>
-                      </a:spcBef>
-                      <a:spcAft>
-                        <a:spcPct val="0"/>
-                      </a:spcAft>
-                      <a:buClrTx/>
-                      <a:buSzTx/>
-                      <a:buFontTx/>
-                      <a:buNone/>
-                      <a:tabLst/>
-                    </a:pPr>
-                    <a:r>
-                      <a:rPr lang="en-US" sz="1800" dirty="0" err="1">
-                        <a:latin typeface="Times New Roman" pitchFamily="-65" charset="0"/>
-                      </a:rPr>
-                      <a:t>SiLU</a:t>
-                    </a:r>
-                    <a:r>
-                      <a:rPr lang="en-US" sz="1800" dirty="0">
-                        <a:latin typeface="Times New Roman" pitchFamily="-65" charset="0"/>
-                      </a:rPr>
-                      <a:t>()</a:t>
-                    </a:r>
-                    <a:endParaRPr kumimoji="0" lang="en-US" sz="1800" b="0" i="0" u="none" strike="noStrike" cap="none" normalizeH="0" baseline="0" dirty="0">
-                      <a:ln>
-                        <a:noFill/>
-                      </a:ln>
-                      <a:solidFill>
-                        <a:schemeClr val="tx1"/>
-                      </a:solidFill>
-                      <a:effectLst/>
-                      <a:latin typeface="Times New Roman" pitchFamily="-65" charset="0"/>
-                    </a:endParaRPr>
-                  </a:p>
-                </p:txBody>
-              </p:sp>
-            </p:grpSp>
-            <p:cxnSp>
-              <p:nvCxnSpPr>
-                <p:cNvPr id="16" name="Straight Arrow Connector 15">
-                  <a:extLst>
-                    <a:ext uri="{FF2B5EF4-FFF2-40B4-BE49-F238E27FC236}">
-                      <a16:creationId xmlns:a16="http://schemas.microsoft.com/office/drawing/2014/main" id="{108FA911-A9CF-5948-1C1B-65E56BD4B9A7}"/>
-                    </a:ext>
-                  </a:extLst>
-                </p:cNvPr>
-                <p:cNvCxnSpPr>
-                  <a:cxnSpLocks/>
-                </p:cNvCxnSpPr>
-                <p:nvPr/>
-              </p:nvCxnSpPr>
-              <p:spPr bwMode="auto">
-                <a:xfrm flipV="1">
-                  <a:off x="3200400" y="4748504"/>
-                  <a:ext cx="0" cy="356896"/>
-                </a:xfrm>
-                <a:prstGeom prst="straightConnector1">
-                  <a:avLst/>
-                </a:prstGeom>
-                <a:noFill/>
-                <a:ln w="66675" cap="flat" cmpd="sng" algn="ctr">
-                  <a:solidFill>
-                    <a:schemeClr val="tx1"/>
-                  </a:solidFill>
-                  <a:prstDash val="solid"/>
-                  <a:round/>
-                  <a:headEnd type="none" w="med" len="med"/>
-                  <a:tailEnd type="triangle"/>
-                </a:ln>
-                <a:effectLst/>
-              </p:spPr>
-            </p:cxnSp>
-          </p:grpSp>
-          <mc:AlternateContent xmlns:mc="http://schemas.openxmlformats.org/markup-compatibility/2006" xmlns:a14="http://schemas.microsoft.com/office/drawing/2010/main">
-            <mc:Choice Requires="a14">
-              <p:sp>
-                <p:nvSpPr>
-                  <p:cNvPr id="14" name="TextBox 13">
-                    <a:extLst>
-                      <a:ext uri="{FF2B5EF4-FFF2-40B4-BE49-F238E27FC236}">
-                        <a16:creationId xmlns:a16="http://schemas.microsoft.com/office/drawing/2014/main" id="{E32ECCC2-D45C-BF1D-0C80-3EA5BA51B5E3}"/>
-                      </a:ext>
-                    </a:extLst>
-                  </p:cNvPr>
-                  <p:cNvSpPr txBox="1"/>
-                  <p:nvPr/>
-                </p:nvSpPr>
-                <p:spPr>
-                  <a:xfrm>
-                    <a:off x="6324600" y="3541124"/>
-                    <a:ext cx="718466" cy="461665"/>
-                  </a:xfrm>
-                  <a:prstGeom prst="rect">
-                    <a:avLst/>
-                  </a:prstGeom>
-                  <a:noFill/>
-                </p:spPr>
-                <p:txBody>
-                  <a:bodyPr wrap="none" rtlCol="0">
-                    <a:spAutoFit/>
-                  </a:bodyPr>
-                  <a:lstStyle/>
-                  <a:p>
-                    <a:pPr/>
-                    <a14:m>
-                      <m:oMathPara xmlns:m="http://schemas.openxmlformats.org/officeDocument/2006/math">
-                        <m:oMathParaPr>
-                          <m:jc m:val="centerGroup"/>
-                        </m:oMathParaPr>
-                        <m:oMath xmlns:m="http://schemas.openxmlformats.org/officeDocument/2006/math">
-                          <m:r>
-                            <a:rPr lang="en-US" i="1" smtClean="0">
-                              <a:latin typeface="Cambria Math" panose="02040503050406030204" pitchFamily="18" charset="0"/>
-                              <a:ea typeface="Cambria Math" panose="02040503050406030204" pitchFamily="18" charset="0"/>
-                            </a:rPr>
-                            <m:t>×</m:t>
-                          </m:r>
-                          <m:r>
-                            <a:rPr lang="en-US" b="0" i="1" smtClean="0">
-                              <a:latin typeface="Cambria Math" panose="02040503050406030204" pitchFamily="18" charset="0"/>
-                              <a:ea typeface="Cambria Math" panose="02040503050406030204" pitchFamily="18" charset="0"/>
-                            </a:rPr>
-                            <m:t> 4</m:t>
-                          </m:r>
-                        </m:oMath>
-                      </m:oMathPara>
-                    </a14:m>
-                    <a:endParaRPr lang="en-US" dirty="0"/>
-                  </a:p>
-                </p:txBody>
-              </p:sp>
-            </mc:Choice>
-            <mc:Fallback xmlns="">
-              <p:sp>
-                <p:nvSpPr>
-                  <p:cNvPr id="39" name="TextBox 38">
-                    <a:extLst>
-                      <a:ext uri="{FF2B5EF4-FFF2-40B4-BE49-F238E27FC236}">
-                        <a16:creationId xmlns:a16="http://schemas.microsoft.com/office/drawing/2014/main" id="{E1091CDD-C32A-2866-B688-7283EAAC667A}"/>
-                      </a:ext>
-                    </a:extLst>
-                  </p:cNvPr>
-                  <p:cNvSpPr txBox="1">
-                    <a:spLocks noRot="1" noChangeAspect="1" noMove="1" noResize="1" noEditPoints="1" noAdjustHandles="1" noChangeArrowheads="1" noChangeShapeType="1" noTextEdit="1"/>
-                  </p:cNvSpPr>
-                  <p:nvPr/>
-                </p:nvSpPr>
-                <p:spPr>
-                  <a:xfrm>
-                    <a:off x="6324600" y="3541124"/>
-                    <a:ext cx="718466" cy="461665"/>
-                  </a:xfrm>
-                  <a:prstGeom prst="rect">
-                    <a:avLst/>
-                  </a:prstGeom>
-                  <a:blipFill>
-                    <a:blip r:embed="rId4"/>
-                    <a:stretch>
-                      <a:fillRect b="-21622"/>
-                    </a:stretch>
-                  </a:blipFill>
-                </p:spPr>
-                <p:txBody>
-                  <a:bodyPr/>
-                  <a:lstStyle/>
-                  <a:p>
-                    <a:r>
-                      <a:rPr lang="en-US">
-                        <a:noFill/>
-                      </a:rPr>
-                      <a:t> </a:t>
-                    </a:r>
-                  </a:p>
-                </p:txBody>
-              </p:sp>
-            </mc:Fallback>
-          </mc:AlternateContent>
-        </p:grpSp>
-        <mc:AlternateContent xmlns:mc="http://schemas.openxmlformats.org/markup-compatibility/2006" xmlns:a14="http://schemas.microsoft.com/office/drawing/2010/main">
-          <mc:Choice Requires="a14">
-            <p:sp>
-              <p:nvSpPr>
-                <p:cNvPr id="12" name="TextBox 11">
-                  <a:extLst>
-                    <a:ext uri="{FF2B5EF4-FFF2-40B4-BE49-F238E27FC236}">
-                      <a16:creationId xmlns:a16="http://schemas.microsoft.com/office/drawing/2014/main" id="{FD3ECA9C-E9DC-372E-D957-16DD5CAD9B83}"/>
-                    </a:ext>
-                  </a:extLst>
-                </p:cNvPr>
-                <p:cNvSpPr txBox="1"/>
-                <p:nvPr/>
-              </p:nvSpPr>
-              <p:spPr>
-                <a:xfrm flipH="1">
-                  <a:off x="4870269" y="1962346"/>
-                  <a:ext cx="1244962" cy="523220"/>
-                </a:xfrm>
-                <a:prstGeom prst="rect">
-                  <a:avLst/>
-                </a:prstGeom>
-                <a:noFill/>
-              </p:spPr>
-              <p:txBody>
-                <a:bodyPr wrap="square" rtlCol="0">
-                  <a:spAutoFit/>
-                </a:bodyPr>
-                <a:lstStyle/>
-                <a:p>
-                  <a:pPr/>
-                  <a14:m>
-                    <m:oMathPara xmlns:m="http://schemas.openxmlformats.org/officeDocument/2006/math">
-                      <m:oMathParaPr>
-                        <m:jc m:val="centerGroup"/>
-                      </m:oMathParaPr>
-                      <m:oMath xmlns:m="http://schemas.openxmlformats.org/officeDocument/2006/math">
-                        <m:r>
-                          <a:rPr lang="en-US" sz="2800" b="0" i="1" smtClean="0">
-                            <a:latin typeface="Cambria Math" panose="02040503050406030204" pitchFamily="18" charset="0"/>
-                          </a:rPr>
-                          <m:t>𝑓</m:t>
-                        </m:r>
-                        <m:d>
-                          <m:dPr>
-                            <m:ctrlPr>
-                              <a:rPr lang="en-US" sz="2800" b="0" i="1" smtClean="0">
-                                <a:latin typeface="Cambria Math" panose="02040503050406030204" pitchFamily="18" charset="0"/>
-                              </a:rPr>
-                            </m:ctrlPr>
-                          </m:dPr>
-                          <m:e>
-                            <m:r>
-                              <a:rPr lang="en-US" sz="2800" b="0" i="1" smtClean="0">
-                                <a:latin typeface="Cambria Math" panose="02040503050406030204" pitchFamily="18" charset="0"/>
-                              </a:rPr>
-                              <m:t>𝑝</m:t>
-                            </m:r>
-                            <m:r>
-                              <a:rPr lang="en-US" sz="2800" b="0" i="1" smtClean="0">
-                                <a:latin typeface="Cambria Math" panose="02040503050406030204" pitchFamily="18" charset="0"/>
-                              </a:rPr>
-                              <m:t>,</m:t>
-                            </m:r>
-                            <m:r>
-                              <a:rPr lang="en-US" sz="2800" b="0" i="1" smtClean="0">
-                                <a:latin typeface="Cambria Math" panose="02040503050406030204" pitchFamily="18" charset="0"/>
-                              </a:rPr>
-                              <m:t>𝜃</m:t>
-                            </m:r>
-                          </m:e>
-                        </m:d>
-                      </m:oMath>
-                    </m:oMathPara>
-                  </a14:m>
-                  <a:endParaRPr lang="en-US" sz="2800" dirty="0"/>
-                </a:p>
-              </p:txBody>
-            </p:sp>
-          </mc:Choice>
-          <mc:Fallback xmlns="">
-            <p:sp>
-              <p:nvSpPr>
-                <p:cNvPr id="42" name="TextBox 41">
-                  <a:extLst>
-                    <a:ext uri="{FF2B5EF4-FFF2-40B4-BE49-F238E27FC236}">
-                      <a16:creationId xmlns:a16="http://schemas.microsoft.com/office/drawing/2014/main" id="{12637F75-FE10-FC46-20DB-772C41A898CA}"/>
-                    </a:ext>
-                  </a:extLst>
-                </p:cNvPr>
-                <p:cNvSpPr txBox="1">
-                  <a:spLocks noRot="1" noChangeAspect="1" noMove="1" noResize="1" noEditPoints="1" noAdjustHandles="1" noChangeArrowheads="1" noChangeShapeType="1" noTextEdit="1"/>
-                </p:cNvSpPr>
-                <p:nvPr/>
-              </p:nvSpPr>
-              <p:spPr>
-                <a:xfrm flipH="1">
-                  <a:off x="4870269" y="1962346"/>
-                  <a:ext cx="1244962" cy="523220"/>
-                </a:xfrm>
-                <a:prstGeom prst="rect">
-                  <a:avLst/>
-                </a:prstGeom>
-                <a:blipFill>
-                  <a:blip r:embed="rId5"/>
-                  <a:stretch>
-                    <a:fillRect l="-3883" b="-19048"/>
-                  </a:stretch>
-                </a:blipFill>
-              </p:spPr>
-              <p:txBody>
-                <a:bodyPr/>
-                <a:lstStyle/>
-                <a:p>
-                  <a:r>
-                    <a:rPr lang="en-US">
-                      <a:noFill/>
-                    </a:rPr>
-                    <a:t> </a:t>
-                  </a:r>
-                </a:p>
-              </p:txBody>
-            </p:sp>
-          </mc:Fallback>
-        </mc:AlternateContent>
-      </p:grpSp>
-    </p:spTree>
-    <p:extLst>
-      <p:ext uri="{BB962C8B-B14F-4D97-AF65-F5344CB8AC3E}">
-        <p14:creationId xmlns:p14="http://schemas.microsoft.com/office/powerpoint/2010/main" val="4117127875"/>
-      </p:ext>
-    </p:extLst>
-  </p:cSld>
-  <p:clrMapOvr>
-    <a:masterClrMapping/>
-  </p:clrMapOvr>
-  <mc:AlternateContent xmlns:mc="http://schemas.openxmlformats.org/markup-compatibility/2006" xmlns:p14="http://schemas.microsoft.com/office/powerpoint/2010/main">
-    <mc:Choice Requires="p14">
-      <p:transition spd="med" p14:dur="700">
-        <p:fade/>
-      </p:transition>
-    </mc:Choice>
-    <mc:Fallback xmlns="">
-      <p:transition spd="med">
-        <p:fade/>
-      </p:transition>
-    </mc:Fallback>
-  </mc:AlternateContent>
-</p:sld>
-</file>
-
-<file path=ppt/slides/slide18.xml><?xml version="1.0" encoding="utf-8"?>
-<p:sld xmlns:a="http://schemas.openxmlformats.org/drawingml/2006/main" xmlns:r="http://schemas.openxmlformats.org/officeDocument/2006/relationships" xmlns:p="http://schemas.openxmlformats.org/presentationml/2006/main">
-  <p:cSld>
-    <p:spTree>
-      <p:nvGrpSpPr>
-        <p:cNvPr id="1" name="">
-          <a:extLst>
-            <a:ext uri="{FF2B5EF4-FFF2-40B4-BE49-F238E27FC236}">
-              <a16:creationId xmlns:a16="http://schemas.microsoft.com/office/drawing/2014/main" id="{B688F8CD-B96E-25CC-BCC6-7515E1663DF8}"/>
-            </a:ext>
-          </a:extLst>
-        </p:cNvPr>
-        <p:cNvGrpSpPr/>
-        <p:nvPr/>
-      </p:nvGrpSpPr>
-      <p:grpSpPr>
-        <a:xfrm>
-          <a:off x="0" y="0"/>
-          <a:ext cx="0" cy="0"/>
-          <a:chOff x="0" y="0"/>
-          <a:chExt cx="0" cy="0"/>
-        </a:xfrm>
-      </p:grpSpPr>
-      <p:sp>
-        <p:nvSpPr>
-          <p:cNvPr id="7" name="Title 6">
-            <a:extLst>
-              <a:ext uri="{FF2B5EF4-FFF2-40B4-BE49-F238E27FC236}">
-                <a16:creationId xmlns:a16="http://schemas.microsoft.com/office/drawing/2014/main" id="{C09C4414-58DE-EAAF-F50A-0788C9AEAEB9}"/>
-              </a:ext>
-            </a:extLst>
-          </p:cNvPr>
-          <p:cNvSpPr>
-            <a:spLocks noGrp="1"/>
-          </p:cNvSpPr>
-          <p:nvPr>
-            <p:ph type="title"/>
-          </p:nvPr>
-        </p:nvSpPr>
-        <p:spPr/>
-        <p:txBody>
-          <a:bodyPr/>
-          <a:lstStyle/>
-          <a:p>
-            <a:r>
-              <a:rPr lang="en-US" dirty="0"/>
-              <a:t>PINNs: </a:t>
-            </a:r>
-            <a:r>
-              <a:rPr lang="en-US" dirty="0">
-                <a:solidFill>
-                  <a:schemeClr val="accent1"/>
-                </a:solidFill>
-              </a:rPr>
-              <a:t>Results</a:t>
-            </a:r>
-          </a:p>
-        </p:txBody>
-      </p:sp>
-      <mc:AlternateContent xmlns:mc="http://schemas.openxmlformats.org/markup-compatibility/2006" xmlns:a14="http://schemas.microsoft.com/office/drawing/2010/main">
-        <mc:Choice Requires="a14">
-          <p:sp>
-            <p:nvSpPr>
-              <p:cNvPr id="8" name="Content Placeholder 7">
-                <a:extLst>
-                  <a:ext uri="{FF2B5EF4-FFF2-40B4-BE49-F238E27FC236}">
-                    <a16:creationId xmlns:a16="http://schemas.microsoft.com/office/drawing/2014/main" id="{7082FA51-447D-2E4A-4D40-4D5C598B4782}"/>
-                  </a:ext>
-                </a:extLst>
-              </p:cNvPr>
-              <p:cNvSpPr>
-                <a:spLocks noGrp="1"/>
-              </p:cNvSpPr>
-              <p:nvPr>
-                <p:ph idx="1"/>
-              </p:nvPr>
-            </p:nvSpPr>
-            <p:spPr>
-              <a:xfrm>
-                <a:off x="711200" y="1295400"/>
-                <a:ext cx="7772400" cy="4819650"/>
-              </a:xfrm>
-            </p:spPr>
-            <p:txBody>
-              <a:bodyPr/>
-              <a:lstStyle/>
-              <a:p>
-                <a:pPr marL="0" indent="0">
-                  <a:buNone/>
-                </a:pPr>
-                <a:r>
-                  <a:rPr lang="en-US" dirty="0"/>
-                  <a:t>Comparisons of PINN results with exact solution for a random collection of points </a:t>
-                </a:r>
-                <a14:m>
-                  <m:oMath xmlns:m="http://schemas.openxmlformats.org/officeDocument/2006/math">
-                    <m:d>
-                      <m:dPr>
-                        <m:ctrlPr>
-                          <a:rPr lang="en-US" i="1" smtClean="0">
-                            <a:solidFill>
-                              <a:srgbClr val="0033CC"/>
-                            </a:solidFill>
-                            <a:latin typeface="Cambria Math" panose="02040503050406030204" pitchFamily="18" charset="0"/>
-                          </a:rPr>
-                        </m:ctrlPr>
-                      </m:dPr>
-                      <m:e>
-                        <m:sSub>
-                          <m:sSubPr>
-                            <m:ctrlPr>
-                              <a:rPr lang="en-US" b="0" i="1" smtClean="0">
-                                <a:solidFill>
-                                  <a:srgbClr val="0033CC"/>
-                                </a:solidFill>
-                                <a:latin typeface="Cambria Math" panose="02040503050406030204" pitchFamily="18" charset="0"/>
-                              </a:rPr>
-                            </m:ctrlPr>
-                          </m:sSubPr>
-                          <m:e>
-                            <m:r>
-                              <a:rPr lang="en-US" b="0" i="1" smtClean="0">
-                                <a:solidFill>
-                                  <a:srgbClr val="0033CC"/>
-                                </a:solidFill>
-                                <a:latin typeface="Cambria Math" panose="02040503050406030204" pitchFamily="18" charset="0"/>
-                              </a:rPr>
-                              <m:t>𝑥</m:t>
-                            </m:r>
-                          </m:e>
-                          <m:sub>
-                            <m:r>
-                              <a:rPr lang="en-US" b="0" i="1" smtClean="0">
-                                <a:solidFill>
-                                  <a:srgbClr val="0033CC"/>
-                                </a:solidFill>
-                                <a:latin typeface="Cambria Math" panose="02040503050406030204" pitchFamily="18" charset="0"/>
-                              </a:rPr>
-                              <m:t>0</m:t>
-                            </m:r>
-                          </m:sub>
-                        </m:sSub>
-                        <m:r>
-                          <a:rPr lang="en-US" b="0" i="1" smtClean="0">
-                            <a:solidFill>
-                              <a:srgbClr val="0033CC"/>
-                            </a:solidFill>
-                            <a:latin typeface="Cambria Math" panose="02040503050406030204" pitchFamily="18" charset="0"/>
-                          </a:rPr>
-                          <m:t>, </m:t>
-                        </m:r>
-                        <m:sSub>
-                          <m:sSubPr>
-                            <m:ctrlPr>
-                              <a:rPr lang="en-US" b="0" i="1" smtClean="0">
-                                <a:solidFill>
-                                  <a:srgbClr val="0033CC"/>
-                                </a:solidFill>
-                                <a:latin typeface="Cambria Math" panose="02040503050406030204" pitchFamily="18" charset="0"/>
-                              </a:rPr>
-                            </m:ctrlPr>
-                          </m:sSubPr>
-                          <m:e>
-                            <m:r>
-                              <a:rPr lang="en-US" b="0" i="1" smtClean="0">
-                                <a:solidFill>
-                                  <a:srgbClr val="0033CC"/>
-                                </a:solidFill>
-                                <a:latin typeface="Cambria Math" panose="02040503050406030204" pitchFamily="18" charset="0"/>
-                              </a:rPr>
-                              <m:t>𝑣</m:t>
-                            </m:r>
-                          </m:e>
-                          <m:sub>
-                            <m:r>
-                              <a:rPr lang="en-US" b="0" i="1" smtClean="0">
-                                <a:solidFill>
-                                  <a:srgbClr val="0033CC"/>
-                                </a:solidFill>
-                                <a:latin typeface="Cambria Math" panose="02040503050406030204" pitchFamily="18" charset="0"/>
-                              </a:rPr>
-                              <m:t>0</m:t>
-                            </m:r>
-                          </m:sub>
-                        </m:sSub>
-                        <m:r>
-                          <a:rPr lang="en-US" b="0" i="1" smtClean="0">
-                            <a:solidFill>
-                              <a:srgbClr val="0033CC"/>
-                            </a:solidFill>
-                            <a:latin typeface="Cambria Math" panose="02040503050406030204" pitchFamily="18" charset="0"/>
-                          </a:rPr>
-                          <m:t>, </m:t>
-                        </m:r>
-                        <m:r>
-                          <a:rPr lang="en-US" b="0" i="1" smtClean="0">
-                            <a:solidFill>
-                              <a:srgbClr val="0033CC"/>
-                            </a:solidFill>
-                            <a:latin typeface="Cambria Math" panose="02040503050406030204" pitchFamily="18" charset="0"/>
-                          </a:rPr>
-                          <m:t>𝜁</m:t>
-                        </m:r>
-                      </m:e>
-                    </m:d>
-                  </m:oMath>
-                </a14:m>
-                <a:r>
-                  <a:rPr lang="en-US" dirty="0"/>
-                  <a:t>.</a:t>
-                </a:r>
-              </a:p>
-              <a:p>
-                <a:pPr marL="0" indent="0">
-                  <a:buNone/>
-                </a:pPr>
-                <a:endParaRPr lang="en-US" dirty="0"/>
-              </a:p>
-            </p:txBody>
-          </p:sp>
-        </mc:Choice>
-        <mc:Fallback xmlns="">
-          <p:sp>
-            <p:nvSpPr>
-              <p:cNvPr id="8" name="Content Placeholder 7">
-                <a:extLst>
-                  <a:ext uri="{FF2B5EF4-FFF2-40B4-BE49-F238E27FC236}">
-                    <a16:creationId xmlns:a16="http://schemas.microsoft.com/office/drawing/2014/main" id="{7082FA51-447D-2E4A-4D40-4D5C598B4782}"/>
-                  </a:ext>
-                </a:extLst>
-              </p:cNvPr>
-              <p:cNvSpPr>
-                <a:spLocks noGrp="1" noRot="1" noChangeAspect="1" noMove="1" noResize="1" noEditPoints="1" noAdjustHandles="1" noChangeArrowheads="1" noChangeShapeType="1" noTextEdit="1"/>
-              </p:cNvSpPr>
-              <p:nvPr>
-                <p:ph idx="1"/>
-              </p:nvPr>
-            </p:nvSpPr>
-            <p:spPr>
-              <a:xfrm>
-                <a:off x="711200" y="1295400"/>
-                <a:ext cx="7772400" cy="4819650"/>
-              </a:xfrm>
-              <a:blipFill>
-                <a:blip r:embed="rId2"/>
-                <a:stretch>
-                  <a:fillRect l="-1305" t="-1316"/>
-                </a:stretch>
-              </a:blipFill>
-            </p:spPr>
-            <p:txBody>
-              <a:bodyPr/>
-              <a:lstStyle/>
-              <a:p>
-                <a:r>
-                  <a:rPr lang="en-US">
-                    <a:noFill/>
-                  </a:rPr>
-                  <a:t> </a:t>
-                </a:r>
-              </a:p>
-            </p:txBody>
-          </p:sp>
-        </mc:Fallback>
-      </mc:AlternateContent>
-      <p:pic>
-        <p:nvPicPr>
-          <p:cNvPr id="11" name="Picture 10" descr="A graph of a function&#10;&#10;Description automatically generated with medium confidence">
-            <a:extLst>
-              <a:ext uri="{FF2B5EF4-FFF2-40B4-BE49-F238E27FC236}">
-                <a16:creationId xmlns:a16="http://schemas.microsoft.com/office/drawing/2014/main" id="{05E99D40-8019-733E-B5EB-7B5AFB2024AB}"/>
-              </a:ext>
-            </a:extLst>
-          </p:cNvPr>
-          <p:cNvPicPr>
-            <a:picLocks noChangeAspect="1"/>
-          </p:cNvPicPr>
-          <p:nvPr/>
-        </p:nvPicPr>
-        <p:blipFill>
-          <a:blip r:embed="rId3"/>
-          <a:stretch>
-            <a:fillRect/>
-          </a:stretch>
-        </p:blipFill>
-        <p:spPr>
-          <a:xfrm>
-            <a:off x="3581400" y="2114550"/>
-            <a:ext cx="5410200" cy="4057650"/>
-          </a:xfrm>
-          <a:prstGeom prst="rect">
-            <a:avLst/>
-          </a:prstGeom>
-          <a:effectLst>
-            <a:outerShdw blurRad="50800" dist="38100" dir="2700000" algn="tl" rotWithShape="0">
-              <a:prstClr val="black">
-                <a:alpha val="40000"/>
-              </a:prstClr>
-            </a:outerShdw>
-          </a:effectLst>
-        </p:spPr>
-      </p:pic>
-      <p:pic>
-        <p:nvPicPr>
-          <p:cNvPr id="15" name="Picture 14" descr="A graph with a blue line&#10;&#10;Description automatically generated">
-            <a:extLst>
-              <a:ext uri="{FF2B5EF4-FFF2-40B4-BE49-F238E27FC236}">
-                <a16:creationId xmlns:a16="http://schemas.microsoft.com/office/drawing/2014/main" id="{C2FD34F8-6CA7-0F78-2C21-148D76A6B815}"/>
-              </a:ext>
-            </a:extLst>
-          </p:cNvPr>
-          <p:cNvPicPr>
-            <a:picLocks noChangeAspect="1"/>
-          </p:cNvPicPr>
-          <p:nvPr/>
-        </p:nvPicPr>
-        <p:blipFill>
-          <a:blip r:embed="rId4"/>
-          <a:stretch>
-            <a:fillRect/>
-          </a:stretch>
-        </p:blipFill>
-        <p:spPr>
-          <a:xfrm>
-            <a:off x="221445" y="2227091"/>
-            <a:ext cx="3605727" cy="2403818"/>
-          </a:xfrm>
-          <a:prstGeom prst="rect">
-            <a:avLst/>
-          </a:prstGeom>
-          <a:effectLst>
-            <a:outerShdw blurRad="50800" dist="38100" dir="2700000" algn="tl" rotWithShape="0">
-              <a:prstClr val="black">
-                <a:alpha val="40000"/>
-              </a:prstClr>
-            </a:outerShdw>
-          </a:effectLst>
-        </p:spPr>
-      </p:pic>
-      <mc:AlternateContent xmlns:mc="http://schemas.openxmlformats.org/markup-compatibility/2006" xmlns:a14="http://schemas.microsoft.com/office/drawing/2010/main">
-        <mc:Choice Requires="a14">
-          <p:sp>
-            <p:nvSpPr>
-              <p:cNvPr id="2" name="TextBox 1">
-                <a:extLst>
-                  <a:ext uri="{FF2B5EF4-FFF2-40B4-BE49-F238E27FC236}">
-                    <a16:creationId xmlns:a16="http://schemas.microsoft.com/office/drawing/2014/main" id="{F7043E5D-9FA2-4E1C-347F-D90B09F42970}"/>
-                  </a:ext>
-                </a:extLst>
-              </p:cNvPr>
-              <p:cNvSpPr txBox="1"/>
-              <p:nvPr/>
-            </p:nvSpPr>
-            <p:spPr>
-              <a:xfrm>
-                <a:off x="350997" y="5802868"/>
-                <a:ext cx="3346622" cy="369332"/>
-              </a:xfrm>
-              <a:prstGeom prst="rect">
-                <a:avLst/>
-              </a:prstGeom>
-              <a:noFill/>
-            </p:spPr>
-            <p:txBody>
-              <a:bodyPr wrap="none" rtlCol="0">
-                <a:spAutoFit/>
-              </a:bodyPr>
-              <a:lstStyle/>
-              <a:p>
-                <a:r>
-                  <a:rPr lang="en-US" sz="1800" dirty="0"/>
-                  <a:t>Note: </a:t>
-                </a:r>
-                <a14:m>
-                  <m:oMath xmlns:m="http://schemas.openxmlformats.org/officeDocument/2006/math">
-                    <m:sSub>
-                      <m:sSubPr>
-                        <m:ctrlPr>
-                          <a:rPr lang="en-US" sz="1800" b="0" i="1" smtClean="0">
-                            <a:latin typeface="Cambria Math" panose="02040503050406030204" pitchFamily="18" charset="0"/>
-                          </a:rPr>
-                        </m:ctrlPr>
-                      </m:sSubPr>
-                      <m:e>
-                        <m:r>
-                          <a:rPr lang="en-US" sz="1800" b="0" i="1" smtClean="0">
-                            <a:latin typeface="Cambria Math" panose="02040503050406030204" pitchFamily="18" charset="0"/>
-                          </a:rPr>
-                          <m:t>𝑢</m:t>
-                        </m:r>
-                      </m:e>
-                      <m:sub>
-                        <m:r>
-                          <a:rPr lang="en-US" sz="1800" b="0" i="1" smtClean="0">
-                            <a:latin typeface="Cambria Math" panose="02040503050406030204" pitchFamily="18" charset="0"/>
-                          </a:rPr>
-                          <m:t>0</m:t>
-                        </m:r>
-                      </m:sub>
-                    </m:sSub>
-                    <m:r>
-                      <a:rPr lang="en-US" sz="1800" b="0" i="1" smtClean="0">
-                        <a:latin typeface="Cambria Math" panose="02040503050406030204" pitchFamily="18" charset="0"/>
-                      </a:rPr>
-                      <m:t>≡</m:t>
-                    </m:r>
-                    <m:sSub>
-                      <m:sSubPr>
-                        <m:ctrlPr>
-                          <a:rPr lang="en-US" sz="1800" b="0" i="1" smtClean="0">
-                            <a:latin typeface="Cambria Math" panose="02040503050406030204" pitchFamily="18" charset="0"/>
-                          </a:rPr>
-                        </m:ctrlPr>
-                      </m:sSubPr>
-                      <m:e>
-                        <m:r>
-                          <a:rPr lang="en-US" sz="1800" b="0" i="1" smtClean="0">
-                            <a:latin typeface="Cambria Math" panose="02040503050406030204" pitchFamily="18" charset="0"/>
-                          </a:rPr>
-                          <m:t>𝑥</m:t>
-                        </m:r>
-                      </m:e>
-                      <m:sub>
-                        <m:r>
-                          <a:rPr lang="en-US" sz="1800" b="0" i="1" smtClean="0">
-                            <a:latin typeface="Cambria Math" panose="02040503050406030204" pitchFamily="18" charset="0"/>
-                          </a:rPr>
-                          <m:t>0</m:t>
-                        </m:r>
-                      </m:sub>
-                    </m:sSub>
-                  </m:oMath>
-                </a14:m>
-                <a:r>
-                  <a:rPr lang="en-US" sz="1800" dirty="0"/>
-                  <a:t>, </a:t>
-                </a:r>
-                <a14:m>
-                  <m:oMath xmlns:m="http://schemas.openxmlformats.org/officeDocument/2006/math">
-                    <m:r>
-                      <a:rPr lang="en-US" sz="1800" b="0" i="1" smtClean="0">
-                        <a:latin typeface="Cambria Math" panose="02040503050406030204" pitchFamily="18" charset="0"/>
-                      </a:rPr>
-                      <m:t>𝛼</m:t>
-                    </m:r>
-                    <m:r>
-                      <a:rPr lang="en-US" sz="1800" b="0" i="1" smtClean="0">
-                        <a:latin typeface="Cambria Math" panose="02040503050406030204" pitchFamily="18" charset="0"/>
-                      </a:rPr>
-                      <m:t>=</m:t>
-                    </m:r>
-                    <m:r>
-                      <a:rPr lang="en-US" sz="1800" b="0" i="1" smtClean="0">
-                        <a:latin typeface="Cambria Math" panose="02040503050406030204" pitchFamily="18" charset="0"/>
-                      </a:rPr>
-                      <m:t>𝜁</m:t>
-                    </m:r>
-                  </m:oMath>
-                </a14:m>
-                <a:r>
-                  <a:rPr lang="en-US" sz="1800" dirty="0"/>
-                  <a:t> in the plots </a:t>
-                </a:r>
-              </a:p>
-            </p:txBody>
-          </p:sp>
-        </mc:Choice>
-        <mc:Fallback xmlns="">
-          <p:sp>
-            <p:nvSpPr>
-              <p:cNvPr id="2" name="TextBox 1">
-                <a:extLst>
-                  <a:ext uri="{FF2B5EF4-FFF2-40B4-BE49-F238E27FC236}">
-                    <a16:creationId xmlns:a16="http://schemas.microsoft.com/office/drawing/2014/main" id="{F7043E5D-9FA2-4E1C-347F-D90B09F42970}"/>
-                  </a:ext>
-                </a:extLst>
-              </p:cNvPr>
-              <p:cNvSpPr txBox="1">
-                <a:spLocks noRot="1" noChangeAspect="1" noMove="1" noResize="1" noEditPoints="1" noAdjustHandles="1" noChangeArrowheads="1" noChangeShapeType="1" noTextEdit="1"/>
-              </p:cNvSpPr>
-              <p:nvPr/>
-            </p:nvSpPr>
-            <p:spPr>
-              <a:xfrm>
-                <a:off x="350997" y="5802868"/>
-                <a:ext cx="3346622" cy="369332"/>
-              </a:xfrm>
-              <a:prstGeom prst="rect">
-                <a:avLst/>
-              </a:prstGeom>
-              <a:blipFill>
-                <a:blip r:embed="rId5"/>
-                <a:stretch>
-                  <a:fillRect l="-1509" t="-6452" r="-377" b="-19355"/>
-                </a:stretch>
-              </a:blipFill>
-            </p:spPr>
-            <p:txBody>
-              <a:bodyPr/>
-              <a:lstStyle/>
-              <a:p>
-                <a:r>
-                  <a:rPr lang="en-US">
-                    <a:noFill/>
-                  </a:rPr>
-                  <a:t> </a:t>
-                </a:r>
-              </a:p>
-            </p:txBody>
-          </p:sp>
-        </mc:Fallback>
-      </mc:AlternateContent>
-    </p:spTree>
-    <p:extLst>
-      <p:ext uri="{BB962C8B-B14F-4D97-AF65-F5344CB8AC3E}">
-        <p14:creationId xmlns:p14="http://schemas.microsoft.com/office/powerpoint/2010/main" val="894075603"/>
-      </p:ext>
-    </p:extLst>
-  </p:cSld>
-  <p:clrMapOvr>
-    <a:masterClrMapping/>
-  </p:clrMapOvr>
-  <mc:AlternateContent xmlns:mc="http://schemas.openxmlformats.org/markup-compatibility/2006" xmlns:p14="http://schemas.microsoft.com/office/powerpoint/2010/main">
-    <mc:Choice Requires="p14">
-      <p:transition spd="med" p14:dur="700">
-        <p:fade/>
-      </p:transition>
-    </mc:Choice>
-    <mc:Fallback xmlns="">
-      <p:transition spd="med">
-        <p:fade/>
-      </p:transition>
-    </mc:Fallback>
-  </mc:AlternateContent>
-</p:sld>
-</file>
-
-<file path=ppt/slides/slide19.xml><?xml version="1.0" encoding="utf-8"?>
+<file path=ppt/slides/slide16.xml><?xml version="1.0" encoding="utf-8"?>
 <p:sld xmlns:a="http://schemas.openxmlformats.org/drawingml/2006/main" xmlns:r="http://schemas.openxmlformats.org/officeDocument/2006/relationships" xmlns:p="http://schemas.openxmlformats.org/presentationml/2006/main">
   <p:cSld>
     <p:spTree>
@@ -10296,7 +6610,7 @@
           <a:p>
             <a:r>
               <a:rPr lang="en-US" dirty="0"/>
-              <a:t>So-called physics-informed neural networks offer a new way to solve differential equations in many scientific and engineering domains.</a:t>
+              <a:t>Physics-informed neural networks offer a new way to solve differential equations in many scientific and engineering domains.</a:t>
             </a:r>
             <a:br>
               <a:rPr lang="en-US" dirty="0"/>
@@ -10306,7 +6620,7 @@
           <a:p>
             <a:r>
               <a:rPr lang="en-US" dirty="0"/>
-              <a:t>Finding solutions with PINNs is typically more computationally demanding than with traditional numerical methods.</a:t>
+              <a:t>Finding solutions with PINNs is typically more computationally demanding than with traditional numerical methods and convergence to solutions can be difficult.</a:t>
             </a:r>
             <a:br>
               <a:rPr lang="en-US" dirty="0"/>
@@ -10316,7 +6630,15 @@
           <a:p>
             <a:r>
               <a:rPr lang="en-US" dirty="0"/>
-              <a:t>However, an infinite number of solutions can be found at the same time, each corresponding to a different set of initial/boundary conditions and problem parameters.</a:t>
+              <a:t>However, when the method </a:t>
+            </a:r>
+            <a:r>
+              <a:rPr lang="en-US"/>
+              <a:t>is successful an </a:t>
+            </a:r>
+            <a:r>
+              <a:rPr lang="en-US" dirty="0"/>
+              <a:t>infinite number of solutions can be found at the same time, each corresponding to a different set of initial/boundary conditions and problem parameters.</a:t>
             </a:r>
             <a:br>
               <a:rPr lang="en-US" dirty="0"/>
@@ -11800,7 +8122,7 @@
                         <a:rPr lang="en-US" b="0" i="1" smtClean="0">
                           <a:latin typeface="Cambria Math" panose="02040503050406030204" pitchFamily="18" charset="0"/>
                         </a:rPr>
-                        <m:t>𝑢</m:t>
+                        <m:t>𝑥</m:t>
                       </m:r>
                       <m:r>
                         <a:rPr lang="en-US" b="0" i="1" smtClean="0">
@@ -12135,10 +8457,10 @@
       </mc:AlternateContent>
       <p:pic>
         <p:nvPicPr>
-          <p:cNvPr id="3" name="Picture 2" descr="A purple background with black text&#10;&#10;Description automatically generated">
+          <p:cNvPr id="2" name="Picture 1" descr="A purple background with black text&#10;&#10;Description automatically generated">
             <a:extLst>
               <a:ext uri="{FF2B5EF4-FFF2-40B4-BE49-F238E27FC236}">
-                <a16:creationId xmlns:a16="http://schemas.microsoft.com/office/drawing/2014/main" id="{11483724-E438-2193-2392-A563E7FD3CDE}"/>
+                <a16:creationId xmlns:a16="http://schemas.microsoft.com/office/drawing/2014/main" id="{4082DD6B-6F67-A0F1-B8D1-7F01A9AE9838}"/>
               </a:ext>
             </a:extLst>
           </p:cNvPr>
@@ -12603,7 +8925,7 @@
                 </a:pPr>
                 <a:r>
                   <a:rPr lang="en-US" dirty="0"/>
-                  <a:t>Since this is a 2</a:t>
+                  <a:t>This is a 2</a:t>
                 </a:r>
                 <a:r>
                   <a:rPr lang="en-US" baseline="30000" dirty="0"/>
@@ -12611,7 +8933,7 @@
                 </a:r>
                 <a:r>
                   <a:rPr lang="en-US" dirty="0"/>
-                  <a:t> order ODE, to get a particular solution we need to specify initial conditions:</a:t>
+                  <a:t> order ODE, therefore, to get a particular solution we need to specify initial conditions:</a:t>
                 </a:r>
               </a:p>
               <a:p>
@@ -12828,7 +9150,7 @@
               <a:blipFill>
                 <a:blip r:embed="rId2"/>
                 <a:stretch>
-                  <a:fillRect l="-1305" t="-1316" b="-47105"/>
+                  <a:fillRect l="-1305" t="-1316" r="-816" b="-47105"/>
                 </a:stretch>
               </a:blipFill>
             </p:spPr>
@@ -13660,7 +9982,10 @@
                     </m:sSup>
                   </m:oMath>
                 </a14:m>
-                <a:endParaRPr lang="en-US" dirty="0"/>
+                <a:r>
+                  <a:rPr lang="en-US" dirty="0"/>
+                  <a:t>.</a:t>
+                </a:r>
               </a:p>
             </p:txBody>
           </p:sp>
@@ -13686,7 +10011,7 @@
               <a:blipFill>
                 <a:blip r:embed="rId2"/>
                 <a:stretch>
-                  <a:fillRect l="-1305" t="-1316" r="-1958" b="-1316"/>
+                  <a:fillRect l="-1305" t="-1316" r="-1958" b="-2632"/>
                 </a:stretch>
               </a:blipFill>
             </p:spPr>
@@ -13854,16 +10179,12 @@
           <a:lstStyle/>
           <a:p>
             <a:r>
-              <a:rPr lang="en-US" dirty="0"/>
-              <a:t>PINNs: </a:t>
-            </a:r>
-            <a:r>
               <a:rPr lang="en-US" dirty="0">
                 <a:solidFill>
-                  <a:schemeClr val="accent1"/>
+                  <a:srgbClr val="0033CC"/>
                 </a:solidFill>
               </a:rPr>
-              <a:t>Basic Idea</a:t>
+              <a:t>Basic Idea (1)</a:t>
             </a:r>
           </a:p>
         </p:txBody>
@@ -13886,7 +10207,12 @@
                 <p:ph idx="1"/>
               </p:nvPr>
             </p:nvSpPr>
-            <p:spPr/>
+            <p:spPr>
+              <a:xfrm>
+                <a:off x="711200" y="1295400"/>
+                <a:ext cx="7899400" cy="4819650"/>
+              </a:xfrm>
+            </p:spPr>
             <p:txBody>
               <a:bodyPr/>
               <a:lstStyle/>
@@ -13971,7 +10297,7 @@
                             </a:solidFill>
                             <a:latin typeface="Cambria Math" panose="02040503050406030204" pitchFamily="18" charset="0"/>
                           </a:rPr>
-                          <m:t>𝜃</m:t>
+                          <m:t>𝜔</m:t>
                         </m:r>
                       </m:sub>
                     </m:sSub>
@@ -14171,13 +10497,13 @@
                 <a14:m>
                   <m:oMath xmlns:m="http://schemas.openxmlformats.org/officeDocument/2006/math">
                     <m:r>
-                      <a:rPr lang="en-US" i="1">
+                      <a:rPr lang="en-US" b="0" i="1" smtClean="0">
                         <a:solidFill>
                           <a:srgbClr val="0033CC"/>
                         </a:solidFill>
                         <a:latin typeface="Cambria Math" panose="02040503050406030204" pitchFamily="18" charset="0"/>
                       </a:rPr>
-                      <m:t>𝜃</m:t>
+                      <m:t>𝜔</m:t>
                     </m:r>
                   </m:oMath>
                 </a14:m>
@@ -14197,7 +10523,7 @@
                 </a:pPr>
                 <a:r>
                   <a:rPr lang="en-US" dirty="0"/>
-                  <a:t>By minimizing an empirical risk comprising a </a:t>
+                  <a:t>By minimizing an empirical risk (aka objective, or cost, function) comprising a </a:t>
                 </a:r>
                 <a:r>
                   <a:rPr lang="en-US" i="1" dirty="0">
@@ -14244,7 +10570,7 @@
                           <a:rPr lang="en-US" b="0" i="1" smtClean="0">
                             <a:latin typeface="Cambria Math" panose="02040503050406030204" pitchFamily="18" charset="0"/>
                           </a:rPr>
-                          <m:t>𝑂𝐷𝐸</m:t>
+                          <m:t>𝑜𝑑𝑒</m:t>
                         </m:r>
                       </m:sub>
                     </m:sSub>
@@ -14261,7 +10587,7 @@
                           <a:rPr lang="en-US" b="0" i="1" smtClean="0">
                             <a:latin typeface="Cambria Math" panose="02040503050406030204" pitchFamily="18" charset="0"/>
                           </a:rPr>
-                          <m:t>𝜃</m:t>
+                          <m:t>𝜔</m:t>
                         </m:r>
                       </m:e>
                     </m:d>
@@ -14269,7 +10595,7 @@
                 </a14:m>
                 <a:r>
                   <a:rPr lang="en-US" dirty="0"/>
-                  <a:t> 	imposes an ODE-based constraint;</a:t>
+                  <a:t> 	imposes physics constraint, via ODE;</a:t>
                 </a:r>
                 <a:br>
                   <a:rPr lang="en-US" dirty="0"/>
@@ -14308,7 +10634,7 @@
                           <a:rPr lang="en-US" b="0" i="1" smtClean="0">
                             <a:latin typeface="Cambria Math" panose="02040503050406030204" pitchFamily="18" charset="0"/>
                           </a:rPr>
-                          <m:t>𝐶</m:t>
+                          <m:t>𝑖𝑛𝑖𝑡</m:t>
                         </m:r>
                       </m:sub>
                     </m:sSub>
@@ -14325,7 +10651,7 @@
                           <a:rPr lang="en-US" b="0" i="1" smtClean="0">
                             <a:latin typeface="Cambria Math" panose="02040503050406030204" pitchFamily="18" charset="0"/>
                           </a:rPr>
-                          <m:t>𝜃</m:t>
+                          <m:t>𝜔</m:t>
                         </m:r>
                       </m:e>
                     </m:d>
@@ -14333,7 +10659,7 @@
                 </a14:m>
                 <a:r>
                   <a:rPr lang="en-US" dirty="0"/>
-                  <a:t>		imposes initial/boundary conditions,</a:t>
+                  <a:t>	imposes initial/boundary conditions,</a:t>
                 </a:r>
                 <a:br>
                   <a:rPr lang="en-US" dirty="0"/>
@@ -14369,10 +10695,10 @@
                       </m:e>
                       <m:sub>
                         <m:r>
-                          <a:rPr lang="en-US" i="1">
+                          <a:rPr lang="en-US" b="0" i="1" smtClean="0">
                             <a:latin typeface="Cambria Math" panose="02040503050406030204" pitchFamily="18" charset="0"/>
                           </a:rPr>
-                          <m:t>𝐷</m:t>
+                          <m:t>𝑑𝑎𝑡𝑎</m:t>
                         </m:r>
                       </m:sub>
                     </m:sSub>
@@ -14386,10 +10712,10 @@
                       </m:dPr>
                       <m:e>
                         <m:r>
-                          <a:rPr lang="en-US" i="1">
+                          <a:rPr lang="en-US" b="0" i="1" smtClean="0">
                             <a:latin typeface="Cambria Math" panose="02040503050406030204" pitchFamily="18" charset="0"/>
                           </a:rPr>
-                          <m:t>𝜃</m:t>
+                          <m:t>𝜔</m:t>
                         </m:r>
                       </m:e>
                     </m:d>
@@ -14397,7 +10723,7 @@
                 </a14:m>
                 <a:r>
                   <a:rPr lang="en-US" dirty="0"/>
-                  <a:t>		imposes constraints provided by data.</a:t>
+                  <a:t>	imposes constraints provided by data.</a:t>
                 </a:r>
               </a:p>
               <a:p>
@@ -14428,10 +10754,14 @@
               </p:nvPr>
             </p:nvSpPr>
             <p:spPr>
+              <a:xfrm>
+                <a:off x="711200" y="1295400"/>
+                <a:ext cx="7899400" cy="4819650"/>
+              </a:xfrm>
               <a:blipFill>
                 <a:blip r:embed="rId2"/>
                 <a:stretch>
-                  <a:fillRect l="-1142" t="-1316"/>
+                  <a:fillRect l="-1124" t="-1316"/>
                 </a:stretch>
               </a:blipFill>
             </p:spPr>
@@ -14520,22 +10850,18 @@
           <a:lstStyle/>
           <a:p>
             <a:r>
-              <a:rPr lang="en-US" dirty="0"/>
-              <a:t>PINNs: </a:t>
-            </a:r>
-            <a:r>
               <a:rPr lang="en-US" dirty="0">
                 <a:solidFill>
-                  <a:schemeClr val="accent1"/>
+                  <a:srgbClr val="0033CC"/>
                 </a:solidFill>
               </a:rPr>
-              <a:t>Basic Idea</a:t>
+              <a:t>Basic Idea (2)</a:t>
             </a:r>
           </a:p>
         </p:txBody>
       </p:sp>
-      <mc:AlternateContent xmlns:mc="http://schemas.openxmlformats.org/markup-compatibility/2006">
-        <mc:Choice xmlns:a14="http://schemas.microsoft.com/office/drawing/2010/main" Requires="a14">
+      <mc:AlternateContent xmlns:mc="http://schemas.openxmlformats.org/markup-compatibility/2006" xmlns:a14="http://schemas.microsoft.com/office/drawing/2010/main">
+        <mc:Choice Requires="a14">
           <p:sp>
             <p:nvSpPr>
               <p:cNvPr id="8" name="Content Placeholder 7">
@@ -14564,9 +10890,6 @@
                   <a:rPr lang="en-US" dirty="0"/>
                   <a:t>The overall average loss function is a weighted sum of </a:t>
                 </a:r>
-                <a:br>
-                  <a:rPr lang="en-US" dirty="0"/>
-                </a:br>
                 <a:endParaRPr lang="en-US" b="0" i="1" dirty="0">
                   <a:latin typeface="Cambria Math" panose="02040503050406030204" pitchFamily="18" charset="0"/>
                 </a:endParaRPr>
@@ -14602,7 +10925,7 @@
                             <a:rPr lang="en-US" b="0" i="1" smtClean="0">
                               <a:latin typeface="Cambria Math" panose="02040503050406030204" pitchFamily="18" charset="0"/>
                             </a:rPr>
-                            <m:t>𝑂𝐷𝐸</m:t>
+                            <m:t>𝑜𝑑𝑒</m:t>
                           </m:r>
                         </m:sub>
                       </m:sSub>
@@ -14619,7 +10942,7 @@
                             <a:rPr lang="en-US" b="0" i="1" smtClean="0">
                               <a:latin typeface="Cambria Math" panose="02040503050406030204" pitchFamily="18" charset="0"/>
                             </a:rPr>
-                            <m:t>𝜃</m:t>
+                            <m:t>𝜔</m:t>
                           </m:r>
                         </m:e>
                       </m:d>
@@ -14667,7 +10990,7 @@
                                 <a:rPr lang="en-US" b="0" i="1" smtClean="0">
                                   <a:latin typeface="Cambria Math" panose="02040503050406030204" pitchFamily="18" charset="0"/>
                                 </a:rPr>
-                                <m:t>𝑂𝐷𝐸</m:t>
+                                <m:t>𝑜𝑑𝑒</m:t>
                               </m:r>
                             </m:sub>
                           </m:sSub>
@@ -14721,7 +11044,7 @@
                                 <a:rPr lang="en-US" b="0" i="1" smtClean="0">
                                   <a:latin typeface="Cambria Math" panose="02040503050406030204" pitchFamily="18" charset="0"/>
                                 </a:rPr>
-                                <m:t>𝑂𝐷𝐸</m:t>
+                                <m:t>𝑜𝑑𝑒</m:t>
                               </m:r>
                             </m:sub>
                           </m:sSub>
@@ -14730,141 +11053,24 @@
                           <m:sSup>
                             <m:sSupPr>
                               <m:ctrlPr>
-                                <a:rPr lang="en-US" b="0" i="1" smtClean="0">
+                                <a:rPr lang="en-US" i="1">
                                   <a:latin typeface="Cambria Math" panose="02040503050406030204" pitchFamily="18" charset="0"/>
                                   <a:ea typeface="Cambria Math" panose="02040503050406030204" pitchFamily="18" charset="0"/>
                                 </a:rPr>
                               </m:ctrlPr>
                             </m:sSupPr>
                             <m:e>
-                              <m:d>
-                                <m:dPr>
-                                  <m:begChr m:val="["/>
-                                  <m:endChr m:val="]"/>
-                                  <m:ctrlPr>
-                                    <a:rPr lang="en-US" i="1">
-                                      <a:latin typeface="Cambria Math" panose="02040503050406030204" pitchFamily="18" charset="0"/>
-                                    </a:rPr>
-                                  </m:ctrlPr>
-                                </m:dPr>
-                                <m:e>
-                                  <m:r>
-                                    <a:rPr lang="en-US" i="1">
-                                      <a:latin typeface="Cambria Math" panose="02040503050406030204" pitchFamily="18" charset="0"/>
-                                      <a:ea typeface="Cambria Math" panose="02040503050406030204" pitchFamily="18" charset="0"/>
-                                    </a:rPr>
-                                    <m:t>ℱ</m:t>
-                                  </m:r>
-                                  <m:d>
-                                    <m:dPr>
-                                      <m:ctrlPr>
-                                        <a:rPr lang="en-US" i="1">
-                                          <a:latin typeface="Cambria Math" panose="02040503050406030204" pitchFamily="18" charset="0"/>
-                                          <a:ea typeface="Cambria Math" panose="02040503050406030204" pitchFamily="18" charset="0"/>
-                                        </a:rPr>
-                                      </m:ctrlPr>
-                                    </m:dPr>
-                                    <m:e>
-                                      <m:sSub>
-                                        <m:sSubPr>
-                                          <m:ctrlPr>
-                                            <a:rPr lang="en-US" b="0" i="1" smtClean="0">
-                                              <a:latin typeface="Cambria Math" panose="02040503050406030204" pitchFamily="18" charset="0"/>
-                                            </a:rPr>
-                                          </m:ctrlPr>
-                                        </m:sSubPr>
-                                        <m:e>
-                                          <m:r>
-                                            <a:rPr lang="en-US" i="1">
-                                              <a:latin typeface="Cambria Math" panose="02040503050406030204" pitchFamily="18" charset="0"/>
-                                            </a:rPr>
-                                            <m:t>𝑓</m:t>
-                                          </m:r>
-                                        </m:e>
-                                        <m:sub>
-                                          <m:r>
-                                            <a:rPr lang="en-US" b="0" i="1" smtClean="0">
-                                              <a:latin typeface="Cambria Math" panose="02040503050406030204" pitchFamily="18" charset="0"/>
-                                            </a:rPr>
-                                            <m:t>𝜔</m:t>
-                                          </m:r>
-                                        </m:sub>
-                                      </m:sSub>
-                                      <m:d>
-                                        <m:dPr>
-                                          <m:ctrlPr>
-                                            <a:rPr lang="en-US" i="1">
-                                              <a:latin typeface="Cambria Math" panose="02040503050406030204" pitchFamily="18" charset="0"/>
-                                            </a:rPr>
-                                          </m:ctrlPr>
-                                        </m:dPr>
-                                        <m:e>
-                                          <m:sSub>
-                                            <m:sSubPr>
-                                              <m:ctrlPr>
-                                                <a:rPr lang="en-US" i="1">
-                                                  <a:latin typeface="Cambria Math" panose="02040503050406030204" pitchFamily="18" charset="0"/>
-                                                </a:rPr>
-                                              </m:ctrlPr>
-                                            </m:sSubPr>
-                                            <m:e>
-                                              <m:sSub>
-                                                <m:sSubPr>
-                                                  <m:ctrlPr>
-                                                    <a:rPr lang="en-US" b="0" i="1" smtClean="0">
-                                                      <a:latin typeface="Cambria Math" panose="02040503050406030204" pitchFamily="18" charset="0"/>
-                                                    </a:rPr>
-                                                  </m:ctrlPr>
-                                                </m:sSubPr>
-                                                <m:e>
-                                                  <m:r>
-                                                    <a:rPr lang="en-US" b="0" i="1" smtClean="0">
-                                                      <a:latin typeface="Cambria Math" panose="02040503050406030204" pitchFamily="18" charset="0"/>
-                                                    </a:rPr>
-                                                    <m:t>𝑧</m:t>
-                                                  </m:r>
-                                                </m:e>
-                                                <m:sub>
-                                                  <m:r>
-                                                    <a:rPr lang="en-US" b="0" i="1" smtClean="0">
-                                                      <a:latin typeface="Cambria Math" panose="02040503050406030204" pitchFamily="18" charset="0"/>
-                                                    </a:rPr>
-                                                    <m:t>𝑖</m:t>
-                                                  </m:r>
-                                                </m:sub>
-                                              </m:sSub>
-                                              <m:r>
-                                                <a:rPr lang="en-US" b="0" i="1" smtClean="0">
-                                                  <a:latin typeface="Cambria Math" panose="02040503050406030204" pitchFamily="18" charset="0"/>
-                                                </a:rPr>
-                                                <m:t>, </m:t>
-                                              </m:r>
-                                              <m:r>
-                                                <a:rPr lang="en-US" b="0" i="1" smtClean="0">
-                                                  <a:latin typeface="Cambria Math" panose="02040503050406030204" pitchFamily="18" charset="0"/>
-                                                </a:rPr>
-                                                <m:t>𝑝</m:t>
-                                              </m:r>
-                                            </m:e>
-                                            <m:sub>
-                                              <m:r>
-                                                <a:rPr lang="en-US" i="1">
-                                                  <a:latin typeface="Cambria Math" panose="02040503050406030204" pitchFamily="18" charset="0"/>
-                                                </a:rPr>
-                                                <m:t>𝑖</m:t>
-                                              </m:r>
-                                            </m:sub>
-                                          </m:sSub>
-                                        </m:e>
-                                      </m:d>
-                                    </m:e>
-                                  </m:d>
-                                </m:e>
-                              </m:d>
+                              <m:r>
+                                <a:rPr lang="en-US" i="1">
+                                  <a:latin typeface="Cambria Math" panose="02040503050406030204" pitchFamily="18" charset="0"/>
+                                  <a:ea typeface="Cambria Math" panose="02040503050406030204" pitchFamily="18" charset="0"/>
+                                </a:rPr>
+                                <m:t>ℱ</m:t>
+                              </m:r>
                             </m:e>
                             <m:sup>
                               <m:r>
-                                <a:rPr lang="en-US" b="0" i="1" smtClean="0">
+                                <a:rPr lang="en-US" i="1">
                                   <a:latin typeface="Cambria Math" panose="02040503050406030204" pitchFamily="18" charset="0"/>
                                   <a:ea typeface="Cambria Math" panose="02040503050406030204" pitchFamily="18" charset="0"/>
                                 </a:rPr>
@@ -14872,72 +11078,14 @@
                               </m:r>
                             </m:sup>
                           </m:sSup>
-                        </m:e>
-                      </m:nary>
-                    </m:oMath>
-                    <m:oMath xmlns:m="http://schemas.openxmlformats.org/officeDocument/2006/math">
-                      <m:sSub>
-                        <m:sSubPr>
-                          <m:ctrlPr>
-                            <a:rPr lang="en-US" b="0" i="1" smtClean="0">
-                              <a:latin typeface="Cambria Math" panose="02040503050406030204" pitchFamily="18" charset="0"/>
-                            </a:rPr>
-                          </m:ctrlPr>
-                        </m:sSubPr>
-                        <m:e>
-                          <m:r>
-                            <a:rPr lang="en-US" b="0" i="1" smtClean="0">
-                              <a:latin typeface="Cambria Math" panose="02040503050406030204" pitchFamily="18" charset="0"/>
-                            </a:rPr>
-                            <m:t>𝑅</m:t>
-                          </m:r>
-                        </m:e>
-                        <m:sub>
-                          <m:r>
-                            <a:rPr lang="en-US" b="0" i="1" smtClean="0">
-                              <a:latin typeface="Cambria Math" panose="02040503050406030204" pitchFamily="18" charset="0"/>
-                            </a:rPr>
-                            <m:t>𝐶</m:t>
-                          </m:r>
-                        </m:sub>
-                      </m:sSub>
-                      <m:d>
-                        <m:dPr>
-                          <m:ctrlPr>
-                            <a:rPr lang="en-US" b="0" i="1" smtClean="0">
-                              <a:latin typeface="Cambria Math" panose="02040503050406030204" pitchFamily="18" charset="0"/>
-                            </a:rPr>
-                          </m:ctrlPr>
-                        </m:dPr>
-                        <m:e>
-                          <m:r>
-                            <a:rPr lang="en-US" b="0" i="1" smtClean="0">
-                              <a:latin typeface="Cambria Math" panose="02040503050406030204" pitchFamily="18" charset="0"/>
-                            </a:rPr>
-                            <m:t>𝜃</m:t>
-                          </m:r>
-                        </m:e>
-                      </m:d>
-                      <m:r>
-                        <a:rPr lang="en-US" b="0" i="1" smtClean="0">
-                          <a:latin typeface="Cambria Math" panose="02040503050406030204" pitchFamily="18" charset="0"/>
-                        </a:rPr>
-                        <m:t>=</m:t>
-                      </m:r>
-                      <m:sSup>
-                        <m:sSupPr>
-                          <m:ctrlPr>
-                            <a:rPr lang="en-US" i="1">
-                              <a:latin typeface="Cambria Math" panose="02040503050406030204" pitchFamily="18" charset="0"/>
-                            </a:rPr>
-                          </m:ctrlPr>
-                        </m:sSupPr>
-                        <m:e>
                           <m:d>
                             <m:dPr>
+                              <m:begChr m:val="["/>
+                              <m:endChr m:val="]"/>
                               <m:ctrlPr>
-                                <a:rPr lang="en-US" i="1">
+                                <a:rPr lang="en-US" i="1" smtClean="0">
                                   <a:latin typeface="Cambria Math" panose="02040503050406030204" pitchFamily="18" charset="0"/>
+                                  <a:ea typeface="Cambria Math" panose="02040503050406030204" pitchFamily="18" charset="0"/>
                                 </a:rPr>
                               </m:ctrlPr>
                             </m:dPr>
@@ -14976,12 +11124,6 @@
                                   </m:ctrlPr>
                                 </m:dPr>
                                 <m:e>
-                                  <m:r>
-                                    <a:rPr lang="en-US" i="1">
-                                      <a:latin typeface="Cambria Math" panose="02040503050406030204" pitchFamily="18" charset="0"/>
-                                    </a:rPr>
-                                    <m:t>0, </m:t>
-                                  </m:r>
                                   <m:sSub>
                                     <m:sSubPr>
                                       <m:ctrlPr>
@@ -14991,6 +11133,37 @@
                                       </m:ctrlPr>
                                     </m:sSubPr>
                                     <m:e>
+                                      <m:sSub>
+                                        <m:sSubPr>
+                                          <m:ctrlPr>
+                                            <a:rPr lang="en-US" i="1">
+                                              <a:latin typeface="Cambria Math" panose="02040503050406030204" pitchFamily="18" charset="0"/>
+                                            </a:rPr>
+                                          </m:ctrlPr>
+                                        </m:sSubPr>
+                                        <m:e>
+                                          <m:r>
+                                            <a:rPr lang="en-US" i="1">
+                                              <a:latin typeface="Cambria Math" panose="02040503050406030204" pitchFamily="18" charset="0"/>
+                                            </a:rPr>
+                                            <m:t>𝑧</m:t>
+                                          </m:r>
+                                        </m:e>
+                                        <m:sub>
+                                          <m:r>
+                                            <a:rPr lang="en-US" i="1">
+                                              <a:latin typeface="Cambria Math" panose="02040503050406030204" pitchFamily="18" charset="0"/>
+                                            </a:rPr>
+                                            <m:t>𝑖</m:t>
+                                          </m:r>
+                                        </m:sub>
+                                      </m:sSub>
+                                      <m:r>
+                                        <a:rPr lang="en-US" i="1">
+                                          <a:latin typeface="Cambria Math" panose="02040503050406030204" pitchFamily="18" charset="0"/>
+                                        </a:rPr>
+                                        <m:t>, </m:t>
+                                      </m:r>
                                       <m:r>
                                         <a:rPr lang="en-US" i="1">
                                           <a:latin typeface="Cambria Math" panose="02040503050406030204" pitchFamily="18" charset="0"/>
@@ -15009,68 +11182,160 @@
                                   </m:sSub>
                                 </m:e>
                               </m:d>
-                              <m:r>
-                                <a:rPr lang="en-US" i="1">
-                                  <a:latin typeface="Cambria Math" panose="02040503050406030204" pitchFamily="18" charset="0"/>
-                                </a:rPr>
-                                <m:t>−</m:t>
-                              </m:r>
-                              <m:sSub>
-                                <m:sSubPr>
-                                  <m:ctrlPr>
-                                    <a:rPr lang="en-US" i="1">
-                                      <a:latin typeface="Cambria Math" panose="02040503050406030204" pitchFamily="18" charset="0"/>
-                                    </a:rPr>
-                                  </m:ctrlPr>
-                                </m:sSubPr>
-                                <m:e>
-                                  <m:r>
-                                    <a:rPr lang="en-US" b="0" i="1" smtClean="0">
-                                      <a:latin typeface="Cambria Math" panose="02040503050406030204" pitchFamily="18" charset="0"/>
-                                    </a:rPr>
-                                    <m:t>𝑥</m:t>
-                                  </m:r>
-                                </m:e>
-                                <m:sub>
-                                  <m:r>
-                                    <a:rPr lang="en-US" i="1">
-                                      <a:latin typeface="Cambria Math" panose="02040503050406030204" pitchFamily="18" charset="0"/>
-                                    </a:rPr>
-                                    <m:t>0</m:t>
-                                  </m:r>
-                                </m:sub>
-                              </m:sSub>
                             </m:e>
                           </m:d>
                         </m:e>
-                        <m:sup>
-                          <m:r>
-                            <a:rPr lang="en-US" i="1">
-                              <a:latin typeface="Cambria Math" panose="02040503050406030204" pitchFamily="18" charset="0"/>
-                            </a:rPr>
-                            <m:t>2</m:t>
-                          </m:r>
-                        </m:sup>
-                      </m:sSup>
-                      <m:r>
-                        <a:rPr lang="en-US" b="0" i="1" smtClean="0">
-                          <a:latin typeface="Cambria Math" panose="02040503050406030204" pitchFamily="18" charset="0"/>
-                        </a:rPr>
-                        <m:t>+</m:t>
-                      </m:r>
-                      <m:sSup>
-                        <m:sSupPr>
+                      </m:nary>
+                    </m:oMath>
+                    <m:oMath xmlns:m="http://schemas.openxmlformats.org/officeDocument/2006/math">
+                      <m:sSub>
+                        <m:sSubPr>
                           <m:ctrlPr>
                             <a:rPr lang="en-US" b="0" i="1" smtClean="0">
                               <a:latin typeface="Cambria Math" panose="02040503050406030204" pitchFamily="18" charset="0"/>
                             </a:rPr>
                           </m:ctrlPr>
-                        </m:sSupPr>
+                        </m:sSubPr>
+                        <m:e>
+                          <m:r>
+                            <a:rPr lang="en-US" b="0" i="1" smtClean="0">
+                              <a:latin typeface="Cambria Math" panose="02040503050406030204" pitchFamily="18" charset="0"/>
+                            </a:rPr>
+                            <m:t>𝑅</m:t>
+                          </m:r>
+                        </m:e>
+                        <m:sub>
+                          <m:r>
+                            <a:rPr lang="en-US" b="0" i="1" smtClean="0">
+                              <a:latin typeface="Cambria Math" panose="02040503050406030204" pitchFamily="18" charset="0"/>
+                            </a:rPr>
+                            <m:t>𝑖𝑛𝑖𝑡</m:t>
+                          </m:r>
+                        </m:sub>
+                      </m:sSub>
+                      <m:d>
+                        <m:dPr>
+                          <m:ctrlPr>
+                            <a:rPr lang="en-US" b="0" i="1" smtClean="0">
+                              <a:latin typeface="Cambria Math" panose="02040503050406030204" pitchFamily="18" charset="0"/>
+                            </a:rPr>
+                          </m:ctrlPr>
+                        </m:dPr>
+                        <m:e>
+                          <m:r>
+                            <a:rPr lang="en-US" b="0" i="1" smtClean="0">
+                              <a:latin typeface="Cambria Math" panose="02040503050406030204" pitchFamily="18" charset="0"/>
+                            </a:rPr>
+                            <m:t>𝜔</m:t>
+                          </m:r>
+                        </m:e>
+                      </m:d>
+                      <m:r>
+                        <a:rPr lang="en-US" b="0" i="1" smtClean="0">
+                          <a:latin typeface="Cambria Math" panose="02040503050406030204" pitchFamily="18" charset="0"/>
+                        </a:rPr>
+                        <m:t>=</m:t>
+                      </m:r>
+                      <m:f>
+                        <m:fPr>
+                          <m:ctrlPr>
+                            <a:rPr lang="en-US" i="1">
+                              <a:latin typeface="Cambria Math" panose="02040503050406030204" pitchFamily="18" charset="0"/>
+                            </a:rPr>
+                          </m:ctrlPr>
+                        </m:fPr>
+                        <m:num>
+                          <m:r>
+                            <a:rPr lang="en-US" i="1">
+                              <a:latin typeface="Cambria Math" panose="02040503050406030204" pitchFamily="18" charset="0"/>
+                            </a:rPr>
+                            <m:t>1</m:t>
+                          </m:r>
+                        </m:num>
+                        <m:den>
+                          <m:sSub>
+                            <m:sSubPr>
+                              <m:ctrlPr>
+                                <a:rPr lang="en-US" i="1">
+                                  <a:latin typeface="Cambria Math" panose="02040503050406030204" pitchFamily="18" charset="0"/>
+                                </a:rPr>
+                              </m:ctrlPr>
+                            </m:sSubPr>
+                            <m:e>
+                              <m:r>
+                                <a:rPr lang="en-US" i="1">
+                                  <a:latin typeface="Cambria Math" panose="02040503050406030204" pitchFamily="18" charset="0"/>
+                                </a:rPr>
+                                <m:t>𝑁</m:t>
+                              </m:r>
+                            </m:e>
+                            <m:sub>
+                              <m:r>
+                                <a:rPr lang="en-US" b="0" i="1" smtClean="0">
+                                  <a:latin typeface="Cambria Math" panose="02040503050406030204" pitchFamily="18" charset="0"/>
+                                </a:rPr>
+                                <m:t>𝑖𝑛𝑖𝑡</m:t>
+                              </m:r>
+                            </m:sub>
+                          </m:sSub>
+                        </m:den>
+                      </m:f>
+                      <m:nary>
+                        <m:naryPr>
+                          <m:chr m:val="∑"/>
+                          <m:ctrlPr>
+                            <a:rPr lang="en-US" b="0" i="1" smtClean="0">
+                              <a:latin typeface="Cambria Math" panose="02040503050406030204" pitchFamily="18" charset="0"/>
+                            </a:rPr>
+                          </m:ctrlPr>
+                        </m:naryPr>
+                        <m:sub>
+                          <m:r>
+                            <m:rPr>
+                              <m:brk m:alnAt="23"/>
+                            </m:rPr>
+                            <a:rPr lang="en-US" b="0" i="1" smtClean="0">
+                              <a:latin typeface="Cambria Math" panose="02040503050406030204" pitchFamily="18" charset="0"/>
+                            </a:rPr>
+                            <m:t>𝑖</m:t>
+                          </m:r>
+                          <m:r>
+                            <a:rPr lang="en-US" b="0" i="1" smtClean="0">
+                              <a:latin typeface="Cambria Math" panose="02040503050406030204" pitchFamily="18" charset="0"/>
+                            </a:rPr>
+                            <m:t>=1</m:t>
+                          </m:r>
+                        </m:sub>
+                        <m:sup>
+                          <m:sSub>
+                            <m:sSubPr>
+                              <m:ctrlPr>
+                                <a:rPr lang="en-US" b="0" i="1" smtClean="0">
+                                  <a:latin typeface="Cambria Math" panose="02040503050406030204" pitchFamily="18" charset="0"/>
+                                </a:rPr>
+                              </m:ctrlPr>
+                            </m:sSubPr>
+                            <m:e>
+                              <m:r>
+                                <a:rPr lang="en-US" b="0" i="1" smtClean="0">
+                                  <a:latin typeface="Cambria Math" panose="02040503050406030204" pitchFamily="18" charset="0"/>
+                                </a:rPr>
+                                <m:t>𝑁</m:t>
+                              </m:r>
+                            </m:e>
+                            <m:sub>
+                              <m:r>
+                                <a:rPr lang="en-US" b="0" i="1" smtClean="0">
+                                  <a:latin typeface="Cambria Math" panose="02040503050406030204" pitchFamily="18" charset="0"/>
+                                </a:rPr>
+                                <m:t>𝑖𝑛𝑖𝑡</m:t>
+                              </m:r>
+                            </m:sub>
+                          </m:sSub>
+                        </m:sup>
                         <m:e>
                           <m:d>
                             <m:dPr>
-                              <m:begChr m:val="["/>
-                              <m:endChr m:val="]"/>
                               <m:ctrlPr>
                                 <a:rPr lang="en-US" b="0" i="1" smtClean="0">
                                   <a:latin typeface="Cambria Math" panose="02040503050406030204" pitchFamily="18" charset="0"/>
@@ -15078,46 +11343,15 @@
                               </m:ctrlPr>
                             </m:dPr>
                             <m:e>
-                              <m:f>
-                                <m:fPr>
+                              <m:sSup>
+                                <m:sSupPr>
                                   <m:ctrlPr>
                                     <a:rPr lang="en-US" i="1">
                                       <a:latin typeface="Cambria Math" panose="02040503050406030204" pitchFamily="18" charset="0"/>
                                     </a:rPr>
                                   </m:ctrlPr>
-                                </m:fPr>
-                                <m:num>
-                                  <m:r>
-                                    <a:rPr lang="en-US" i="1">
-                                      <a:latin typeface="Cambria Math" panose="02040503050406030204" pitchFamily="18" charset="0"/>
-                                    </a:rPr>
-                                    <m:t>𝑑</m:t>
-                                  </m:r>
-                                  <m:sSub>
-                                    <m:sSubPr>
-                                      <m:ctrlPr>
-                                        <a:rPr lang="en-US" i="1">
-                                          <a:latin typeface="Cambria Math" panose="02040503050406030204" pitchFamily="18" charset="0"/>
-                                        </a:rPr>
-                                      </m:ctrlPr>
-                                    </m:sSubPr>
-                                    <m:e>
-                                      <m:r>
-                                        <a:rPr lang="en-US" i="1">
-                                          <a:latin typeface="Cambria Math" panose="02040503050406030204" pitchFamily="18" charset="0"/>
-                                        </a:rPr>
-                                        <m:t>𝑓</m:t>
-                                      </m:r>
-                                    </m:e>
-                                    <m:sub>
-                                      <m:r>
-                                        <a:rPr lang="en-US" i="1">
-                                          <a:latin typeface="Cambria Math" panose="02040503050406030204" pitchFamily="18" charset="0"/>
-                                        </a:rPr>
-                                        <m:t>𝜔</m:t>
-                                      </m:r>
-                                    </m:sub>
-                                  </m:sSub>
+                                </m:sSupPr>
+                                <m:e>
                                   <m:d>
                                     <m:dPr>
                                       <m:ctrlPr>
@@ -15127,11 +11361,78 @@
                                       </m:ctrlPr>
                                     </m:dPr>
                                     <m:e>
+                                      <m:sSub>
+                                        <m:sSubPr>
+                                          <m:ctrlPr>
+                                            <a:rPr lang="en-US" i="1">
+                                              <a:latin typeface="Cambria Math" panose="02040503050406030204" pitchFamily="18" charset="0"/>
+                                            </a:rPr>
+                                          </m:ctrlPr>
+                                        </m:sSubPr>
+                                        <m:e>
+                                          <m:r>
+                                            <a:rPr lang="en-US" i="1">
+                                              <a:latin typeface="Cambria Math" panose="02040503050406030204" pitchFamily="18" charset="0"/>
+                                            </a:rPr>
+                                            <m:t>𝑓</m:t>
+                                          </m:r>
+                                        </m:e>
+                                        <m:sub>
+                                          <m:r>
+                                            <a:rPr lang="en-US" i="1">
+                                              <a:latin typeface="Cambria Math" panose="02040503050406030204" pitchFamily="18" charset="0"/>
+                                            </a:rPr>
+                                            <m:t>𝜔</m:t>
+                                          </m:r>
+                                        </m:sub>
+                                      </m:sSub>
+                                      <m:d>
+                                        <m:dPr>
+                                          <m:ctrlPr>
+                                            <a:rPr lang="en-US" i="1">
+                                              <a:latin typeface="Cambria Math" panose="02040503050406030204" pitchFamily="18" charset="0"/>
+                                            </a:rPr>
+                                          </m:ctrlPr>
+                                        </m:dPr>
+                                        <m:e>
+                                          <m:r>
+                                            <a:rPr lang="en-US" i="1">
+                                              <a:latin typeface="Cambria Math" panose="02040503050406030204" pitchFamily="18" charset="0"/>
+                                            </a:rPr>
+                                            <m:t>0, </m:t>
+                                          </m:r>
+                                          <m:sSub>
+                                            <m:sSubPr>
+                                              <m:ctrlPr>
+                                                <a:rPr lang="en-US" i="1">
+                                                  <a:latin typeface="Cambria Math" panose="02040503050406030204" pitchFamily="18" charset="0"/>
+                                                </a:rPr>
+                                              </m:ctrlPr>
+                                            </m:sSubPr>
+                                            <m:e>
+                                              <m:r>
+                                                <a:rPr lang="en-US" i="1">
+                                                  <a:latin typeface="Cambria Math" panose="02040503050406030204" pitchFamily="18" charset="0"/>
+                                                </a:rPr>
+                                                <m:t>𝑝</m:t>
+                                              </m:r>
+                                            </m:e>
+                                            <m:sub>
+                                              <m:r>
+                                                <a:rPr lang="en-US" i="1">
+                                                  <a:latin typeface="Cambria Math" panose="02040503050406030204" pitchFamily="18" charset="0"/>
+                                                </a:rPr>
+                                                <m:t>𝑖</m:t>
+                                              </m:r>
+                                            </m:sub>
+                                          </m:sSub>
+                                        </m:e>
+                                      </m:d>
                                       <m:r>
                                         <a:rPr lang="en-US" i="1">
                                           <a:latin typeface="Cambria Math" panose="02040503050406030204" pitchFamily="18" charset="0"/>
                                         </a:rPr>
-                                        <m:t>0,  </m:t>
+                                        <m:t>−</m:t>
                                       </m:r>
                                       <m:sSub>
                                         <m:sSubPr>
@@ -15146,12 +11447,24 @@
                                             <a:rPr lang="en-US" i="1">
                                               <a:latin typeface="Cambria Math" panose="02040503050406030204" pitchFamily="18" charset="0"/>
                                             </a:rPr>
-                                            <m:t>𝑝</m:t>
+                                            <m:t>𝑥</m:t>
                                           </m:r>
                                         </m:e>
                                         <m:sub>
                                           <m:r>
                                             <a:rPr lang="en-US" i="1">
+                                              <a:latin typeface="Cambria Math" panose="02040503050406030204" pitchFamily="18" charset="0"/>
+                                            </a:rPr>
+                                            <m:t>0</m:t>
+                                          </m:r>
+                                          <m:r>
+                                            <a:rPr lang="en-US" b="0" i="1" smtClean="0">
+                                              <a:latin typeface="Cambria Math" panose="02040503050406030204" pitchFamily="18" charset="0"/>
+                                            </a:rPr>
+                                            <m:t>,</m:t>
+                                          </m:r>
+                                          <m:r>
+                                            <a:rPr lang="en-US" b="0" i="1" smtClean="0">
                                               <a:latin typeface="Cambria Math" panose="02040503050406030204" pitchFamily="18" charset="0"/>
                                             </a:rPr>
                                             <m:t>𝑖</m:t>
@@ -15160,59 +11473,193 @@
                                       </m:sSub>
                                     </m:e>
                                   </m:d>
-                                </m:num>
-                                <m:den>
+                                </m:e>
+                                <m:sup>
                                   <m:r>
                                     <a:rPr lang="en-US" i="1">
                                       <a:latin typeface="Cambria Math" panose="02040503050406030204" pitchFamily="18" charset="0"/>
                                     </a:rPr>
-                                    <m:t>𝑑𝑧</m:t>
+                                    <m:t>2</m:t>
                                   </m:r>
-                                </m:den>
-                              </m:f>
+                                </m:sup>
+                              </m:sSup>
                               <m:r>
                                 <a:rPr lang="en-US" i="1">
                                   <a:latin typeface="Cambria Math" panose="02040503050406030204" pitchFamily="18" charset="0"/>
                                 </a:rPr>
-                                <m:t>−</m:t>
+                                <m:t>+</m:t>
                               </m:r>
-                              <m:sSub>
-                                <m:sSubPr>
+                              <m:sSup>
+                                <m:sSupPr>
                                   <m:ctrlPr>
                                     <a:rPr lang="en-US" i="1">
                                       <a:latin typeface="Cambria Math" panose="02040503050406030204" pitchFamily="18" charset="0"/>
                                     </a:rPr>
                                   </m:ctrlPr>
-                                </m:sSubPr>
+                                </m:sSupPr>
                                 <m:e>
+                                  <m:d>
+                                    <m:dPr>
+                                      <m:begChr m:val="["/>
+                                      <m:endChr m:val="]"/>
+                                      <m:ctrlPr>
+                                        <a:rPr lang="en-US" i="1">
+                                          <a:latin typeface="Cambria Math" panose="02040503050406030204" pitchFamily="18" charset="0"/>
+                                        </a:rPr>
+                                      </m:ctrlPr>
+                                    </m:dPr>
+                                    <m:e>
+                                      <m:f>
+                                        <m:fPr>
+                                          <m:ctrlPr>
+                                            <a:rPr lang="en-US" i="1">
+                                              <a:latin typeface="Cambria Math" panose="02040503050406030204" pitchFamily="18" charset="0"/>
+                                            </a:rPr>
+                                          </m:ctrlPr>
+                                        </m:fPr>
+                                        <m:num>
+                                          <m:r>
+                                            <a:rPr lang="en-US" i="1">
+                                              <a:latin typeface="Cambria Math" panose="02040503050406030204" pitchFamily="18" charset="0"/>
+                                            </a:rPr>
+                                            <m:t>𝑑</m:t>
+                                          </m:r>
+                                          <m:sSub>
+                                            <m:sSubPr>
+                                              <m:ctrlPr>
+                                                <a:rPr lang="en-US" i="1">
+                                                  <a:latin typeface="Cambria Math" panose="02040503050406030204" pitchFamily="18" charset="0"/>
+                                                </a:rPr>
+                                              </m:ctrlPr>
+                                            </m:sSubPr>
+                                            <m:e>
+                                              <m:r>
+                                                <a:rPr lang="en-US" i="1">
+                                                  <a:latin typeface="Cambria Math" panose="02040503050406030204" pitchFamily="18" charset="0"/>
+                                                </a:rPr>
+                                                <m:t>𝑓</m:t>
+                                              </m:r>
+                                            </m:e>
+                                            <m:sub>
+                                              <m:r>
+                                                <a:rPr lang="en-US" i="1">
+                                                  <a:latin typeface="Cambria Math" panose="02040503050406030204" pitchFamily="18" charset="0"/>
+                                                </a:rPr>
+                                                <m:t>𝜔</m:t>
+                                              </m:r>
+                                            </m:sub>
+                                          </m:sSub>
+                                          <m:d>
+                                            <m:dPr>
+                                              <m:ctrlPr>
+                                                <a:rPr lang="en-US" i="1">
+                                                  <a:latin typeface="Cambria Math" panose="02040503050406030204" pitchFamily="18" charset="0"/>
+                                                </a:rPr>
+                                              </m:ctrlPr>
+                                            </m:dPr>
+                                            <m:e>
+                                              <m:r>
+                                                <a:rPr lang="en-US" i="1">
+                                                  <a:latin typeface="Cambria Math" panose="02040503050406030204" pitchFamily="18" charset="0"/>
+                                                </a:rPr>
+                                                <m:t>0,  </m:t>
+                                              </m:r>
+                                              <m:sSub>
+                                                <m:sSubPr>
+                                                  <m:ctrlPr>
+                                                    <a:rPr lang="en-US" i="1">
+                                                      <a:latin typeface="Cambria Math" panose="02040503050406030204" pitchFamily="18" charset="0"/>
+                                                    </a:rPr>
+                                                  </m:ctrlPr>
+                                                </m:sSubPr>
+                                                <m:e>
+                                                  <m:r>
+                                                    <a:rPr lang="en-US" i="1">
+                                                      <a:latin typeface="Cambria Math" panose="02040503050406030204" pitchFamily="18" charset="0"/>
+                                                    </a:rPr>
+                                                    <m:t>𝑝</m:t>
+                                                  </m:r>
+                                                </m:e>
+                                                <m:sub>
+                                                  <m:r>
+                                                    <a:rPr lang="en-US" i="1">
+                                                      <a:latin typeface="Cambria Math" panose="02040503050406030204" pitchFamily="18" charset="0"/>
+                                                    </a:rPr>
+                                                    <m:t>𝑖</m:t>
+                                                  </m:r>
+                                                </m:sub>
+                                              </m:sSub>
+                                            </m:e>
+                                          </m:d>
+                                        </m:num>
+                                        <m:den>
+                                          <m:r>
+                                            <a:rPr lang="en-US" i="1">
+                                              <a:latin typeface="Cambria Math" panose="02040503050406030204" pitchFamily="18" charset="0"/>
+                                            </a:rPr>
+                                            <m:t>𝑑𝑧</m:t>
+                                          </m:r>
+                                        </m:den>
+                                      </m:f>
+                                      <m:r>
+                                        <a:rPr lang="en-US" i="1">
+                                          <a:latin typeface="Cambria Math" panose="02040503050406030204" pitchFamily="18" charset="0"/>
+                                        </a:rPr>
+                                        <m:t>−</m:t>
+                                      </m:r>
+                                      <m:sSub>
+                                        <m:sSubPr>
+                                          <m:ctrlPr>
+                                            <a:rPr lang="en-US" i="1">
+                                              <a:latin typeface="Cambria Math" panose="02040503050406030204" pitchFamily="18" charset="0"/>
+                                            </a:rPr>
+                                          </m:ctrlPr>
+                                        </m:sSubPr>
+                                        <m:e>
+                                          <m:r>
+                                            <a:rPr lang="en-US" i="1">
+                                              <a:latin typeface="Cambria Math" panose="02040503050406030204" pitchFamily="18" charset="0"/>
+                                            </a:rPr>
+                                            <m:t>𝑣</m:t>
+                                          </m:r>
+                                        </m:e>
+                                        <m:sub>
+                                          <m:r>
+                                            <a:rPr lang="en-US" i="1">
+                                              <a:latin typeface="Cambria Math" panose="02040503050406030204" pitchFamily="18" charset="0"/>
+                                            </a:rPr>
+                                            <m:t>0</m:t>
+                                          </m:r>
+                                          <m:r>
+                                            <a:rPr lang="en-US" b="0" i="1" smtClean="0">
+                                              <a:latin typeface="Cambria Math" panose="02040503050406030204" pitchFamily="18" charset="0"/>
+                                            </a:rPr>
+                                            <m:t>,</m:t>
+                                          </m:r>
+                                          <m:r>
+                                            <a:rPr lang="en-US" b="0" i="1" smtClean="0">
+                                              <a:latin typeface="Cambria Math" panose="02040503050406030204" pitchFamily="18" charset="0"/>
+                                            </a:rPr>
+                                            <m:t>𝑖</m:t>
+                                          </m:r>
+                                        </m:sub>
+                                      </m:sSub>
+                                    </m:e>
+                                  </m:d>
+                                </m:e>
+                                <m:sup>
                                   <m:r>
                                     <a:rPr lang="en-US" i="1">
                                       <a:latin typeface="Cambria Math" panose="02040503050406030204" pitchFamily="18" charset="0"/>
                                     </a:rPr>
-                                    <m:t>𝑣</m:t>
+                                    <m:t>2</m:t>
                                   </m:r>
-                                </m:e>
-                                <m:sub>
-                                  <m:r>
-                                    <a:rPr lang="en-US" i="1">
-                                      <a:latin typeface="Cambria Math" panose="02040503050406030204" pitchFamily="18" charset="0"/>
-                                    </a:rPr>
-                                    <m:t>0</m:t>
-                                  </m:r>
-                                </m:sub>
-                              </m:sSub>
+                                </m:sup>
+                              </m:sSup>
                             </m:e>
                           </m:d>
                         </m:e>
-                        <m:sup>
-                          <m:r>
-                            <a:rPr lang="en-US" b="0" i="1" smtClean="0">
-                              <a:latin typeface="Cambria Math" panose="02040503050406030204" pitchFamily="18" charset="0"/>
-                            </a:rPr>
-                            <m:t>2</m:t>
-                          </m:r>
-                        </m:sup>
-                      </m:sSup>
+                      </m:nary>
                     </m:oMath>
                   </m:oMathPara>
                 </a14:m>
@@ -15249,10 +11696,10 @@
                         </m:e>
                         <m:sub>
                           <m:r>
-                            <a:rPr lang="en-US" i="1">
+                            <a:rPr lang="en-US" b="0" i="1" smtClean="0">
                               <a:latin typeface="Cambria Math" panose="02040503050406030204" pitchFamily="18" charset="0"/>
                             </a:rPr>
-                            <m:t>𝐷</m:t>
+                            <m:t>𝑑𝑎𝑡𝑎</m:t>
                           </m:r>
                         </m:sub>
                       </m:sSub>
@@ -15266,10 +11713,10 @@
                         </m:dPr>
                         <m:e>
                           <m:r>
-                            <a:rPr lang="en-US" i="1">
+                            <a:rPr lang="en-US" b="0" i="1" smtClean="0">
                               <a:latin typeface="Cambria Math" panose="02040503050406030204" pitchFamily="18" charset="0"/>
                             </a:rPr>
-                            <m:t>𝜃</m:t>
+                            <m:t>𝜔</m:t>
                           </m:r>
                         </m:e>
                       </m:d>
@@ -15314,10 +11761,10 @@
                             </m:e>
                             <m:sub>
                               <m:r>
-                                <a:rPr lang="en-US" i="1">
+                                <a:rPr lang="en-US" b="0" i="1" smtClean="0">
                                   <a:latin typeface="Cambria Math" panose="02040503050406030204" pitchFamily="18" charset="0"/>
                                 </a:rPr>
-                                <m:t>𝐷</m:t>
+                                <m:t>𝑑𝑎𝑡𝑎</m:t>
                               </m:r>
                             </m:sub>
                           </m:sSub>
@@ -15368,10 +11815,10 @@
                             </m:e>
                             <m:sub>
                               <m:r>
-                                <a:rPr lang="en-US" i="1">
+                                <a:rPr lang="en-US" b="0" i="1" smtClean="0">
                                   <a:latin typeface="Cambria Math" panose="02040503050406030204" pitchFamily="18" charset="0"/>
                                 </a:rPr>
-                                <m:t>𝐷</m:t>
+                                <m:t>𝑑𝑎𝑡𝑎</m:t>
                               </m:r>
                             </m:sub>
                           </m:sSub>
@@ -15878,7 +12325,7 @@
             </p:txBody>
           </p:sp>
         </mc:Choice>
-        <mc:Fallback>
+        <mc:Fallback xmlns="">
           <p:sp>
             <p:nvSpPr>
               <p:cNvPr id="8" name="Content Placeholder 7">
@@ -15899,7 +12346,7 @@
               <a:blipFill>
                 <a:blip r:embed="rId2"/>
                 <a:stretch>
-                  <a:fillRect l="-1305" t="-8947" b="-15789"/>
+                  <a:fillRect l="-1305" t="-16579" b="-21579"/>
                 </a:stretch>
               </a:blipFill>
             </p:spPr>
